--- a/output/wordlabs-aero-3day.pptx
+++ b/output/wordlabs-aero-3day.pptx
@@ -4240,7 +4240,7 @@
                 <a:ea typeface="Calibri" pitchFamily="34" charset="-122"/>
                 <a:cs typeface="Calibri" pitchFamily="34" charset="-120"/>
               </a:rPr>
-              <a:t>"air, atmosphere, aircraft"</a:t>
+              <a:t>"air or aircraft"</a:t>
             </a:r>
             <a:endParaRPr lang="en-US" sz="2200" dirty="0"/>
           </a:p>
@@ -5288,7 +5288,7 @@
                 <a:ea typeface="Calibri" pitchFamily="34" charset="-122"/>
                 <a:cs typeface="Calibri" pitchFamily="34" charset="-120"/>
               </a:rPr>
-              <a:t>Word Labs  •  wordlabs.app  •  Root: 'aero' = air, atmosphere, aircraft</a:t>
+              <a:t>Word Labs  •  wordlabs.app  •  Root: 'aero' = air or aircraft</a:t>
             </a:r>
             <a:endParaRPr lang="en-US" sz="800" dirty="0"/>
           </a:p>
@@ -5928,7 +5928,7 @@
                 <a:ea typeface="Calibri" pitchFamily="34" charset="-122"/>
                 <a:cs typeface="Calibri" pitchFamily="34" charset="-120"/>
               </a:rPr>
-              <a:t>Word Labs  •  wordlabs.app  •  Root: 'aero' = air, atmosphere, aircraft</a:t>
+              <a:t>Word Labs  •  wordlabs.app  •  Root: 'aero' = air or aircraft</a:t>
             </a:r>
             <a:endParaRPr lang="en-US" sz="800" dirty="0"/>
           </a:p>
@@ -6102,7 +6102,7 @@
                 <a:ea typeface="Calibri" pitchFamily="34" charset="-122"/>
                 <a:cs typeface="Calibri" pitchFamily="34" charset="-120"/>
               </a:rPr>
-              <a:t> soared above the clouds with ease.</a:t>
+              <a:t> glided smoothly through the clear blue sky.</a:t>
             </a:r>
             <a:endParaRPr lang="en-US" sz="1800" dirty="0"/>
           </a:p>
@@ -6716,7 +6716,7 @@
                 <a:ea typeface="Calibri" pitchFamily="34" charset="-122"/>
                 <a:cs typeface="Calibri" pitchFamily="34" charset="-120"/>
               </a:rPr>
-              <a:t>Word Labs  •  wordlabs.app  •  Root: 'aero' = air, atmosphere, aircraft</a:t>
+              <a:t>Word Labs  •  wordlabs.app  •  Root: 'aero' = air or aircraft</a:t>
             </a:r>
             <a:endParaRPr lang="en-US" sz="800" dirty="0"/>
           </a:p>
@@ -7543,7 +7543,7 @@
                 <a:ea typeface="Calibri" pitchFamily="34" charset="-122"/>
                 <a:cs typeface="Calibri" pitchFamily="34" charset="-120"/>
               </a:rPr>
-              <a:t>Word Labs  •  wordlabs.app  •  Root: 'aero' = air, atmosphere, aircraft</a:t>
+              <a:t>Word Labs  •  wordlabs.app  •  Root: 'aero' = air or aircraft</a:t>
             </a:r>
             <a:endParaRPr lang="en-US" sz="800" dirty="0"/>
           </a:p>
@@ -7972,7 +7972,7 @@
                 <a:ea typeface="Calibri" pitchFamily="34" charset="-122"/>
                 <a:cs typeface="Calibri" pitchFamily="34" charset="-120"/>
               </a:rPr>
-              <a:t>power, force</a:t>
+              <a:t>power or force</a:t>
             </a:r>
             <a:endParaRPr lang="en-US" sz="850" dirty="0"/>
           </a:p>
@@ -8084,7 +8084,7 @@
                 <a:ea typeface="Calibri" pitchFamily="34" charset="-122"/>
                 <a:cs typeface="Calibri" pitchFamily="34" charset="-120"/>
               </a:rPr>
-              <a:t>relating to, having the quality of</a:t>
+              <a:t>relating to</a:t>
             </a:r>
             <a:endParaRPr lang="en-US" sz="850" dirty="0"/>
           </a:p>
@@ -8640,7 +8640,7 @@
                 <a:ea typeface="Calibri" pitchFamily="34" charset="-122"/>
                 <a:cs typeface="Calibri" pitchFamily="34" charset="-120"/>
               </a:rPr>
-              <a:t>Word Labs  •  wordlabs.app  •  Root: 'aero' = air, atmosphere, aircraft</a:t>
+              <a:t>Word Labs  •  wordlabs.app  •  Root: 'aero' = air or aircraft</a:t>
             </a:r>
             <a:endParaRPr lang="en-US" sz="800" dirty="0"/>
           </a:p>
@@ -9069,7 +9069,7 @@
                 <a:ea typeface="Calibri" pitchFamily="34" charset="-122"/>
                 <a:cs typeface="Calibri" pitchFamily="34" charset="-120"/>
               </a:rPr>
-              <a:t>power, force</a:t>
+              <a:t>power or force</a:t>
             </a:r>
             <a:endParaRPr lang="en-US" sz="850" dirty="0"/>
           </a:p>
@@ -9181,7 +9181,7 @@
                 <a:ea typeface="Calibri" pitchFamily="34" charset="-122"/>
                 <a:cs typeface="Calibri" pitchFamily="34" charset="-120"/>
               </a:rPr>
-              <a:t>relating to, having the quality of</a:t>
+              <a:t>relating to</a:t>
             </a:r>
             <a:endParaRPr lang="en-US" sz="850" dirty="0"/>
           </a:p>
@@ -9340,7 +9340,7 @@
                 <a:ea typeface="Trebuchet MS" pitchFamily="34" charset="-122"/>
                 <a:cs typeface="Trebuchet MS" pitchFamily="34" charset="-120"/>
               </a:rPr>
-              <a:t>ae</a:t>
+              <a:t>aer</a:t>
             </a:r>
             <a:endParaRPr lang="en-US" sz="1400" dirty="0"/>
           </a:p>
@@ -9445,7 +9445,7 @@
                 <a:ea typeface="Trebuchet MS" pitchFamily="34" charset="-122"/>
                 <a:cs typeface="Trebuchet MS" pitchFamily="34" charset="-120"/>
               </a:rPr>
-              <a:t>ro</a:t>
+              <a:t>o</a:t>
             </a:r>
             <a:endParaRPr lang="en-US" sz="1400" dirty="0"/>
           </a:p>
@@ -10184,7 +10184,7 @@
                 <a:ea typeface="Calibri" pitchFamily="34" charset="-122"/>
                 <a:cs typeface="Calibri" pitchFamily="34" charset="-120"/>
               </a:rPr>
-              <a:t>Word Labs  •  wordlabs.app  •  Root: 'aero' = air, atmosphere, aircraft</a:t>
+              <a:t>Word Labs  •  wordlabs.app  •  Root: 'aero' = air or aircraft</a:t>
             </a:r>
             <a:endParaRPr lang="en-US" sz="800" dirty="0"/>
           </a:p>
@@ -10613,7 +10613,7 @@
                 <a:ea typeface="Calibri" pitchFamily="34" charset="-122"/>
                 <a:cs typeface="Calibri" pitchFamily="34" charset="-120"/>
               </a:rPr>
-              <a:t>power, force</a:t>
+              <a:t>power or force</a:t>
             </a:r>
             <a:endParaRPr lang="en-US" sz="850" dirty="0"/>
           </a:p>
@@ -10725,7 +10725,7 @@
                 <a:ea typeface="Calibri" pitchFamily="34" charset="-122"/>
                 <a:cs typeface="Calibri" pitchFamily="34" charset="-120"/>
               </a:rPr>
-              <a:t>relating to, having the quality of</a:t>
+              <a:t>relating to</a:t>
             </a:r>
             <a:endParaRPr lang="en-US" sz="850" dirty="0"/>
           </a:p>
@@ -10884,7 +10884,7 @@
                 <a:ea typeface="Trebuchet MS" pitchFamily="34" charset="-122"/>
                 <a:cs typeface="Trebuchet MS" pitchFamily="34" charset="-120"/>
               </a:rPr>
-              <a:t>ae</a:t>
+              <a:t>aer</a:t>
             </a:r>
             <a:endParaRPr lang="en-US" sz="1400" dirty="0"/>
           </a:p>
@@ -10989,7 +10989,7 @@
                 <a:ea typeface="Trebuchet MS" pitchFamily="34" charset="-122"/>
                 <a:cs typeface="Trebuchet MS" pitchFamily="34" charset="-120"/>
               </a:rPr>
-              <a:t>ro</a:t>
+              <a:t>o</a:t>
             </a:r>
             <a:endParaRPr lang="en-US" sz="1400" dirty="0"/>
           </a:p>
@@ -12388,7 +12388,7 @@
                 <a:ea typeface="Calibri" pitchFamily="34" charset="-122"/>
                 <a:cs typeface="Calibri" pitchFamily="34" charset="-120"/>
               </a:rPr>
-              <a:t>Word Labs  •  wordlabs.app  •  Root: 'aero' = air, atmosphere, aircraft</a:t>
+              <a:t>Word Labs  •  wordlabs.app  •  Root: 'aero' = air or aircraft</a:t>
             </a:r>
             <a:endParaRPr lang="en-US" sz="800" dirty="0"/>
           </a:p>
@@ -13215,7 +13215,7 @@
                 <a:ea typeface="Calibri" pitchFamily="34" charset="-122"/>
                 <a:cs typeface="Calibri" pitchFamily="34" charset="-120"/>
               </a:rPr>
-              <a:t>Word Labs  •  wordlabs.app  •  Root: 'aero' = air, atmosphere, aircraft</a:t>
+              <a:t>Word Labs  •  wordlabs.app  •  Root: 'aero' = air or aircraft</a:t>
             </a:r>
             <a:endParaRPr lang="en-US" sz="800" dirty="0"/>
           </a:p>
@@ -13644,7 +13644,7 @@
                 <a:ea typeface="Calibri" pitchFamily="34" charset="-122"/>
                 <a:cs typeface="Calibri" pitchFamily="34" charset="-120"/>
               </a:rPr>
-              <a:t>flat surface, level</a:t>
+              <a:t>flat surface or level</a:t>
             </a:r>
             <a:endParaRPr lang="en-US" sz="850" dirty="0"/>
           </a:p>
@@ -14200,7 +14200,7 @@
                 <a:ea typeface="Calibri" pitchFamily="34" charset="-122"/>
                 <a:cs typeface="Calibri" pitchFamily="34" charset="-120"/>
               </a:rPr>
-              <a:t>Word Labs  •  wordlabs.app  •  Root: 'aero' = air, atmosphere, aircraft</a:t>
+              <a:t>Word Labs  •  wordlabs.app  •  Root: 'aero' = air or aircraft</a:t>
             </a:r>
             <a:endParaRPr lang="en-US" sz="800" dirty="0"/>
           </a:p>
@@ -14629,7 +14629,7 @@
                 <a:ea typeface="Calibri" pitchFamily="34" charset="-122"/>
                 <a:cs typeface="Calibri" pitchFamily="34" charset="-120"/>
               </a:rPr>
-              <a:t>flat surface, level</a:t>
+              <a:t>flat surface or level</a:t>
             </a:r>
             <a:endParaRPr lang="en-US" sz="850" dirty="0"/>
           </a:p>
@@ -14788,7 +14788,7 @@
                 <a:ea typeface="Trebuchet MS" pitchFamily="34" charset="-122"/>
                 <a:cs typeface="Trebuchet MS" pitchFamily="34" charset="-120"/>
               </a:rPr>
-              <a:t>ae</a:t>
+              <a:t>aer</a:t>
             </a:r>
             <a:endParaRPr lang="en-US" sz="1400" dirty="0"/>
           </a:p>
@@ -14893,7 +14893,7 @@
                 <a:ea typeface="Trebuchet MS" pitchFamily="34" charset="-122"/>
                 <a:cs typeface="Trebuchet MS" pitchFamily="34" charset="-120"/>
               </a:rPr>
-              <a:t>ro</a:t>
+              <a:t>o</a:t>
             </a:r>
             <a:endParaRPr lang="en-US" sz="1400" dirty="0"/>
           </a:p>
@@ -15331,7 +15331,7 @@
                 <a:ea typeface="Calibri" pitchFamily="34" charset="-122"/>
                 <a:cs typeface="Calibri" pitchFamily="34" charset="-120"/>
               </a:rPr>
-              <a:t>Root 'aero' — air, atmosphere, aircraft</a:t>
+              <a:t>Root 'aero' — air or aircraft</a:t>
             </a:r>
             <a:endParaRPr lang="en-US" sz="1600" dirty="0"/>
           </a:p>
@@ -15687,7 +15687,7 @@
                 <a:ea typeface="Calibri" pitchFamily="34" charset="-122"/>
                 <a:cs typeface="Calibri" pitchFamily="34" charset="-120"/>
               </a:rPr>
-              <a:t>Word Labs  •  wordlabs.app  •  Root: 'aero' = air, atmosphere, aircraft</a:t>
+              <a:t>Word Labs  •  wordlabs.app  •  Root: 'aero' = air or aircraft</a:t>
             </a:r>
             <a:endParaRPr lang="en-US" sz="800" dirty="0"/>
           </a:p>
@@ -16116,7 +16116,7 @@
                 <a:ea typeface="Calibri" pitchFamily="34" charset="-122"/>
                 <a:cs typeface="Calibri" pitchFamily="34" charset="-120"/>
               </a:rPr>
-              <a:t>flat surface, level</a:t>
+              <a:t>flat surface or level</a:t>
             </a:r>
             <a:endParaRPr lang="en-US" sz="850" dirty="0"/>
           </a:p>
@@ -16275,7 +16275,7 @@
                 <a:ea typeface="Trebuchet MS" pitchFamily="34" charset="-122"/>
                 <a:cs typeface="Trebuchet MS" pitchFamily="34" charset="-120"/>
               </a:rPr>
-              <a:t>ae</a:t>
+              <a:t>aer</a:t>
             </a:r>
             <a:endParaRPr lang="en-US" sz="1400" dirty="0"/>
           </a:p>
@@ -16380,7 +16380,7 @@
                 <a:ea typeface="Trebuchet MS" pitchFamily="34" charset="-122"/>
                 <a:cs typeface="Trebuchet MS" pitchFamily="34" charset="-120"/>
               </a:rPr>
-              <a:t>ro</a:t>
+              <a:t>o</a:t>
             </a:r>
             <a:endParaRPr lang="en-US" sz="1400" dirty="0"/>
           </a:p>
@@ -16592,7 +16592,7 @@
         </p:nvSpPr>
         <p:spPr>
           <a:xfrm>
-            <a:off x="2023872" y="4169664"/>
+            <a:off x="2124837" y="4169664"/>
             <a:ext cx="685800" cy="475488"/>
           </a:xfrm>
           <a:prstGeom prst="rect">
@@ -16619,7 +16619,7 @@
         </p:nvSpPr>
         <p:spPr>
           <a:xfrm>
-            <a:off x="2023872" y="4169664"/>
+            <a:off x="2124837" y="4169664"/>
             <a:ext cx="685800" cy="475488"/>
           </a:xfrm>
           <a:prstGeom prst="rect">
@@ -16658,7 +16658,7 @@
         </p:nvSpPr>
         <p:spPr>
           <a:xfrm>
-            <a:off x="2831592" y="4169664"/>
+            <a:off x="3033522" y="4169664"/>
             <a:ext cx="685800" cy="475488"/>
           </a:xfrm>
           <a:prstGeom prst="rect">
@@ -16685,7 +16685,7 @@
         </p:nvSpPr>
         <p:spPr>
           <a:xfrm>
-            <a:off x="2831592" y="4169664"/>
+            <a:off x="3033522" y="4169664"/>
             <a:ext cx="685800" cy="475488"/>
           </a:xfrm>
           <a:prstGeom prst="rect">
@@ -16724,7 +16724,7 @@
         </p:nvSpPr>
         <p:spPr>
           <a:xfrm>
-            <a:off x="3639312" y="4169664"/>
+            <a:off x="3942207" y="4169664"/>
             <a:ext cx="685800" cy="475488"/>
           </a:xfrm>
           <a:prstGeom prst="rect">
@@ -16751,7 +16751,7 @@
         </p:nvSpPr>
         <p:spPr>
           <a:xfrm>
-            <a:off x="3639312" y="4169664"/>
+            <a:off x="3942207" y="4169664"/>
             <a:ext cx="685800" cy="475488"/>
           </a:xfrm>
           <a:prstGeom prst="rect">
@@ -16790,7 +16790,7 @@
         </p:nvSpPr>
         <p:spPr>
           <a:xfrm>
-            <a:off x="4447032" y="4169664"/>
+            <a:off x="4850892" y="4169664"/>
             <a:ext cx="685800" cy="475488"/>
           </a:xfrm>
           <a:prstGeom prst="rect">
@@ -16817,7 +16817,7 @@
         </p:nvSpPr>
         <p:spPr>
           <a:xfrm>
-            <a:off x="4447032" y="4169664"/>
+            <a:off x="4850892" y="4169664"/>
             <a:ext cx="685800" cy="475488"/>
           </a:xfrm>
           <a:prstGeom prst="rect">
@@ -16856,7 +16856,7 @@
         </p:nvSpPr>
         <p:spPr>
           <a:xfrm>
-            <a:off x="5254752" y="4169664"/>
+            <a:off x="5759577" y="4169664"/>
             <a:ext cx="685800" cy="475488"/>
           </a:xfrm>
           <a:prstGeom prst="rect">
@@ -16883,7 +16883,7 @@
         </p:nvSpPr>
         <p:spPr>
           <a:xfrm>
-            <a:off x="5254752" y="4169664"/>
+            <a:off x="5759577" y="4169664"/>
             <a:ext cx="685800" cy="475488"/>
           </a:xfrm>
           <a:prstGeom prst="rect">
@@ -16922,7 +16922,7 @@
         </p:nvSpPr>
         <p:spPr>
           <a:xfrm>
-            <a:off x="6062472" y="4169664"/>
+            <a:off x="6668262" y="4169664"/>
             <a:ext cx="685800" cy="475488"/>
           </a:xfrm>
           <a:prstGeom prst="rect">
@@ -16949,7 +16949,7 @@
         </p:nvSpPr>
         <p:spPr>
           <a:xfrm>
-            <a:off x="6062472" y="4169664"/>
+            <a:off x="6668262" y="4169664"/>
             <a:ext cx="685800" cy="475488"/>
           </a:xfrm>
           <a:prstGeom prst="rect">
@@ -16988,7 +16988,7 @@
         </p:nvSpPr>
         <p:spPr>
           <a:xfrm>
-            <a:off x="6870192" y="4169664"/>
+            <a:off x="7576947" y="4169664"/>
             <a:ext cx="685800" cy="475488"/>
           </a:xfrm>
           <a:prstGeom prst="rect">
@@ -17015,7 +17015,7 @@
         </p:nvSpPr>
         <p:spPr>
           <a:xfrm>
-            <a:off x="6870192" y="4169664"/>
+            <a:off x="7576947" y="4169664"/>
             <a:ext cx="685800" cy="475488"/>
           </a:xfrm>
           <a:prstGeom prst="rect">
@@ -17040,73 +17040,7 @@
                 <a:ea typeface="Trebuchet MS" pitchFamily="34" charset="-122"/>
                 <a:cs typeface="Trebuchet MS" pitchFamily="34" charset="-120"/>
               </a:rPr>
-              <a:t>n</a:t>
-            </a:r>
-            <a:endParaRPr lang="en-US" sz="900" dirty="0"/>
-          </a:p>
-        </p:txBody>
-      </p:sp>
-      <p:sp>
-        <p:nvSpPr>
-          <p:cNvPr id="50" name="Shape 48"/>
-          <p:cNvSpPr/>
-          <p:nvPr/>
-        </p:nvSpPr>
-        <p:spPr>
-          <a:xfrm>
-            <a:off x="7677912" y="4169664"/>
-            <a:ext cx="685800" cy="475488"/>
-          </a:xfrm>
-          <a:prstGeom prst="rect">
-            <a:avLst>
-              <a:gd name="adj" fmla="val 7692"/>
-            </a:avLst>
-          </a:prstGeom>
-          <a:solidFill>
-            <a:srgbClr val="FFFFFF"/>
-          </a:solidFill>
-          <a:ln w="12700">
-            <a:solidFill>
-              <a:srgbClr val="DB2777"/>
-            </a:solidFill>
-            <a:prstDash val="solid"/>
-          </a:ln>
-        </p:spPr>
-      </p:sp>
-      <p:sp>
-        <p:nvSpPr>
-          <p:cNvPr id="51" name="Text 49"/>
-          <p:cNvSpPr/>
-          <p:nvPr/>
-        </p:nvSpPr>
-        <p:spPr>
-          <a:xfrm>
-            <a:off x="7677912" y="4169664"/>
-            <a:ext cx="685800" cy="475488"/>
-          </a:xfrm>
-          <a:prstGeom prst="rect">
-            <a:avLst/>
-          </a:prstGeom>
-          <a:noFill/>
-          <a:ln/>
-        </p:spPr>
-        <p:txBody>
-          <a:bodyPr wrap="square" lIns="0" tIns="0" rIns="0" bIns="0" rtlCol="0" anchor="ctr"/>
-          <a:lstStyle/>
-          <a:p>
-            <a:pPr algn="ctr" indent="0" marL="0">
-              <a:buNone/>
-            </a:pPr>
-            <a:r>
-              <a:rPr lang="en-US" sz="900" b="1" dirty="0">
-                <a:solidFill>
-                  <a:srgbClr val="9D174D"/>
-                </a:solidFill>
-                <a:latin typeface="Trebuchet MS" pitchFamily="34" charset="0"/>
-                <a:ea typeface="Trebuchet MS" pitchFamily="34" charset="-122"/>
-                <a:cs typeface="Trebuchet MS" pitchFamily="34" charset="-120"/>
-              </a:rPr>
-              <a:t>e</a:t>
+              <a:t>ne</a:t>
             </a:r>
             <a:endParaRPr lang="en-US" sz="900" dirty="0"/>
           </a:p>
@@ -17680,7 +17614,7 @@
                 <a:ea typeface="Calibri" pitchFamily="34" charset="-122"/>
                 <a:cs typeface="Calibri" pitchFamily="34" charset="-120"/>
               </a:rPr>
-              <a:t>Word Labs  •  wordlabs.app  •  Root: 'aero' = air, atmosphere, aircraft</a:t>
+              <a:t>Word Labs  •  wordlabs.app  •  Root: 'aero' = air or aircraft</a:t>
             </a:r>
             <a:endParaRPr lang="en-US" sz="800" dirty="0"/>
           </a:p>
@@ -18014,7 +17948,7 @@
                 <a:ea typeface="Trebuchet MS" pitchFamily="34" charset="-122"/>
                 <a:cs typeface="Trebuchet MS" pitchFamily="34" charset="-120"/>
               </a:rPr>
-              <a:t>2</a:t>
+              <a:t>1</a:t>
             </a:r>
             <a:pPr algn="ctr" indent="0" marL="0">
               <a:buNone/>
@@ -18028,7 +17962,7 @@
                 <a:ea typeface="Trebuchet MS" pitchFamily="34" charset="-122"/>
                 <a:cs typeface="Trebuchet MS" pitchFamily="34" charset="-120"/>
               </a:rPr>
-              <a:t>  punctuation marks</a:t>
+              <a:t>  punctuation mark</a:t>
             </a:r>
             <a:endParaRPr lang="en-US" sz="2800" dirty="0"/>
           </a:p>
@@ -18320,7 +18254,7 @@
                 <a:ea typeface="Calibri" pitchFamily="34" charset="-122"/>
                 <a:cs typeface="Calibri" pitchFamily="34" charset="-120"/>
               </a:rPr>
-              <a:t>Word Labs  •  wordlabs.app  •  Root: 'aero' = air, atmosphere, aircraft</a:t>
+              <a:t>Word Labs  •  wordlabs.app  •  Root: 'aero' = air or aircraft</a:t>
             </a:r>
             <a:endParaRPr lang="en-US" sz="800" dirty="0"/>
           </a:p>
@@ -18432,7 +18366,7 @@
                 <a:ea typeface="Calibri" pitchFamily="34" charset="-122"/>
                 <a:cs typeface="Calibri" pitchFamily="34" charset="-120"/>
               </a:rPr>
-              <a:t>At the </a:t>
+              <a:t>During the </a:t>
             </a:r>
             <a:pPr algn="l" indent="0" marL="0">
               <a:buNone/>
@@ -18449,7 +18383,7 @@
                 <a:ea typeface="Calibri" pitchFamily="34" charset="-122"/>
                 <a:cs typeface="Calibri" pitchFamily="34" charset="-120"/>
               </a:rPr>
-              <a:t>aerodrome</a:t>
+              <a:t>aerobics</a:t>
             </a:r>
             <a:pPr algn="l" indent="0" marL="0">
               <a:buNone/>
@@ -18463,7 +18397,7 @@
                 <a:ea typeface="Calibri" pitchFamily="34" charset="-122"/>
                 <a:cs typeface="Calibri" pitchFamily="34" charset="-120"/>
               </a:rPr>
-              <a:t>, the instructor explained how </a:t>
+              <a:t> class, our teacher explained how </a:t>
             </a:r>
             <a:pPr algn="l" indent="0" marL="0">
               <a:buNone/>
@@ -18480,7 +18414,7 @@
                 <a:ea typeface="Calibri" pitchFamily="34" charset="-122"/>
                 <a:cs typeface="Calibri" pitchFamily="34" charset="-120"/>
               </a:rPr>
-              <a:t>aeronautics</a:t>
+              <a:t>aerospace</a:t>
             </a:r>
             <a:pPr algn="l" indent="0" marL="0">
               <a:buNone/>
@@ -18494,7 +18428,7 @@
                 <a:ea typeface="Calibri" pitchFamily="34" charset="-122"/>
                 <a:cs typeface="Calibri" pitchFamily="34" charset="-120"/>
               </a:rPr>
-              <a:t> and </a:t>
+              <a:t> engineers study </a:t>
             </a:r>
             <a:pPr algn="l" indent="0" marL="0">
               <a:buNone/>
@@ -18511,7 +18445,7 @@
                 <a:ea typeface="Calibri" pitchFamily="34" charset="-122"/>
                 <a:cs typeface="Calibri" pitchFamily="34" charset="-120"/>
               </a:rPr>
-              <a:t>aerodynamics</a:t>
+              <a:t>aeronautics</a:t>
             </a:r>
             <a:pPr algn="l" indent="0" marL="0">
               <a:buNone/>
@@ -18525,7 +18459,7 @@
                 <a:ea typeface="Calibri" pitchFamily="34" charset="-122"/>
                 <a:cs typeface="Calibri" pitchFamily="34" charset="-120"/>
               </a:rPr>
-              <a:t> work together to keep aircraft in the sky.</a:t>
+              <a:t> to build better aircraft.</a:t>
             </a:r>
             <a:endParaRPr lang="en-US" sz="1800" dirty="0"/>
           </a:p>
@@ -18680,7 +18614,7 @@
                 <a:ea typeface="Trebuchet MS" pitchFamily="34" charset="-122"/>
                 <a:cs typeface="Trebuchet MS" pitchFamily="34" charset="-120"/>
               </a:rPr>
-              <a:t>aerodrome</a:t>
+              <a:t>aerobics</a:t>
             </a:r>
             <a:endParaRPr lang="en-US" sz="1400" dirty="0"/>
           </a:p>
@@ -18808,7 +18742,7 @@
                 <a:ea typeface="Trebuchet MS" pitchFamily="34" charset="-122"/>
                 <a:cs typeface="Trebuchet MS" pitchFamily="34" charset="-120"/>
               </a:rPr>
-              <a:t>aeronautics</a:t>
+              <a:t>aerospace</a:t>
             </a:r>
             <a:endParaRPr lang="en-US" sz="1400" dirty="0"/>
           </a:p>
@@ -18936,7 +18870,7 @@
                 <a:ea typeface="Trebuchet MS" pitchFamily="34" charset="-122"/>
                 <a:cs typeface="Trebuchet MS" pitchFamily="34" charset="-120"/>
               </a:rPr>
-              <a:t>aerodynamics</a:t>
+              <a:t>aeronautics</a:t>
             </a:r>
             <a:endParaRPr lang="en-US" sz="1400" dirty="0"/>
           </a:p>
@@ -19267,7 +19201,7 @@
                 <a:ea typeface="Calibri" pitchFamily="34" charset="-122"/>
                 <a:cs typeface="Calibri" pitchFamily="34" charset="-120"/>
               </a:rPr>
-              <a:t>Word Labs  •  wordlabs.app  •  Root: 'aero' = air, atmosphere, aircraft</a:t>
+              <a:t>Word Labs  •  wordlabs.app  •  Root: 'aero' = air or aircraft</a:t>
             </a:r>
             <a:endParaRPr lang="en-US" sz="800" dirty="0"/>
           </a:p>
@@ -19406,7 +19340,7 @@
                 <a:ea typeface="Trebuchet MS" pitchFamily="34" charset="-122"/>
                 <a:cs typeface="Trebuchet MS" pitchFamily="34" charset="-120"/>
               </a:rPr>
-              <a:t>aerodrome</a:t>
+              <a:t>aerobics</a:t>
             </a:r>
             <a:endParaRPr lang="en-US" sz="2800" dirty="0"/>
           </a:p>
@@ -20094,7 +20028,7 @@
                 <a:ea typeface="Calibri" pitchFamily="34" charset="-122"/>
                 <a:cs typeface="Calibri" pitchFamily="34" charset="-120"/>
               </a:rPr>
-              <a:t>Word Labs  •  wordlabs.app  •  Root: 'aero' = air, atmosphere, aircraft</a:t>
+              <a:t>Word Labs  •  wordlabs.app  •  Root: 'aero' = air or aircraft</a:t>
             </a:r>
             <a:endParaRPr lang="en-US" sz="800" dirty="0"/>
           </a:p>
@@ -20233,7 +20167,7 @@
                 <a:ea typeface="Trebuchet MS" pitchFamily="34" charset="-122"/>
                 <a:cs typeface="Trebuchet MS" pitchFamily="34" charset="-120"/>
               </a:rPr>
-              <a:t>aerodrome</a:t>
+              <a:t>aerobics</a:t>
             </a:r>
             <a:endParaRPr lang="en-US" sz="2800" dirty="0"/>
           </a:p>
@@ -20313,7 +20247,7 @@
         </p:nvSpPr>
         <p:spPr>
           <a:xfrm>
-            <a:off x="2938272" y="2258568"/>
+            <a:off x="2221992" y="2258568"/>
             <a:ext cx="1828800" cy="292608"/>
           </a:xfrm>
           <a:prstGeom prst="rect">
@@ -20347,7 +20281,7 @@
         </p:nvSpPr>
         <p:spPr>
           <a:xfrm>
-            <a:off x="2938272" y="2258568"/>
+            <a:off x="2221992" y="2258568"/>
             <a:ext cx="1828800" cy="292608"/>
           </a:xfrm>
           <a:prstGeom prst="rect">
@@ -20386,7 +20320,7 @@
         </p:nvSpPr>
         <p:spPr>
           <a:xfrm>
-            <a:off x="2938272" y="2569464"/>
+            <a:off x="2221992" y="2569464"/>
             <a:ext cx="1828800" cy="201168"/>
           </a:xfrm>
           <a:prstGeom prst="rect">
@@ -20425,7 +20359,7 @@
         </p:nvSpPr>
         <p:spPr>
           <a:xfrm>
-            <a:off x="5803392" y="2258568"/>
+            <a:off x="4370832" y="2258568"/>
             <a:ext cx="1828800" cy="292608"/>
           </a:xfrm>
           <a:prstGeom prst="rect">
@@ -20459,7 +20393,7 @@
         </p:nvSpPr>
         <p:spPr>
           <a:xfrm>
-            <a:off x="5803392" y="2258568"/>
+            <a:off x="4370832" y="2258568"/>
             <a:ext cx="1828800" cy="292608"/>
           </a:xfrm>
           <a:prstGeom prst="rect">
@@ -20484,7 +20418,7 @@
                 <a:ea typeface="Trebuchet MS" pitchFamily="34" charset="-122"/>
                 <a:cs typeface="Trebuchet MS" pitchFamily="34" charset="-120"/>
               </a:rPr>
-              <a:t>drome</a:t>
+              <a:t>bic</a:t>
             </a:r>
             <a:endParaRPr lang="en-US" sz="1300" dirty="0"/>
           </a:p>
@@ -20498,7 +20432,7 @@
         </p:nvSpPr>
         <p:spPr>
           <a:xfrm>
-            <a:off x="5803392" y="2569464"/>
+            <a:off x="4370832" y="2569464"/>
             <a:ext cx="1828800" cy="201168"/>
           </a:xfrm>
           <a:prstGeom prst="rect">
@@ -20523,7 +20457,7 @@
                 <a:ea typeface="Calibri" pitchFamily="34" charset="-122"/>
                 <a:cs typeface="Calibri" pitchFamily="34" charset="-120"/>
               </a:rPr>
-              <a:t>running place, course</a:t>
+              <a:t>life or living</a:t>
             </a:r>
             <a:endParaRPr lang="en-US" sz="850" dirty="0"/>
           </a:p>
@@ -20532,6 +20466,118 @@
       <p:sp>
         <p:nvSpPr>
           <p:cNvPr id="22" name="Shape 20"/>
+          <p:cNvSpPr/>
+          <p:nvPr/>
+        </p:nvSpPr>
+        <p:spPr>
+          <a:xfrm>
+            <a:off x="6519672" y="2258568"/>
+            <a:ext cx="1828800" cy="292608"/>
+          </a:xfrm>
+          <a:prstGeom prst="rect">
+            <a:avLst>
+              <a:gd name="adj" fmla="val 25000"/>
+            </a:avLst>
+          </a:prstGeom>
+          <a:solidFill>
+            <a:srgbClr val="FCE7F3"/>
+          </a:solidFill>
+          <a:ln w="19050">
+            <a:solidFill>
+              <a:srgbClr val="DB2777"/>
+            </a:solidFill>
+            <a:prstDash val="solid"/>
+          </a:ln>
+          <a:effectLst>
+            <a:outerShdw sx="100000" sy="100000" kx="0" ky="0" algn="bl" rotWithShape="0" blurRad="101600" dist="38100" dir="8100000">
+              <a:srgbClr val="000000">
+                <a:alpha val="12000"/>
+              </a:srgbClr>
+            </a:outerShdw>
+          </a:effectLst>
+        </p:spPr>
+      </p:sp>
+      <p:sp>
+        <p:nvSpPr>
+          <p:cNvPr id="23" name="Text 21"/>
+          <p:cNvSpPr/>
+          <p:nvPr/>
+        </p:nvSpPr>
+        <p:spPr>
+          <a:xfrm>
+            <a:off x="6519672" y="2258568"/>
+            <a:ext cx="1828800" cy="292608"/>
+          </a:xfrm>
+          <a:prstGeom prst="rect">
+            <a:avLst/>
+          </a:prstGeom>
+          <a:noFill/>
+          <a:ln/>
+        </p:spPr>
+        <p:txBody>
+          <a:bodyPr wrap="square" lIns="0" tIns="0" rIns="0" bIns="0" rtlCol="0" anchor="ctr"/>
+          <a:lstStyle/>
+          <a:p>
+            <a:pPr algn="ctr" indent="0" marL="0">
+              <a:buNone/>
+            </a:pPr>
+            <a:r>
+              <a:rPr lang="en-US" sz="1300" b="1" dirty="0">
+                <a:solidFill>
+                  <a:srgbClr val="9D174D"/>
+                </a:solidFill>
+                <a:latin typeface="Trebuchet MS" pitchFamily="34" charset="0"/>
+                <a:ea typeface="Trebuchet MS" pitchFamily="34" charset="-122"/>
+                <a:cs typeface="Trebuchet MS" pitchFamily="34" charset="-120"/>
+              </a:rPr>
+              <a:t>s</a:t>
+            </a:r>
+            <a:endParaRPr lang="en-US" sz="1300" dirty="0"/>
+          </a:p>
+        </p:txBody>
+      </p:sp>
+      <p:sp>
+        <p:nvSpPr>
+          <p:cNvPr id="24" name="Text 22"/>
+          <p:cNvSpPr/>
+          <p:nvPr/>
+        </p:nvSpPr>
+        <p:spPr>
+          <a:xfrm>
+            <a:off x="6519672" y="2569464"/>
+            <a:ext cx="1828800" cy="201168"/>
+          </a:xfrm>
+          <a:prstGeom prst="rect">
+            <a:avLst/>
+          </a:prstGeom>
+          <a:noFill/>
+          <a:ln/>
+        </p:spPr>
+        <p:txBody>
+          <a:bodyPr wrap="square" lIns="0" tIns="0" rIns="0" bIns="0" rtlCol="0" anchor="t"/>
+          <a:lstStyle/>
+          <a:p>
+            <a:pPr algn="ctr" indent="0" marL="0">
+              <a:buNone/>
+            </a:pPr>
+            <a:r>
+              <a:rPr lang="en-US" sz="850" dirty="0">
+                <a:solidFill>
+                  <a:srgbClr val="475569"/>
+                </a:solidFill>
+                <a:latin typeface="Calibri" pitchFamily="34" charset="0"/>
+                <a:ea typeface="Calibri" pitchFamily="34" charset="-122"/>
+                <a:cs typeface="Calibri" pitchFamily="34" charset="-120"/>
+              </a:rPr>
+              <a:t>plural or noun form</a:t>
+            </a:r>
+            <a:endParaRPr lang="en-US" sz="850" dirty="0"/>
+          </a:p>
+        </p:txBody>
+      </p:sp>
+      <p:sp>
+        <p:nvSpPr>
+          <p:cNvPr id="25" name="Shape 23"/>
           <p:cNvSpPr/>
           <p:nvPr/>
         </p:nvSpPr>
@@ -20558,7 +20604,7 @@
       </p:sp>
       <p:sp>
         <p:nvSpPr>
-          <p:cNvPr id="23" name="Text 21"/>
+          <p:cNvPr id="26" name="Text 24"/>
           <p:cNvSpPr/>
           <p:nvPr/>
         </p:nvSpPr>
@@ -20597,7 +20643,7 @@
       </p:sp>
       <p:sp>
         <p:nvSpPr>
-          <p:cNvPr id="24" name="Shape 22"/>
+          <p:cNvPr id="27" name="Shape 25"/>
           <p:cNvSpPr/>
           <p:nvPr/>
         </p:nvSpPr>
@@ -20624,7 +20670,7 @@
       </p:sp>
       <p:sp>
         <p:nvSpPr>
-          <p:cNvPr id="25" name="Text 23"/>
+          <p:cNvPr id="28" name="Text 26"/>
           <p:cNvSpPr/>
           <p:nvPr/>
         </p:nvSpPr>
@@ -20663,7 +20709,7 @@
       </p:sp>
       <p:sp>
         <p:nvSpPr>
-          <p:cNvPr id="26" name="Shape 24"/>
+          <p:cNvPr id="29" name="Shape 27"/>
           <p:cNvSpPr/>
           <p:nvPr/>
         </p:nvSpPr>
@@ -20690,7 +20736,7 @@
       </p:sp>
       <p:sp>
         <p:nvSpPr>
-          <p:cNvPr id="27" name="Text 25"/>
+          <p:cNvPr id="30" name="Text 28"/>
           <p:cNvSpPr/>
           <p:nvPr/>
         </p:nvSpPr>
@@ -20729,7 +20775,7 @@
       </p:sp>
       <p:sp>
         <p:nvSpPr>
-          <p:cNvPr id="28" name="Shape 26"/>
+          <p:cNvPr id="31" name="Shape 29"/>
           <p:cNvSpPr/>
           <p:nvPr/>
         </p:nvSpPr>
@@ -20756,7 +20802,7 @@
       </p:sp>
       <p:sp>
         <p:nvSpPr>
-          <p:cNvPr id="29" name="Text 27"/>
+          <p:cNvPr id="32" name="Text 30"/>
           <p:cNvSpPr/>
           <p:nvPr/>
         </p:nvSpPr>
@@ -21079,7 +21125,7 @@
                 <a:ea typeface="Calibri" pitchFamily="34" charset="-122"/>
                 <a:cs typeface="Calibri" pitchFamily="34" charset="-120"/>
               </a:rPr>
-              <a:t>Word Labs  •  wordlabs.app  •  Root: 'aero' = air, atmosphere, aircraft</a:t>
+              <a:t>Word Labs  •  wordlabs.app  •  Root: 'aero' = air or aircraft</a:t>
             </a:r>
             <a:endParaRPr lang="en-US" sz="800" dirty="0"/>
           </a:p>
@@ -21218,7 +21264,7 @@
                 <a:ea typeface="Trebuchet MS" pitchFamily="34" charset="-122"/>
                 <a:cs typeface="Trebuchet MS" pitchFamily="34" charset="-120"/>
               </a:rPr>
-              <a:t>aerodrome</a:t>
+              <a:t>aerobics</a:t>
             </a:r>
             <a:endParaRPr lang="en-US" sz="2800" dirty="0"/>
           </a:p>
@@ -21298,7 +21344,7 @@
         </p:nvSpPr>
         <p:spPr>
           <a:xfrm>
-            <a:off x="2938272" y="2258568"/>
+            <a:off x="2221992" y="2258568"/>
             <a:ext cx="1828800" cy="292608"/>
           </a:xfrm>
           <a:prstGeom prst="rect">
@@ -21332,7 +21378,7 @@
         </p:nvSpPr>
         <p:spPr>
           <a:xfrm>
-            <a:off x="2938272" y="2258568"/>
+            <a:off x="2221992" y="2258568"/>
             <a:ext cx="1828800" cy="292608"/>
           </a:xfrm>
           <a:prstGeom prst="rect">
@@ -21371,7 +21417,7 @@
         </p:nvSpPr>
         <p:spPr>
           <a:xfrm>
-            <a:off x="2938272" y="2569464"/>
+            <a:off x="2221992" y="2569464"/>
             <a:ext cx="1828800" cy="201168"/>
           </a:xfrm>
           <a:prstGeom prst="rect">
@@ -21410,7 +21456,7 @@
         </p:nvSpPr>
         <p:spPr>
           <a:xfrm>
-            <a:off x="5803392" y="2258568"/>
+            <a:off x="4370832" y="2258568"/>
             <a:ext cx="1828800" cy="292608"/>
           </a:xfrm>
           <a:prstGeom prst="rect">
@@ -21444,7 +21490,7 @@
         </p:nvSpPr>
         <p:spPr>
           <a:xfrm>
-            <a:off x="5803392" y="2258568"/>
+            <a:off x="4370832" y="2258568"/>
             <a:ext cx="1828800" cy="292608"/>
           </a:xfrm>
           <a:prstGeom prst="rect">
@@ -21469,7 +21515,7 @@
                 <a:ea typeface="Trebuchet MS" pitchFamily="34" charset="-122"/>
                 <a:cs typeface="Trebuchet MS" pitchFamily="34" charset="-120"/>
               </a:rPr>
-              <a:t>drome</a:t>
+              <a:t>bic</a:t>
             </a:r>
             <a:endParaRPr lang="en-US" sz="1300" dirty="0"/>
           </a:p>
@@ -21483,7 +21529,7 @@
         </p:nvSpPr>
         <p:spPr>
           <a:xfrm>
-            <a:off x="5803392" y="2569464"/>
+            <a:off x="4370832" y="2569464"/>
             <a:ext cx="1828800" cy="201168"/>
           </a:xfrm>
           <a:prstGeom prst="rect">
@@ -21508,7 +21554,7 @@
                 <a:ea typeface="Calibri" pitchFamily="34" charset="-122"/>
                 <a:cs typeface="Calibri" pitchFamily="34" charset="-120"/>
               </a:rPr>
-              <a:t>running place, course</a:t>
+              <a:t>life or living</a:t>
             </a:r>
             <a:endParaRPr lang="en-US" sz="850" dirty="0"/>
           </a:p>
@@ -21517,6 +21563,118 @@
       <p:sp>
         <p:nvSpPr>
           <p:cNvPr id="22" name="Shape 20"/>
+          <p:cNvSpPr/>
+          <p:nvPr/>
+        </p:nvSpPr>
+        <p:spPr>
+          <a:xfrm>
+            <a:off x="6519672" y="2258568"/>
+            <a:ext cx="1828800" cy="292608"/>
+          </a:xfrm>
+          <a:prstGeom prst="rect">
+            <a:avLst>
+              <a:gd name="adj" fmla="val 25000"/>
+            </a:avLst>
+          </a:prstGeom>
+          <a:solidFill>
+            <a:srgbClr val="FCE7F3"/>
+          </a:solidFill>
+          <a:ln w="19050">
+            <a:solidFill>
+              <a:srgbClr val="DB2777"/>
+            </a:solidFill>
+            <a:prstDash val="solid"/>
+          </a:ln>
+          <a:effectLst>
+            <a:outerShdw sx="100000" sy="100000" kx="0" ky="0" algn="bl" rotWithShape="0" blurRad="101600" dist="38100" dir="8100000">
+              <a:srgbClr val="000000">
+                <a:alpha val="12000"/>
+              </a:srgbClr>
+            </a:outerShdw>
+          </a:effectLst>
+        </p:spPr>
+      </p:sp>
+      <p:sp>
+        <p:nvSpPr>
+          <p:cNvPr id="23" name="Text 21"/>
+          <p:cNvSpPr/>
+          <p:nvPr/>
+        </p:nvSpPr>
+        <p:spPr>
+          <a:xfrm>
+            <a:off x="6519672" y="2258568"/>
+            <a:ext cx="1828800" cy="292608"/>
+          </a:xfrm>
+          <a:prstGeom prst="rect">
+            <a:avLst/>
+          </a:prstGeom>
+          <a:noFill/>
+          <a:ln/>
+        </p:spPr>
+        <p:txBody>
+          <a:bodyPr wrap="square" lIns="0" tIns="0" rIns="0" bIns="0" rtlCol="0" anchor="ctr"/>
+          <a:lstStyle/>
+          <a:p>
+            <a:pPr algn="ctr" indent="0" marL="0">
+              <a:buNone/>
+            </a:pPr>
+            <a:r>
+              <a:rPr lang="en-US" sz="1300" b="1" dirty="0">
+                <a:solidFill>
+                  <a:srgbClr val="9D174D"/>
+                </a:solidFill>
+                <a:latin typeface="Trebuchet MS" pitchFamily="34" charset="0"/>
+                <a:ea typeface="Trebuchet MS" pitchFamily="34" charset="-122"/>
+                <a:cs typeface="Trebuchet MS" pitchFamily="34" charset="-120"/>
+              </a:rPr>
+              <a:t>s</a:t>
+            </a:r>
+            <a:endParaRPr lang="en-US" sz="1300" dirty="0"/>
+          </a:p>
+        </p:txBody>
+      </p:sp>
+      <p:sp>
+        <p:nvSpPr>
+          <p:cNvPr id="24" name="Text 22"/>
+          <p:cNvSpPr/>
+          <p:nvPr/>
+        </p:nvSpPr>
+        <p:spPr>
+          <a:xfrm>
+            <a:off x="6519672" y="2569464"/>
+            <a:ext cx="1828800" cy="201168"/>
+          </a:xfrm>
+          <a:prstGeom prst="rect">
+            <a:avLst/>
+          </a:prstGeom>
+          <a:noFill/>
+          <a:ln/>
+        </p:spPr>
+        <p:txBody>
+          <a:bodyPr wrap="square" lIns="0" tIns="0" rIns="0" bIns="0" rtlCol="0" anchor="t"/>
+          <a:lstStyle/>
+          <a:p>
+            <a:pPr algn="ctr" indent="0" marL="0">
+              <a:buNone/>
+            </a:pPr>
+            <a:r>
+              <a:rPr lang="en-US" sz="850" dirty="0">
+                <a:solidFill>
+                  <a:srgbClr val="475569"/>
+                </a:solidFill>
+                <a:latin typeface="Calibri" pitchFamily="34" charset="0"/>
+                <a:ea typeface="Calibri" pitchFamily="34" charset="-122"/>
+                <a:cs typeface="Calibri" pitchFamily="34" charset="-120"/>
+              </a:rPr>
+              <a:t>plural or noun form</a:t>
+            </a:r>
+            <a:endParaRPr lang="en-US" sz="850" dirty="0"/>
+          </a:p>
+        </p:txBody>
+      </p:sp>
+      <p:sp>
+        <p:nvSpPr>
+          <p:cNvPr id="25" name="Shape 23"/>
           <p:cNvSpPr/>
           <p:nvPr/>
         </p:nvSpPr>
@@ -21543,7 +21701,7 @@
       </p:sp>
       <p:sp>
         <p:nvSpPr>
-          <p:cNvPr id="23" name="Text 21"/>
+          <p:cNvPr id="26" name="Text 24"/>
           <p:cNvSpPr/>
           <p:nvPr/>
         </p:nvSpPr>
@@ -21582,7 +21740,7 @@
       </p:sp>
       <p:sp>
         <p:nvSpPr>
-          <p:cNvPr id="24" name="Shape 22"/>
+          <p:cNvPr id="27" name="Shape 25"/>
           <p:cNvSpPr/>
           <p:nvPr/>
         </p:nvSpPr>
@@ -21609,7 +21767,7 @@
       </p:sp>
       <p:sp>
         <p:nvSpPr>
-          <p:cNvPr id="25" name="Shape 23"/>
+          <p:cNvPr id="28" name="Shape 26"/>
           <p:cNvSpPr/>
           <p:nvPr/>
         </p:nvSpPr>
@@ -21636,7 +21794,7 @@
       </p:sp>
       <p:sp>
         <p:nvSpPr>
-          <p:cNvPr id="26" name="Text 24"/>
+          <p:cNvPr id="29" name="Text 27"/>
           <p:cNvSpPr/>
           <p:nvPr/>
         </p:nvSpPr>
@@ -21667,7 +21825,7 @@
                 <a:ea typeface="Trebuchet MS" pitchFamily="34" charset="-122"/>
                 <a:cs typeface="Trebuchet MS" pitchFamily="34" charset="-120"/>
               </a:rPr>
-              <a:t>ae</a:t>
+              <a:t>aer</a:t>
             </a:r>
             <a:endParaRPr lang="en-US" sz="1400" dirty="0"/>
           </a:p>
@@ -21675,7 +21833,7 @@
       </p:sp>
       <p:sp>
         <p:nvSpPr>
-          <p:cNvPr id="27" name="Text 25"/>
+          <p:cNvPr id="30" name="Text 28"/>
           <p:cNvSpPr/>
           <p:nvPr/>
         </p:nvSpPr>
@@ -21714,7 +21872,7 @@
       </p:sp>
       <p:sp>
         <p:nvSpPr>
-          <p:cNvPr id="28" name="Shape 26"/>
+          <p:cNvPr id="31" name="Shape 29"/>
           <p:cNvSpPr/>
           <p:nvPr/>
         </p:nvSpPr>
@@ -21741,7 +21899,7 @@
       </p:sp>
       <p:sp>
         <p:nvSpPr>
-          <p:cNvPr id="29" name="Text 27"/>
+          <p:cNvPr id="32" name="Text 30"/>
           <p:cNvSpPr/>
           <p:nvPr/>
         </p:nvSpPr>
@@ -21772,7 +21930,7 @@
                 <a:ea typeface="Trebuchet MS" pitchFamily="34" charset="-122"/>
                 <a:cs typeface="Trebuchet MS" pitchFamily="34" charset="-120"/>
               </a:rPr>
-              <a:t>ro</a:t>
+              <a:t>o</a:t>
             </a:r>
             <a:endParaRPr lang="en-US" sz="1400" dirty="0"/>
           </a:p>
@@ -21780,7 +21938,7 @@
       </p:sp>
       <p:sp>
         <p:nvSpPr>
-          <p:cNvPr id="30" name="Text 28"/>
+          <p:cNvPr id="33" name="Text 31"/>
           <p:cNvSpPr/>
           <p:nvPr/>
         </p:nvSpPr>
@@ -21819,7 +21977,7 @@
       </p:sp>
       <p:sp>
         <p:nvSpPr>
-          <p:cNvPr id="31" name="Shape 29"/>
+          <p:cNvPr id="34" name="Shape 32"/>
           <p:cNvSpPr/>
           <p:nvPr/>
         </p:nvSpPr>
@@ -21846,7 +22004,7 @@
       </p:sp>
       <p:sp>
         <p:nvSpPr>
-          <p:cNvPr id="32" name="Text 30"/>
+          <p:cNvPr id="35" name="Text 33"/>
           <p:cNvSpPr/>
           <p:nvPr/>
         </p:nvSpPr>
@@ -21877,7 +22035,7 @@
                 <a:ea typeface="Trebuchet MS" pitchFamily="34" charset="-122"/>
                 <a:cs typeface="Trebuchet MS" pitchFamily="34" charset="-120"/>
               </a:rPr>
-              <a:t>drome</a:t>
+              <a:t>bics</a:t>
             </a:r>
             <a:endParaRPr lang="en-US" sz="1400" dirty="0"/>
           </a:p>
@@ -21885,7 +22043,7 @@
       </p:sp>
       <p:sp>
         <p:nvSpPr>
-          <p:cNvPr id="33" name="Shape 31"/>
+          <p:cNvPr id="36" name="Shape 34"/>
           <p:cNvSpPr/>
           <p:nvPr/>
         </p:nvSpPr>
@@ -21912,7 +22070,7 @@
       </p:sp>
       <p:sp>
         <p:nvSpPr>
-          <p:cNvPr id="34" name="Text 32"/>
+          <p:cNvPr id="37" name="Text 35"/>
           <p:cNvSpPr/>
           <p:nvPr/>
         </p:nvSpPr>
@@ -21951,7 +22109,7 @@
       </p:sp>
       <p:sp>
         <p:nvSpPr>
-          <p:cNvPr id="35" name="Shape 33"/>
+          <p:cNvPr id="38" name="Shape 36"/>
           <p:cNvSpPr/>
           <p:nvPr/>
         </p:nvSpPr>
@@ -21978,7 +22136,7 @@
       </p:sp>
       <p:sp>
         <p:nvSpPr>
-          <p:cNvPr id="36" name="Text 34"/>
+          <p:cNvPr id="39" name="Text 37"/>
           <p:cNvSpPr/>
           <p:nvPr/>
         </p:nvSpPr>
@@ -22301,7 +22459,7 @@
                 <a:ea typeface="Calibri" pitchFamily="34" charset="-122"/>
                 <a:cs typeface="Calibri" pitchFamily="34" charset="-120"/>
               </a:rPr>
-              <a:t>Word Labs  •  wordlabs.app  •  Root: 'aero' = air, atmosphere, aircraft</a:t>
+              <a:t>Word Labs  •  wordlabs.app  •  Root: 'aero' = air or aircraft</a:t>
             </a:r>
             <a:endParaRPr lang="en-US" sz="800" dirty="0"/>
           </a:p>
@@ -22440,7 +22598,7 @@
                 <a:ea typeface="Trebuchet MS" pitchFamily="34" charset="-122"/>
                 <a:cs typeface="Trebuchet MS" pitchFamily="34" charset="-120"/>
               </a:rPr>
-              <a:t>aerodrome</a:t>
+              <a:t>aerobics</a:t>
             </a:r>
             <a:endParaRPr lang="en-US" sz="2800" dirty="0"/>
           </a:p>
@@ -22520,7 +22678,7 @@
         </p:nvSpPr>
         <p:spPr>
           <a:xfrm>
-            <a:off x="2938272" y="2258568"/>
+            <a:off x="2221992" y="2258568"/>
             <a:ext cx="1828800" cy="292608"/>
           </a:xfrm>
           <a:prstGeom prst="rect">
@@ -22554,7 +22712,7 @@
         </p:nvSpPr>
         <p:spPr>
           <a:xfrm>
-            <a:off x="2938272" y="2258568"/>
+            <a:off x="2221992" y="2258568"/>
             <a:ext cx="1828800" cy="292608"/>
           </a:xfrm>
           <a:prstGeom prst="rect">
@@ -22593,7 +22751,7 @@
         </p:nvSpPr>
         <p:spPr>
           <a:xfrm>
-            <a:off x="2938272" y="2569464"/>
+            <a:off x="2221992" y="2569464"/>
             <a:ext cx="1828800" cy="201168"/>
           </a:xfrm>
           <a:prstGeom prst="rect">
@@ -22632,7 +22790,7 @@
         </p:nvSpPr>
         <p:spPr>
           <a:xfrm>
-            <a:off x="5803392" y="2258568"/>
+            <a:off x="4370832" y="2258568"/>
             <a:ext cx="1828800" cy="292608"/>
           </a:xfrm>
           <a:prstGeom prst="rect">
@@ -22666,7 +22824,7 @@
         </p:nvSpPr>
         <p:spPr>
           <a:xfrm>
-            <a:off x="5803392" y="2258568"/>
+            <a:off x="4370832" y="2258568"/>
             <a:ext cx="1828800" cy="292608"/>
           </a:xfrm>
           <a:prstGeom prst="rect">
@@ -22691,7 +22849,7 @@
                 <a:ea typeface="Trebuchet MS" pitchFamily="34" charset="-122"/>
                 <a:cs typeface="Trebuchet MS" pitchFamily="34" charset="-120"/>
               </a:rPr>
-              <a:t>drome</a:t>
+              <a:t>bic</a:t>
             </a:r>
             <a:endParaRPr lang="en-US" sz="1300" dirty="0"/>
           </a:p>
@@ -22705,7 +22863,7 @@
         </p:nvSpPr>
         <p:spPr>
           <a:xfrm>
-            <a:off x="5803392" y="2569464"/>
+            <a:off x="4370832" y="2569464"/>
             <a:ext cx="1828800" cy="201168"/>
           </a:xfrm>
           <a:prstGeom prst="rect">
@@ -22730,7 +22888,7 @@
                 <a:ea typeface="Calibri" pitchFamily="34" charset="-122"/>
                 <a:cs typeface="Calibri" pitchFamily="34" charset="-120"/>
               </a:rPr>
-              <a:t>running place, course</a:t>
+              <a:t>life or living</a:t>
             </a:r>
             <a:endParaRPr lang="en-US" sz="850" dirty="0"/>
           </a:p>
@@ -22739,6 +22897,118 @@
       <p:sp>
         <p:nvSpPr>
           <p:cNvPr id="22" name="Shape 20"/>
+          <p:cNvSpPr/>
+          <p:nvPr/>
+        </p:nvSpPr>
+        <p:spPr>
+          <a:xfrm>
+            <a:off x="6519672" y="2258568"/>
+            <a:ext cx="1828800" cy="292608"/>
+          </a:xfrm>
+          <a:prstGeom prst="rect">
+            <a:avLst>
+              <a:gd name="adj" fmla="val 25000"/>
+            </a:avLst>
+          </a:prstGeom>
+          <a:solidFill>
+            <a:srgbClr val="FCE7F3"/>
+          </a:solidFill>
+          <a:ln w="19050">
+            <a:solidFill>
+              <a:srgbClr val="DB2777"/>
+            </a:solidFill>
+            <a:prstDash val="solid"/>
+          </a:ln>
+          <a:effectLst>
+            <a:outerShdw sx="100000" sy="100000" kx="0" ky="0" algn="bl" rotWithShape="0" blurRad="101600" dist="38100" dir="8100000">
+              <a:srgbClr val="000000">
+                <a:alpha val="12000"/>
+              </a:srgbClr>
+            </a:outerShdw>
+          </a:effectLst>
+        </p:spPr>
+      </p:sp>
+      <p:sp>
+        <p:nvSpPr>
+          <p:cNvPr id="23" name="Text 21"/>
+          <p:cNvSpPr/>
+          <p:nvPr/>
+        </p:nvSpPr>
+        <p:spPr>
+          <a:xfrm>
+            <a:off x="6519672" y="2258568"/>
+            <a:ext cx="1828800" cy="292608"/>
+          </a:xfrm>
+          <a:prstGeom prst="rect">
+            <a:avLst/>
+          </a:prstGeom>
+          <a:noFill/>
+          <a:ln/>
+        </p:spPr>
+        <p:txBody>
+          <a:bodyPr wrap="square" lIns="0" tIns="0" rIns="0" bIns="0" rtlCol="0" anchor="ctr"/>
+          <a:lstStyle/>
+          <a:p>
+            <a:pPr algn="ctr" indent="0" marL="0">
+              <a:buNone/>
+            </a:pPr>
+            <a:r>
+              <a:rPr lang="en-US" sz="1300" b="1" dirty="0">
+                <a:solidFill>
+                  <a:srgbClr val="9D174D"/>
+                </a:solidFill>
+                <a:latin typeface="Trebuchet MS" pitchFamily="34" charset="0"/>
+                <a:ea typeface="Trebuchet MS" pitchFamily="34" charset="-122"/>
+                <a:cs typeface="Trebuchet MS" pitchFamily="34" charset="-120"/>
+              </a:rPr>
+              <a:t>s</a:t>
+            </a:r>
+            <a:endParaRPr lang="en-US" sz="1300" dirty="0"/>
+          </a:p>
+        </p:txBody>
+      </p:sp>
+      <p:sp>
+        <p:nvSpPr>
+          <p:cNvPr id="24" name="Text 22"/>
+          <p:cNvSpPr/>
+          <p:nvPr/>
+        </p:nvSpPr>
+        <p:spPr>
+          <a:xfrm>
+            <a:off x="6519672" y="2569464"/>
+            <a:ext cx="1828800" cy="201168"/>
+          </a:xfrm>
+          <a:prstGeom prst="rect">
+            <a:avLst/>
+          </a:prstGeom>
+          <a:noFill/>
+          <a:ln/>
+        </p:spPr>
+        <p:txBody>
+          <a:bodyPr wrap="square" lIns="0" tIns="0" rIns="0" bIns="0" rtlCol="0" anchor="t"/>
+          <a:lstStyle/>
+          <a:p>
+            <a:pPr algn="ctr" indent="0" marL="0">
+              <a:buNone/>
+            </a:pPr>
+            <a:r>
+              <a:rPr lang="en-US" sz="850" dirty="0">
+                <a:solidFill>
+                  <a:srgbClr val="475569"/>
+                </a:solidFill>
+                <a:latin typeface="Calibri" pitchFamily="34" charset="0"/>
+                <a:ea typeface="Calibri" pitchFamily="34" charset="-122"/>
+                <a:cs typeface="Calibri" pitchFamily="34" charset="-120"/>
+              </a:rPr>
+              <a:t>plural or noun form</a:t>
+            </a:r>
+            <a:endParaRPr lang="en-US" sz="850" dirty="0"/>
+          </a:p>
+        </p:txBody>
+      </p:sp>
+      <p:sp>
+        <p:nvSpPr>
+          <p:cNvPr id="25" name="Shape 23"/>
           <p:cNvSpPr/>
           <p:nvPr/>
         </p:nvSpPr>
@@ -22765,7 +23035,7 @@
       </p:sp>
       <p:sp>
         <p:nvSpPr>
-          <p:cNvPr id="23" name="Text 21"/>
+          <p:cNvPr id="26" name="Text 24"/>
           <p:cNvSpPr/>
           <p:nvPr/>
         </p:nvSpPr>
@@ -22804,7 +23074,7 @@
       </p:sp>
       <p:sp>
         <p:nvSpPr>
-          <p:cNvPr id="24" name="Shape 22"/>
+          <p:cNvPr id="27" name="Shape 25"/>
           <p:cNvSpPr/>
           <p:nvPr/>
         </p:nvSpPr>
@@ -22831,7 +23101,7 @@
       </p:sp>
       <p:sp>
         <p:nvSpPr>
-          <p:cNvPr id="25" name="Shape 23"/>
+          <p:cNvPr id="28" name="Shape 26"/>
           <p:cNvSpPr/>
           <p:nvPr/>
         </p:nvSpPr>
@@ -22858,7 +23128,7 @@
       </p:sp>
       <p:sp>
         <p:nvSpPr>
-          <p:cNvPr id="26" name="Text 24"/>
+          <p:cNvPr id="29" name="Text 27"/>
           <p:cNvSpPr/>
           <p:nvPr/>
         </p:nvSpPr>
@@ -22889,7 +23159,7 @@
                 <a:ea typeface="Trebuchet MS" pitchFamily="34" charset="-122"/>
                 <a:cs typeface="Trebuchet MS" pitchFamily="34" charset="-120"/>
               </a:rPr>
-              <a:t>ae</a:t>
+              <a:t>aer</a:t>
             </a:r>
             <a:endParaRPr lang="en-US" sz="1400" dirty="0"/>
           </a:p>
@@ -22897,7 +23167,7 @@
       </p:sp>
       <p:sp>
         <p:nvSpPr>
-          <p:cNvPr id="27" name="Text 25"/>
+          <p:cNvPr id="30" name="Text 28"/>
           <p:cNvSpPr/>
           <p:nvPr/>
         </p:nvSpPr>
@@ -22936,7 +23206,7 @@
       </p:sp>
       <p:sp>
         <p:nvSpPr>
-          <p:cNvPr id="28" name="Shape 26"/>
+          <p:cNvPr id="31" name="Shape 29"/>
           <p:cNvSpPr/>
           <p:nvPr/>
         </p:nvSpPr>
@@ -22963,7 +23233,7 @@
       </p:sp>
       <p:sp>
         <p:nvSpPr>
-          <p:cNvPr id="29" name="Text 27"/>
+          <p:cNvPr id="32" name="Text 30"/>
           <p:cNvSpPr/>
           <p:nvPr/>
         </p:nvSpPr>
@@ -22994,7 +23264,7 @@
                 <a:ea typeface="Trebuchet MS" pitchFamily="34" charset="-122"/>
                 <a:cs typeface="Trebuchet MS" pitchFamily="34" charset="-120"/>
               </a:rPr>
-              <a:t>ro</a:t>
+              <a:t>o</a:t>
             </a:r>
             <a:endParaRPr lang="en-US" sz="1400" dirty="0"/>
           </a:p>
@@ -23002,7 +23272,7 @@
       </p:sp>
       <p:sp>
         <p:nvSpPr>
-          <p:cNvPr id="30" name="Text 28"/>
+          <p:cNvPr id="33" name="Text 31"/>
           <p:cNvSpPr/>
           <p:nvPr/>
         </p:nvSpPr>
@@ -23041,7 +23311,7 @@
       </p:sp>
       <p:sp>
         <p:nvSpPr>
-          <p:cNvPr id="31" name="Shape 29"/>
+          <p:cNvPr id="34" name="Shape 32"/>
           <p:cNvSpPr/>
           <p:nvPr/>
         </p:nvSpPr>
@@ -23068,7 +23338,7 @@
       </p:sp>
       <p:sp>
         <p:nvSpPr>
-          <p:cNvPr id="32" name="Text 30"/>
+          <p:cNvPr id="35" name="Text 33"/>
           <p:cNvSpPr/>
           <p:nvPr/>
         </p:nvSpPr>
@@ -23099,7 +23369,7 @@
                 <a:ea typeface="Trebuchet MS" pitchFamily="34" charset="-122"/>
                 <a:cs typeface="Trebuchet MS" pitchFamily="34" charset="-120"/>
               </a:rPr>
-              <a:t>drome</a:t>
+              <a:t>bics</a:t>
             </a:r>
             <a:endParaRPr lang="en-US" sz="1400" dirty="0"/>
           </a:p>
@@ -23107,7 +23377,7 @@
       </p:sp>
       <p:sp>
         <p:nvSpPr>
-          <p:cNvPr id="33" name="Shape 31"/>
+          <p:cNvPr id="36" name="Shape 34"/>
           <p:cNvSpPr/>
           <p:nvPr/>
         </p:nvSpPr>
@@ -23134,7 +23404,7 @@
       </p:sp>
       <p:sp>
         <p:nvSpPr>
-          <p:cNvPr id="34" name="Text 32"/>
+          <p:cNvPr id="37" name="Text 35"/>
           <p:cNvSpPr/>
           <p:nvPr/>
         </p:nvSpPr>
@@ -23173,18 +23443,18 @@
       </p:sp>
       <p:sp>
         <p:nvSpPr>
-          <p:cNvPr id="35" name="Shape 33"/>
+          <p:cNvPr id="38" name="Shape 36"/>
           <p:cNvSpPr/>
           <p:nvPr/>
         </p:nvSpPr>
         <p:spPr>
           <a:xfrm>
             <a:off x="1874520" y="4096512"/>
-            <a:ext cx="6903720" cy="658368"/>
+            <a:ext cx="6903720" cy="804672"/>
           </a:xfrm>
           <a:prstGeom prst="rect">
             <a:avLst>
-              <a:gd name="adj" fmla="val 8333"/>
+              <a:gd name="adj" fmla="val 6818"/>
             </a:avLst>
           </a:prstGeom>
           <a:solidFill>
@@ -23200,18 +23470,18 @@
       </p:sp>
       <p:sp>
         <p:nvSpPr>
-          <p:cNvPr id="36" name="Shape 34"/>
+          <p:cNvPr id="39" name="Shape 37"/>
           <p:cNvSpPr/>
           <p:nvPr/>
         </p:nvSpPr>
         <p:spPr>
           <a:xfrm>
             <a:off x="2124837" y="4169664"/>
-            <a:ext cx="685800" cy="475488"/>
+            <a:ext cx="685800" cy="384048"/>
           </a:xfrm>
           <a:prstGeom prst="rect">
             <a:avLst>
-              <a:gd name="adj" fmla="val 7692"/>
+              <a:gd name="adj" fmla="val 9524"/>
             </a:avLst>
           </a:prstGeom>
           <a:solidFill>
@@ -23227,14 +23497,14 @@
       </p:sp>
       <p:sp>
         <p:nvSpPr>
-          <p:cNvPr id="37" name="Text 35"/>
+          <p:cNvPr id="40" name="Text 38"/>
           <p:cNvSpPr/>
           <p:nvPr/>
         </p:nvSpPr>
         <p:spPr>
           <a:xfrm>
             <a:off x="2124837" y="4169664"/>
-            <a:ext cx="685800" cy="475488"/>
+            <a:ext cx="685800" cy="384048"/>
           </a:xfrm>
           <a:prstGeom prst="rect">
             <a:avLst/>
@@ -23266,18 +23536,18 @@
       </p:sp>
       <p:sp>
         <p:nvSpPr>
-          <p:cNvPr id="38" name="Shape 36"/>
+          <p:cNvPr id="41" name="Shape 39"/>
           <p:cNvSpPr/>
           <p:nvPr/>
         </p:nvSpPr>
         <p:spPr>
           <a:xfrm>
             <a:off x="3033522" y="4169664"/>
-            <a:ext cx="685800" cy="475488"/>
+            <a:ext cx="685800" cy="384048"/>
           </a:xfrm>
           <a:prstGeom prst="rect">
             <a:avLst>
-              <a:gd name="adj" fmla="val 7692"/>
+              <a:gd name="adj" fmla="val 9524"/>
             </a:avLst>
           </a:prstGeom>
           <a:solidFill>
@@ -23293,14 +23563,14 @@
       </p:sp>
       <p:sp>
         <p:nvSpPr>
-          <p:cNvPr id="39" name="Text 37"/>
+          <p:cNvPr id="42" name="Text 40"/>
           <p:cNvSpPr/>
           <p:nvPr/>
         </p:nvSpPr>
         <p:spPr>
           <a:xfrm>
             <a:off x="3033522" y="4169664"/>
-            <a:ext cx="685800" cy="475488"/>
+            <a:ext cx="685800" cy="384048"/>
           </a:xfrm>
           <a:prstGeom prst="rect">
             <a:avLst/>
@@ -23332,18 +23602,18 @@
       </p:sp>
       <p:sp>
         <p:nvSpPr>
-          <p:cNvPr id="40" name="Shape 38"/>
+          <p:cNvPr id="43" name="Shape 41"/>
           <p:cNvSpPr/>
           <p:nvPr/>
         </p:nvSpPr>
         <p:spPr>
           <a:xfrm>
             <a:off x="3942207" y="4169664"/>
-            <a:ext cx="685800" cy="475488"/>
+            <a:ext cx="685800" cy="384048"/>
           </a:xfrm>
           <a:prstGeom prst="rect">
             <a:avLst>
-              <a:gd name="adj" fmla="val 7692"/>
+              <a:gd name="adj" fmla="val 9524"/>
             </a:avLst>
           </a:prstGeom>
           <a:solidFill>
@@ -23359,14 +23629,14 @@
       </p:sp>
       <p:sp>
         <p:nvSpPr>
-          <p:cNvPr id="41" name="Text 39"/>
+          <p:cNvPr id="44" name="Text 42"/>
           <p:cNvSpPr/>
           <p:nvPr/>
         </p:nvSpPr>
         <p:spPr>
           <a:xfrm>
             <a:off x="3942207" y="4169664"/>
-            <a:ext cx="685800" cy="475488"/>
+            <a:ext cx="685800" cy="384048"/>
           </a:xfrm>
           <a:prstGeom prst="rect">
             <a:avLst/>
@@ -23398,18 +23668,18 @@
       </p:sp>
       <p:sp>
         <p:nvSpPr>
-          <p:cNvPr id="42" name="Shape 40"/>
+          <p:cNvPr id="45" name="Shape 43"/>
           <p:cNvSpPr/>
           <p:nvPr/>
         </p:nvSpPr>
         <p:spPr>
           <a:xfrm>
             <a:off x="4850892" y="4169664"/>
-            <a:ext cx="685800" cy="475488"/>
+            <a:ext cx="685800" cy="384048"/>
           </a:xfrm>
           <a:prstGeom prst="rect">
             <a:avLst>
-              <a:gd name="adj" fmla="val 7692"/>
+              <a:gd name="adj" fmla="val 9524"/>
             </a:avLst>
           </a:prstGeom>
           <a:solidFill>
@@ -23425,14 +23695,14 @@
       </p:sp>
       <p:sp>
         <p:nvSpPr>
-          <p:cNvPr id="43" name="Text 41"/>
+          <p:cNvPr id="46" name="Text 44"/>
           <p:cNvSpPr/>
           <p:nvPr/>
         </p:nvSpPr>
         <p:spPr>
           <a:xfrm>
             <a:off x="4850892" y="4169664"/>
-            <a:ext cx="685800" cy="475488"/>
+            <a:ext cx="685800" cy="384048"/>
           </a:xfrm>
           <a:prstGeom prst="rect">
             <a:avLst/>
@@ -23456,7 +23726,7 @@
                 <a:ea typeface="Trebuchet MS" pitchFamily="34" charset="-122"/>
                 <a:cs typeface="Trebuchet MS" pitchFamily="34" charset="-120"/>
               </a:rPr>
-              <a:t>d</a:t>
+              <a:t>b</a:t>
             </a:r>
             <a:endParaRPr lang="en-US" sz="900" dirty="0"/>
           </a:p>
@@ -23464,18 +23734,18 @@
       </p:sp>
       <p:sp>
         <p:nvSpPr>
-          <p:cNvPr id="44" name="Shape 42"/>
+          <p:cNvPr id="47" name="Shape 45"/>
           <p:cNvSpPr/>
           <p:nvPr/>
         </p:nvSpPr>
         <p:spPr>
           <a:xfrm>
             <a:off x="5759577" y="4169664"/>
-            <a:ext cx="685800" cy="475488"/>
+            <a:ext cx="685800" cy="384048"/>
           </a:xfrm>
           <a:prstGeom prst="rect">
             <a:avLst>
-              <a:gd name="adj" fmla="val 7692"/>
+              <a:gd name="adj" fmla="val 9524"/>
             </a:avLst>
           </a:prstGeom>
           <a:solidFill>
@@ -23491,14 +23761,14 @@
       </p:sp>
       <p:sp>
         <p:nvSpPr>
-          <p:cNvPr id="45" name="Text 43"/>
+          <p:cNvPr id="48" name="Text 46"/>
           <p:cNvSpPr/>
           <p:nvPr/>
         </p:nvSpPr>
         <p:spPr>
           <a:xfrm>
             <a:off x="5759577" y="4169664"/>
-            <a:ext cx="685800" cy="475488"/>
+            <a:ext cx="685800" cy="384048"/>
           </a:xfrm>
           <a:prstGeom prst="rect">
             <a:avLst/>
@@ -23522,7 +23792,7 @@
                 <a:ea typeface="Trebuchet MS" pitchFamily="34" charset="-122"/>
                 <a:cs typeface="Trebuchet MS" pitchFamily="34" charset="-120"/>
               </a:rPr>
-              <a:t>r</a:t>
+              <a:t>i</a:t>
             </a:r>
             <a:endParaRPr lang="en-US" sz="900" dirty="0"/>
           </a:p>
@@ -23530,18 +23800,18 @@
       </p:sp>
       <p:sp>
         <p:nvSpPr>
-          <p:cNvPr id="46" name="Shape 44"/>
+          <p:cNvPr id="49" name="Shape 47"/>
           <p:cNvSpPr/>
           <p:nvPr/>
         </p:nvSpPr>
         <p:spPr>
           <a:xfrm>
             <a:off x="6668262" y="4169664"/>
-            <a:ext cx="685800" cy="475488"/>
+            <a:ext cx="685800" cy="384048"/>
           </a:xfrm>
           <a:prstGeom prst="rect">
             <a:avLst>
-              <a:gd name="adj" fmla="val 7692"/>
+              <a:gd name="adj" fmla="val 9524"/>
             </a:avLst>
           </a:prstGeom>
           <a:solidFill>
@@ -23557,14 +23827,14 @@
       </p:sp>
       <p:sp>
         <p:nvSpPr>
-          <p:cNvPr id="47" name="Text 45"/>
+          <p:cNvPr id="50" name="Text 48"/>
           <p:cNvSpPr/>
           <p:nvPr/>
         </p:nvSpPr>
         <p:spPr>
           <a:xfrm>
             <a:off x="6668262" y="4169664"/>
-            <a:ext cx="685800" cy="475488"/>
+            <a:ext cx="685800" cy="384048"/>
           </a:xfrm>
           <a:prstGeom prst="rect">
             <a:avLst/>
@@ -23588,7 +23858,7 @@
                 <a:ea typeface="Trebuchet MS" pitchFamily="34" charset="-122"/>
                 <a:cs typeface="Trebuchet MS" pitchFamily="34" charset="-120"/>
               </a:rPr>
-              <a:t>o</a:t>
+              <a:t>c</a:t>
             </a:r>
             <a:endParaRPr lang="en-US" sz="900" dirty="0"/>
           </a:p>
@@ -23596,18 +23866,57 @@
       </p:sp>
       <p:sp>
         <p:nvSpPr>
-          <p:cNvPr id="48" name="Shape 46"/>
+          <p:cNvPr id="51" name="Text 49"/>
+          <p:cNvSpPr/>
+          <p:nvPr/>
+        </p:nvSpPr>
+        <p:spPr>
+          <a:xfrm>
+            <a:off x="6668262" y="4572000"/>
+            <a:ext cx="685800" cy="219456"/>
+          </a:xfrm>
+          <a:prstGeom prst="rect">
+            <a:avLst/>
+          </a:prstGeom>
+          <a:noFill/>
+          <a:ln/>
+        </p:spPr>
+        <p:txBody>
+          <a:bodyPr wrap="square" lIns="0" tIns="0" rIns="0" bIns="0" rtlCol="0" anchor="t"/>
+          <a:lstStyle/>
+          <a:p>
+            <a:pPr algn="ctr" indent="0" marL="0">
+              <a:buNone/>
+            </a:pPr>
+            <a:r>
+              <a:rPr lang="en-US" sz="750" i="1" dirty="0">
+                <a:solidFill>
+                  <a:srgbClr val="94A3B8"/>
+                </a:solidFill>
+                <a:latin typeface="Calibri" pitchFamily="34" charset="0"/>
+                <a:ea typeface="Calibri" pitchFamily="34" charset="-122"/>
+                <a:cs typeface="Calibri" pitchFamily="34" charset="-120"/>
+              </a:rPr>
+              <a:t>/k/</a:t>
+            </a:r>
+            <a:endParaRPr lang="en-US" sz="750" dirty="0"/>
+          </a:p>
+        </p:txBody>
+      </p:sp>
+      <p:sp>
+        <p:nvSpPr>
+          <p:cNvPr id="52" name="Shape 50"/>
           <p:cNvSpPr/>
           <p:nvPr/>
         </p:nvSpPr>
         <p:spPr>
           <a:xfrm>
             <a:off x="7576947" y="4169664"/>
-            <a:ext cx="685800" cy="475488"/>
+            <a:ext cx="685800" cy="384048"/>
           </a:xfrm>
           <a:prstGeom prst="rect">
             <a:avLst>
-              <a:gd name="adj" fmla="val 7692"/>
+              <a:gd name="adj" fmla="val 9524"/>
             </a:avLst>
           </a:prstGeom>
           <a:solidFill>
@@ -23623,14 +23932,14 @@
       </p:sp>
       <p:sp>
         <p:nvSpPr>
-          <p:cNvPr id="49" name="Text 47"/>
+          <p:cNvPr id="53" name="Text 51"/>
           <p:cNvSpPr/>
           <p:nvPr/>
         </p:nvSpPr>
         <p:spPr>
           <a:xfrm>
             <a:off x="7576947" y="4169664"/>
-            <a:ext cx="685800" cy="475488"/>
+            <a:ext cx="685800" cy="384048"/>
           </a:xfrm>
           <a:prstGeom prst="rect">
             <a:avLst/>
@@ -23654,7 +23963,7 @@
                 <a:ea typeface="Trebuchet MS" pitchFamily="34" charset="-122"/>
                 <a:cs typeface="Trebuchet MS" pitchFamily="34" charset="-120"/>
               </a:rPr>
-              <a:t>me</a:t>
+              <a:t>s</a:t>
             </a:r>
             <a:endParaRPr lang="en-US" sz="900" dirty="0"/>
           </a:p>
@@ -23946,7 +24255,7 @@
                 <a:ea typeface="Calibri" pitchFamily="34" charset="-122"/>
                 <a:cs typeface="Calibri" pitchFamily="34" charset="-120"/>
               </a:rPr>
-              <a:t>Word Labs  •  wordlabs.app  •  Root: 'aero' = air, atmosphere, aircraft</a:t>
+              <a:t>Word Labs  •  wordlabs.app  •  Root: 'aero' = air or aircraft</a:t>
             </a:r>
             <a:endParaRPr lang="en-US" sz="800" dirty="0"/>
           </a:p>
@@ -24085,7 +24394,7 @@
                 <a:ea typeface="Trebuchet MS" pitchFamily="34" charset="-122"/>
                 <a:cs typeface="Trebuchet MS" pitchFamily="34" charset="-120"/>
               </a:rPr>
-              <a:t>aeronautics</a:t>
+              <a:t>aerospace</a:t>
             </a:r>
             <a:endParaRPr lang="en-US" sz="2800" dirty="0"/>
           </a:p>
@@ -24773,7 +25082,7 @@
                 <a:ea typeface="Calibri" pitchFamily="34" charset="-122"/>
                 <a:cs typeface="Calibri" pitchFamily="34" charset="-120"/>
               </a:rPr>
-              <a:t>Word Labs  •  wordlabs.app  •  Root: 'aero' = air, atmosphere, aircraft</a:t>
+              <a:t>Word Labs  •  wordlabs.app  •  Root: 'aero' = air or aircraft</a:t>
             </a:r>
             <a:endParaRPr lang="en-US" sz="800" dirty="0"/>
           </a:p>
@@ -24912,7 +25221,7 @@
                 <a:ea typeface="Trebuchet MS" pitchFamily="34" charset="-122"/>
                 <a:cs typeface="Trebuchet MS" pitchFamily="34" charset="-120"/>
               </a:rPr>
-              <a:t>aeronautics</a:t>
+              <a:t>aerospace</a:t>
             </a:r>
             <a:endParaRPr lang="en-US" sz="2800" dirty="0"/>
           </a:p>
@@ -24992,7 +25301,7 @@
         </p:nvSpPr>
         <p:spPr>
           <a:xfrm>
-            <a:off x="2221992" y="2258568"/>
+            <a:off x="2938272" y="2258568"/>
             <a:ext cx="1828800" cy="292608"/>
           </a:xfrm>
           <a:prstGeom prst="rect">
@@ -25026,7 +25335,7 @@
         </p:nvSpPr>
         <p:spPr>
           <a:xfrm>
-            <a:off x="2221992" y="2258568"/>
+            <a:off x="2938272" y="2258568"/>
             <a:ext cx="1828800" cy="292608"/>
           </a:xfrm>
           <a:prstGeom prst="rect">
@@ -25065,7 +25374,7 @@
         </p:nvSpPr>
         <p:spPr>
           <a:xfrm>
-            <a:off x="2221992" y="2569464"/>
+            <a:off x="2938272" y="2569464"/>
             <a:ext cx="1828800" cy="201168"/>
           </a:xfrm>
           <a:prstGeom prst="rect">
@@ -25104,7 +25413,7 @@
         </p:nvSpPr>
         <p:spPr>
           <a:xfrm>
-            <a:off x="4370832" y="2258568"/>
+            <a:off x="5803392" y="2258568"/>
             <a:ext cx="1828800" cy="292608"/>
           </a:xfrm>
           <a:prstGeom prst="rect">
@@ -25138,7 +25447,7 @@
         </p:nvSpPr>
         <p:spPr>
           <a:xfrm>
-            <a:off x="4370832" y="2258568"/>
+            <a:off x="5803392" y="2258568"/>
             <a:ext cx="1828800" cy="292608"/>
           </a:xfrm>
           <a:prstGeom prst="rect">
@@ -25163,7 +25472,7 @@
                 <a:ea typeface="Trebuchet MS" pitchFamily="34" charset="-122"/>
                 <a:cs typeface="Trebuchet MS" pitchFamily="34" charset="-120"/>
               </a:rPr>
-              <a:t>naut</a:t>
+              <a:t>space</a:t>
             </a:r>
             <a:endParaRPr lang="en-US" sz="1300" dirty="0"/>
           </a:p>
@@ -25177,7 +25486,7 @@
         </p:nvSpPr>
         <p:spPr>
           <a:xfrm>
-            <a:off x="4370832" y="2569464"/>
+            <a:off x="5803392" y="2569464"/>
             <a:ext cx="1828800" cy="201168"/>
           </a:xfrm>
           <a:prstGeom prst="rect">
@@ -25202,7 +25511,7 @@
                 <a:ea typeface="Calibri" pitchFamily="34" charset="-122"/>
                 <a:cs typeface="Calibri" pitchFamily="34" charset="-120"/>
               </a:rPr>
-              <a:t>sailor, navigator</a:t>
+              <a:t>area or expanse</a:t>
             </a:r>
             <a:endParaRPr lang="en-US" sz="850" dirty="0"/>
           </a:p>
@@ -25216,30 +25525,23 @@
         </p:nvSpPr>
         <p:spPr>
           <a:xfrm>
-            <a:off x="6519672" y="2258568"/>
-            <a:ext cx="1828800" cy="292608"/>
+            <a:off x="365760" y="3273552"/>
+            <a:ext cx="1371600" cy="658368"/>
           </a:xfrm>
           <a:prstGeom prst="rect">
             <a:avLst>
-              <a:gd name="adj" fmla="val 25000"/>
+              <a:gd name="adj" fmla="val 8333"/>
             </a:avLst>
           </a:prstGeom>
           <a:solidFill>
-            <a:srgbClr val="FCE7F3"/>
-          </a:solidFill>
-          <a:ln w="19050">
-            <a:solidFill>
-              <a:srgbClr val="DB2777"/>
-            </a:solidFill>
-            <a:prstDash val="solid"/>
-          </a:ln>
-          <a:effectLst>
-            <a:outerShdw sx="100000" sy="100000" kx="0" ky="0" algn="bl" rotWithShape="0" blurRad="101600" dist="38100" dir="8100000">
-              <a:srgbClr val="000000">
-                <a:alpha val="12000"/>
-              </a:srgbClr>
-            </a:outerShdw>
-          </a:effectLst>
+            <a:srgbClr val="E2E8F0"/>
+          </a:solidFill>
+          <a:ln w="12700">
+            <a:solidFill>
+              <a:srgbClr val="E2E8F0"/>
+            </a:solidFill>
+            <a:prstDash val="solid"/>
+          </a:ln>
         </p:spPr>
       </p:sp>
       <p:sp>
@@ -25250,90 +25552,117 @@
         </p:nvSpPr>
         <p:spPr>
           <a:xfrm>
-            <a:off x="6519672" y="2258568"/>
-            <a:ext cx="1828800" cy="292608"/>
-          </a:xfrm>
-          <a:prstGeom prst="rect">
-            <a:avLst/>
-          </a:prstGeom>
-          <a:noFill/>
-          <a:ln/>
-        </p:spPr>
-        <p:txBody>
-          <a:bodyPr wrap="square" lIns="0" tIns="0" rIns="0" bIns="0" rtlCol="0" anchor="ctr"/>
-          <a:lstStyle/>
-          <a:p>
-            <a:pPr algn="ctr" indent="0" marL="0">
-              <a:buNone/>
-            </a:pPr>
-            <a:r>
-              <a:rPr lang="en-US" sz="1300" b="1" dirty="0">
-                <a:solidFill>
-                  <a:srgbClr val="9D174D"/>
+            <a:off x="365760" y="3273552"/>
+            <a:ext cx="1371600" cy="658368"/>
+          </a:xfrm>
+          <a:prstGeom prst="rect">
+            <a:avLst/>
+          </a:prstGeom>
+          <a:noFill/>
+          <a:ln/>
+        </p:spPr>
+        <p:txBody>
+          <a:bodyPr wrap="square" lIns="0" tIns="0" rIns="0" bIns="0" rtlCol="0" anchor="ctr"/>
+          <a:lstStyle/>
+          <a:p>
+            <a:pPr algn="ctr" indent="0" marL="0">
+              <a:buNone/>
+            </a:pPr>
+            <a:r>
+              <a:rPr lang="en-US" sz="1100" b="1" dirty="0">
+                <a:solidFill>
+                  <a:srgbClr val="475569"/>
                 </a:solidFill>
                 <a:latin typeface="Trebuchet MS" pitchFamily="34" charset="0"/>
                 <a:ea typeface="Trebuchet MS" pitchFamily="34" charset="-122"/>
                 <a:cs typeface="Trebuchet MS" pitchFamily="34" charset="-120"/>
               </a:rPr>
-              <a:t>ics</a:t>
-            </a:r>
-            <a:endParaRPr lang="en-US" sz="1300" dirty="0"/>
-          </a:p>
-        </p:txBody>
-      </p:sp>
-      <p:sp>
-        <p:nvSpPr>
-          <p:cNvPr id="24" name="Text 22"/>
-          <p:cNvSpPr/>
-          <p:nvPr/>
-        </p:nvSpPr>
-        <p:spPr>
-          <a:xfrm>
-            <a:off x="6519672" y="2569464"/>
-            <a:ext cx="1828800" cy="201168"/>
-          </a:xfrm>
-          <a:prstGeom prst="rect">
-            <a:avLst/>
-          </a:prstGeom>
-          <a:noFill/>
-          <a:ln/>
-        </p:spPr>
-        <p:txBody>
-          <a:bodyPr wrap="square" lIns="0" tIns="0" rIns="0" bIns="0" rtlCol="0" anchor="t"/>
-          <a:lstStyle/>
-          <a:p>
-            <a:pPr algn="ctr" indent="0" marL="0">
-              <a:buNone/>
-            </a:pPr>
-            <a:r>
-              <a:rPr lang="en-US" sz="850" dirty="0">
-                <a:solidFill>
-                  <a:srgbClr val="475569"/>
+              <a:t>Syllables</a:t>
+            </a:r>
+            <a:endParaRPr lang="en-US" sz="1100" dirty="0"/>
+          </a:p>
+        </p:txBody>
+      </p:sp>
+      <p:sp>
+        <p:nvSpPr>
+          <p:cNvPr id="24" name="Shape 22"/>
+          <p:cNvSpPr/>
+          <p:nvPr/>
+        </p:nvSpPr>
+        <p:spPr>
+          <a:xfrm>
+            <a:off x="1874520" y="3273552"/>
+            <a:ext cx="6903720" cy="658368"/>
+          </a:xfrm>
+          <a:prstGeom prst="rect">
+            <a:avLst>
+              <a:gd name="adj" fmla="val 8333"/>
+            </a:avLst>
+          </a:prstGeom>
+          <a:solidFill>
+            <a:srgbClr val="F8FAFC"/>
+          </a:solidFill>
+          <a:ln w="12700">
+            <a:solidFill>
+              <a:srgbClr val="E2E8F0"/>
+            </a:solidFill>
+            <a:prstDash val="dash"/>
+          </a:ln>
+        </p:spPr>
+      </p:sp>
+      <p:sp>
+        <p:nvSpPr>
+          <p:cNvPr id="25" name="Text 23"/>
+          <p:cNvSpPr/>
+          <p:nvPr/>
+        </p:nvSpPr>
+        <p:spPr>
+          <a:xfrm>
+            <a:off x="1874520" y="3273552"/>
+            <a:ext cx="6903720" cy="658368"/>
+          </a:xfrm>
+          <a:prstGeom prst="rect">
+            <a:avLst/>
+          </a:prstGeom>
+          <a:noFill/>
+          <a:ln/>
+        </p:spPr>
+        <p:txBody>
+          <a:bodyPr wrap="square" rtlCol="0" anchor="ctr"/>
+          <a:lstStyle/>
+          <a:p>
+            <a:pPr algn="ctr" indent="0" marL="0">
+              <a:buNone/>
+            </a:pPr>
+            <a:r>
+              <a:rPr lang="en-US" sz="1100" i="1" dirty="0">
+                <a:solidFill>
+                  <a:srgbClr val="CBD5E1"/>
                 </a:solidFill>
                 <a:latin typeface="Calibri" pitchFamily="34" charset="0"/>
                 <a:ea typeface="Calibri" pitchFamily="34" charset="-122"/>
                 <a:cs typeface="Calibri" pitchFamily="34" charset="-120"/>
               </a:rPr>
-              <a:t>study or practice of</a:t>
-            </a:r>
-            <a:endParaRPr lang="en-US" sz="850" dirty="0"/>
-          </a:p>
-        </p:txBody>
-      </p:sp>
-      <p:sp>
-        <p:nvSpPr>
-          <p:cNvPr id="25" name="Shape 23"/>
-          <p:cNvSpPr/>
-          <p:nvPr/>
-        </p:nvSpPr>
-        <p:spPr>
-          <a:xfrm>
-            <a:off x="365760" y="3273552"/>
-            <a:ext cx="1371600" cy="658368"/>
+              <a:t>Write here...</a:t>
+            </a:r>
+            <a:endParaRPr lang="en-US" sz="1100" dirty="0"/>
+          </a:p>
+        </p:txBody>
+      </p:sp>
+      <p:sp>
+        <p:nvSpPr>
+          <p:cNvPr id="26" name="Shape 24"/>
+          <p:cNvSpPr/>
+          <p:nvPr/>
+        </p:nvSpPr>
+        <p:spPr>
+          <a:xfrm>
+            <a:off x="365760" y="4096512"/>
+            <a:ext cx="1371600" cy="804672"/>
           </a:xfrm>
           <a:prstGeom prst="rect">
             <a:avLst>
-              <a:gd name="adj" fmla="val 8333"/>
+              <a:gd name="adj" fmla="val 6818"/>
             </a:avLst>
           </a:prstGeom>
           <a:solidFill>
@@ -25349,14 +25678,14 @@
       </p:sp>
       <p:sp>
         <p:nvSpPr>
-          <p:cNvPr id="26" name="Text 24"/>
-          <p:cNvSpPr/>
-          <p:nvPr/>
-        </p:nvSpPr>
-        <p:spPr>
-          <a:xfrm>
-            <a:off x="365760" y="3273552"/>
-            <a:ext cx="1371600" cy="658368"/>
+          <p:cNvPr id="27" name="Text 25"/>
+          <p:cNvSpPr/>
+          <p:nvPr/>
+        </p:nvSpPr>
+        <p:spPr>
+          <a:xfrm>
+            <a:off x="365760" y="4096512"/>
+            <a:ext cx="1371600" cy="804672"/>
           </a:xfrm>
           <a:prstGeom prst="rect">
             <a:avLst/>
@@ -25380,7 +25709,7 @@
                 <a:ea typeface="Trebuchet MS" pitchFamily="34" charset="-122"/>
                 <a:cs typeface="Trebuchet MS" pitchFamily="34" charset="-120"/>
               </a:rPr>
-              <a:t>Syllables</a:t>
+              <a:t>Phonemes</a:t>
             </a:r>
             <a:endParaRPr lang="en-US" sz="1100" dirty="0"/>
           </a:p>
@@ -25388,80 +25717,14 @@
       </p:sp>
       <p:sp>
         <p:nvSpPr>
-          <p:cNvPr id="27" name="Shape 25"/>
-          <p:cNvSpPr/>
-          <p:nvPr/>
-        </p:nvSpPr>
-        <p:spPr>
-          <a:xfrm>
-            <a:off x="1874520" y="3273552"/>
-            <a:ext cx="6903720" cy="658368"/>
-          </a:xfrm>
-          <a:prstGeom prst="rect">
-            <a:avLst>
-              <a:gd name="adj" fmla="val 8333"/>
-            </a:avLst>
-          </a:prstGeom>
-          <a:solidFill>
-            <a:srgbClr val="F8FAFC"/>
-          </a:solidFill>
-          <a:ln w="12700">
-            <a:solidFill>
-              <a:srgbClr val="E2E8F0"/>
-            </a:solidFill>
-            <a:prstDash val="dash"/>
-          </a:ln>
-        </p:spPr>
-      </p:sp>
-      <p:sp>
-        <p:nvSpPr>
-          <p:cNvPr id="28" name="Text 26"/>
-          <p:cNvSpPr/>
-          <p:nvPr/>
-        </p:nvSpPr>
-        <p:spPr>
-          <a:xfrm>
-            <a:off x="1874520" y="3273552"/>
-            <a:ext cx="6903720" cy="658368"/>
-          </a:xfrm>
-          <a:prstGeom prst="rect">
-            <a:avLst/>
-          </a:prstGeom>
-          <a:noFill/>
-          <a:ln/>
-        </p:spPr>
-        <p:txBody>
-          <a:bodyPr wrap="square" rtlCol="0" anchor="ctr"/>
-          <a:lstStyle/>
-          <a:p>
-            <a:pPr algn="ctr" indent="0" marL="0">
-              <a:buNone/>
-            </a:pPr>
-            <a:r>
-              <a:rPr lang="en-US" sz="1100" i="1" dirty="0">
-                <a:solidFill>
-                  <a:srgbClr val="CBD5E1"/>
-                </a:solidFill>
-                <a:latin typeface="Calibri" pitchFamily="34" charset="0"/>
-                <a:ea typeface="Calibri" pitchFamily="34" charset="-122"/>
-                <a:cs typeface="Calibri" pitchFamily="34" charset="-120"/>
-              </a:rPr>
-              <a:t>Write here...</a:t>
-            </a:r>
-            <a:endParaRPr lang="en-US" sz="1100" dirty="0"/>
-          </a:p>
-        </p:txBody>
-      </p:sp>
-      <p:sp>
-        <p:nvSpPr>
-          <p:cNvPr id="29" name="Shape 27"/>
-          <p:cNvSpPr/>
-          <p:nvPr/>
-        </p:nvSpPr>
-        <p:spPr>
-          <a:xfrm>
-            <a:off x="365760" y="4096512"/>
-            <a:ext cx="1371600" cy="804672"/>
+          <p:cNvPr id="28" name="Shape 26"/>
+          <p:cNvSpPr/>
+          <p:nvPr/>
+        </p:nvSpPr>
+        <p:spPr>
+          <a:xfrm>
+            <a:off x="1874520" y="4096512"/>
+            <a:ext cx="6903720" cy="804672"/>
           </a:xfrm>
           <a:prstGeom prst="rect">
             <a:avLst>
@@ -25469,85 +25732,19 @@
             </a:avLst>
           </a:prstGeom>
           <a:solidFill>
-            <a:srgbClr val="E2E8F0"/>
+            <a:srgbClr val="F8FAFC"/>
           </a:solidFill>
           <a:ln w="12700">
             <a:solidFill>
               <a:srgbClr val="E2E8F0"/>
             </a:solidFill>
-            <a:prstDash val="solid"/>
-          </a:ln>
-        </p:spPr>
-      </p:sp>
-      <p:sp>
-        <p:nvSpPr>
-          <p:cNvPr id="30" name="Text 28"/>
-          <p:cNvSpPr/>
-          <p:nvPr/>
-        </p:nvSpPr>
-        <p:spPr>
-          <a:xfrm>
-            <a:off x="365760" y="4096512"/>
-            <a:ext cx="1371600" cy="804672"/>
-          </a:xfrm>
-          <a:prstGeom prst="rect">
-            <a:avLst/>
-          </a:prstGeom>
-          <a:noFill/>
-          <a:ln/>
-        </p:spPr>
-        <p:txBody>
-          <a:bodyPr wrap="square" lIns="0" tIns="0" rIns="0" bIns="0" rtlCol="0" anchor="ctr"/>
-          <a:lstStyle/>
-          <a:p>
-            <a:pPr algn="ctr" indent="0" marL="0">
-              <a:buNone/>
-            </a:pPr>
-            <a:r>
-              <a:rPr lang="en-US" sz="1100" b="1" dirty="0">
-                <a:solidFill>
-                  <a:srgbClr val="475569"/>
-                </a:solidFill>
-                <a:latin typeface="Trebuchet MS" pitchFamily="34" charset="0"/>
-                <a:ea typeface="Trebuchet MS" pitchFamily="34" charset="-122"/>
-                <a:cs typeface="Trebuchet MS" pitchFamily="34" charset="-120"/>
-              </a:rPr>
-              <a:t>Phonemes</a:t>
-            </a:r>
-            <a:endParaRPr lang="en-US" sz="1100" dirty="0"/>
-          </a:p>
-        </p:txBody>
-      </p:sp>
-      <p:sp>
-        <p:nvSpPr>
-          <p:cNvPr id="31" name="Shape 29"/>
-          <p:cNvSpPr/>
-          <p:nvPr/>
-        </p:nvSpPr>
-        <p:spPr>
-          <a:xfrm>
-            <a:off x="1874520" y="4096512"/>
-            <a:ext cx="6903720" cy="804672"/>
-          </a:xfrm>
-          <a:prstGeom prst="rect">
-            <a:avLst>
-              <a:gd name="adj" fmla="val 6818"/>
-            </a:avLst>
-          </a:prstGeom>
-          <a:solidFill>
-            <a:srgbClr val="F8FAFC"/>
-          </a:solidFill>
-          <a:ln w="12700">
-            <a:solidFill>
-              <a:srgbClr val="E2E8F0"/>
-            </a:solidFill>
             <a:prstDash val="dash"/>
           </a:ln>
         </p:spPr>
       </p:sp>
       <p:sp>
         <p:nvSpPr>
-          <p:cNvPr id="32" name="Text 30"/>
+          <p:cNvPr id="29" name="Text 27"/>
           <p:cNvSpPr/>
           <p:nvPr/>
         </p:nvSpPr>
@@ -25870,7 +26067,7 @@
                 <a:ea typeface="Calibri" pitchFamily="34" charset="-122"/>
                 <a:cs typeface="Calibri" pitchFamily="34" charset="-120"/>
               </a:rPr>
-              <a:t>Word Labs  •  wordlabs.app  •  Root: 'aero' = air, atmosphere, aircraft</a:t>
+              <a:t>Word Labs  •  wordlabs.app  •  Root: 'aero' = air or aircraft</a:t>
             </a:r>
             <a:endParaRPr lang="en-US" sz="800" dirty="0"/>
           </a:p>
@@ -25943,7 +26140,7 @@
                 <a:ea typeface="Trebuchet MS" pitchFamily="34" charset="-122"/>
                 <a:cs typeface="Trebuchet MS" pitchFamily="34" charset="-120"/>
               </a:rPr>
-              <a:t>We are learning that the root 'aero' means 'air, atmosphere, aircraft'.</a:t>
+              <a:t>We are learning that the root 'aero' means 'air or aircraft'.</a:t>
             </a:r>
             <a:endParaRPr lang="en-US" sz="2000" dirty="0"/>
           </a:p>
@@ -26589,7 +26786,7 @@
                 <a:ea typeface="Calibri" pitchFamily="34" charset="-122"/>
                 <a:cs typeface="Calibri" pitchFamily="34" charset="-120"/>
               </a:rPr>
-              <a:t>Word Labs  •  wordlabs.app  •  Root: 'aero' = air, atmosphere, aircraft</a:t>
+              <a:t>Word Labs  •  wordlabs.app  •  Root: 'aero' = air or aircraft</a:t>
             </a:r>
             <a:endParaRPr lang="en-US" sz="800" dirty="0"/>
           </a:p>
@@ -26728,7 +26925,7 @@
                 <a:ea typeface="Trebuchet MS" pitchFamily="34" charset="-122"/>
                 <a:cs typeface="Trebuchet MS" pitchFamily="34" charset="-120"/>
               </a:rPr>
-              <a:t>aeronautics</a:t>
+              <a:t>aerospace</a:t>
             </a:r>
             <a:endParaRPr lang="en-US" sz="2800" dirty="0"/>
           </a:p>
@@ -26808,7 +27005,7 @@
         </p:nvSpPr>
         <p:spPr>
           <a:xfrm>
-            <a:off x="2221992" y="2258568"/>
+            <a:off x="2938272" y="2258568"/>
             <a:ext cx="1828800" cy="292608"/>
           </a:xfrm>
           <a:prstGeom prst="rect">
@@ -26842,7 +27039,7 @@
         </p:nvSpPr>
         <p:spPr>
           <a:xfrm>
-            <a:off x="2221992" y="2258568"/>
+            <a:off x="2938272" y="2258568"/>
             <a:ext cx="1828800" cy="292608"/>
           </a:xfrm>
           <a:prstGeom prst="rect">
@@ -26881,7 +27078,7 @@
         </p:nvSpPr>
         <p:spPr>
           <a:xfrm>
-            <a:off x="2221992" y="2569464"/>
+            <a:off x="2938272" y="2569464"/>
             <a:ext cx="1828800" cy="201168"/>
           </a:xfrm>
           <a:prstGeom prst="rect">
@@ -26920,7 +27117,7 @@
         </p:nvSpPr>
         <p:spPr>
           <a:xfrm>
-            <a:off x="4370832" y="2258568"/>
+            <a:off x="5803392" y="2258568"/>
             <a:ext cx="1828800" cy="292608"/>
           </a:xfrm>
           <a:prstGeom prst="rect">
@@ -26954,7 +27151,7 @@
         </p:nvSpPr>
         <p:spPr>
           <a:xfrm>
-            <a:off x="4370832" y="2258568"/>
+            <a:off x="5803392" y="2258568"/>
             <a:ext cx="1828800" cy="292608"/>
           </a:xfrm>
           <a:prstGeom prst="rect">
@@ -26979,7 +27176,7 @@
                 <a:ea typeface="Trebuchet MS" pitchFamily="34" charset="-122"/>
                 <a:cs typeface="Trebuchet MS" pitchFamily="34" charset="-120"/>
               </a:rPr>
-              <a:t>naut</a:t>
+              <a:t>space</a:t>
             </a:r>
             <a:endParaRPr lang="en-US" sz="1300" dirty="0"/>
           </a:p>
@@ -26993,7 +27190,7 @@
         </p:nvSpPr>
         <p:spPr>
           <a:xfrm>
-            <a:off x="4370832" y="2569464"/>
+            <a:off x="5803392" y="2569464"/>
             <a:ext cx="1828800" cy="201168"/>
           </a:xfrm>
           <a:prstGeom prst="rect">
@@ -27018,7 +27215,7 @@
                 <a:ea typeface="Calibri" pitchFamily="34" charset="-122"/>
                 <a:cs typeface="Calibri" pitchFamily="34" charset="-120"/>
               </a:rPr>
-              <a:t>sailor, navigator</a:t>
+              <a:t>area or expanse</a:t>
             </a:r>
             <a:endParaRPr lang="en-US" sz="850" dirty="0"/>
           </a:p>
@@ -27032,30 +27229,23 @@
         </p:nvSpPr>
         <p:spPr>
           <a:xfrm>
-            <a:off x="6519672" y="2258568"/>
-            <a:ext cx="1828800" cy="292608"/>
+            <a:off x="365760" y="3273552"/>
+            <a:ext cx="1371600" cy="658368"/>
           </a:xfrm>
           <a:prstGeom prst="rect">
             <a:avLst>
-              <a:gd name="adj" fmla="val 25000"/>
+              <a:gd name="adj" fmla="val 8333"/>
             </a:avLst>
           </a:prstGeom>
           <a:solidFill>
-            <a:srgbClr val="FCE7F3"/>
-          </a:solidFill>
-          <a:ln w="19050">
-            <a:solidFill>
-              <a:srgbClr val="DB2777"/>
-            </a:solidFill>
-            <a:prstDash val="solid"/>
-          </a:ln>
-          <a:effectLst>
-            <a:outerShdw sx="100000" sy="100000" kx="0" ky="0" algn="bl" rotWithShape="0" blurRad="101600" dist="38100" dir="8100000">
-              <a:srgbClr val="000000">
-                <a:alpha val="12000"/>
-              </a:srgbClr>
-            </a:outerShdw>
-          </a:effectLst>
+            <a:srgbClr val="E2E8F0"/>
+          </a:solidFill>
+          <a:ln w="12700">
+            <a:solidFill>
+              <a:srgbClr val="E2E8F0"/>
+            </a:solidFill>
+            <a:prstDash val="solid"/>
+          </a:ln>
         </p:spPr>
       </p:sp>
       <p:sp>
@@ -27066,86 +27256,47 @@
         </p:nvSpPr>
         <p:spPr>
           <a:xfrm>
-            <a:off x="6519672" y="2258568"/>
-            <a:ext cx="1828800" cy="292608"/>
-          </a:xfrm>
-          <a:prstGeom prst="rect">
-            <a:avLst/>
-          </a:prstGeom>
-          <a:noFill/>
-          <a:ln/>
-        </p:spPr>
-        <p:txBody>
-          <a:bodyPr wrap="square" lIns="0" tIns="0" rIns="0" bIns="0" rtlCol="0" anchor="ctr"/>
-          <a:lstStyle/>
-          <a:p>
-            <a:pPr algn="ctr" indent="0" marL="0">
-              <a:buNone/>
-            </a:pPr>
-            <a:r>
-              <a:rPr lang="en-US" sz="1300" b="1" dirty="0">
-                <a:solidFill>
-                  <a:srgbClr val="9D174D"/>
+            <a:off x="365760" y="3273552"/>
+            <a:ext cx="1371600" cy="658368"/>
+          </a:xfrm>
+          <a:prstGeom prst="rect">
+            <a:avLst/>
+          </a:prstGeom>
+          <a:noFill/>
+          <a:ln/>
+        </p:spPr>
+        <p:txBody>
+          <a:bodyPr wrap="square" lIns="0" tIns="0" rIns="0" bIns="0" rtlCol="0" anchor="ctr"/>
+          <a:lstStyle/>
+          <a:p>
+            <a:pPr algn="ctr" indent="0" marL="0">
+              <a:buNone/>
+            </a:pPr>
+            <a:r>
+              <a:rPr lang="en-US" sz="1100" b="1" dirty="0">
+                <a:solidFill>
+                  <a:srgbClr val="475569"/>
                 </a:solidFill>
                 <a:latin typeface="Trebuchet MS" pitchFamily="34" charset="0"/>
                 <a:ea typeface="Trebuchet MS" pitchFamily="34" charset="-122"/>
                 <a:cs typeface="Trebuchet MS" pitchFamily="34" charset="-120"/>
               </a:rPr>
-              <a:t>ics</a:t>
-            </a:r>
-            <a:endParaRPr lang="en-US" sz="1300" dirty="0"/>
-          </a:p>
-        </p:txBody>
-      </p:sp>
-      <p:sp>
-        <p:nvSpPr>
-          <p:cNvPr id="24" name="Text 22"/>
-          <p:cNvSpPr/>
-          <p:nvPr/>
-        </p:nvSpPr>
-        <p:spPr>
-          <a:xfrm>
-            <a:off x="6519672" y="2569464"/>
-            <a:ext cx="1828800" cy="201168"/>
-          </a:xfrm>
-          <a:prstGeom prst="rect">
-            <a:avLst/>
-          </a:prstGeom>
-          <a:noFill/>
-          <a:ln/>
-        </p:spPr>
-        <p:txBody>
-          <a:bodyPr wrap="square" lIns="0" tIns="0" rIns="0" bIns="0" rtlCol="0" anchor="t"/>
-          <a:lstStyle/>
-          <a:p>
-            <a:pPr algn="ctr" indent="0" marL="0">
-              <a:buNone/>
-            </a:pPr>
-            <a:r>
-              <a:rPr lang="en-US" sz="850" dirty="0">
-                <a:solidFill>
-                  <a:srgbClr val="475569"/>
-                </a:solidFill>
-                <a:latin typeface="Calibri" pitchFamily="34" charset="0"/>
-                <a:ea typeface="Calibri" pitchFamily="34" charset="-122"/>
-                <a:cs typeface="Calibri" pitchFamily="34" charset="-120"/>
-              </a:rPr>
-              <a:t>study or practice of</a:t>
-            </a:r>
-            <a:endParaRPr lang="en-US" sz="850" dirty="0"/>
-          </a:p>
-        </p:txBody>
-      </p:sp>
-      <p:sp>
-        <p:nvSpPr>
-          <p:cNvPr id="25" name="Shape 23"/>
-          <p:cNvSpPr/>
-          <p:nvPr/>
-        </p:nvSpPr>
-        <p:spPr>
-          <a:xfrm>
-            <a:off x="365760" y="3273552"/>
-            <a:ext cx="1371600" cy="658368"/>
+              <a:t>Syllables</a:t>
+            </a:r>
+            <a:endParaRPr lang="en-US" sz="1100" dirty="0"/>
+          </a:p>
+        </p:txBody>
+      </p:sp>
+      <p:sp>
+        <p:nvSpPr>
+          <p:cNvPr id="24" name="Shape 22"/>
+          <p:cNvSpPr/>
+          <p:nvPr/>
+        </p:nvSpPr>
+        <p:spPr>
+          <a:xfrm>
+            <a:off x="1874520" y="3273552"/>
+            <a:ext cx="6903720" cy="658368"/>
           </a:xfrm>
           <a:prstGeom prst="rect">
             <a:avLst>
@@ -27153,11 +27304,38 @@
             </a:avLst>
           </a:prstGeom>
           <a:solidFill>
-            <a:srgbClr val="E2E8F0"/>
-          </a:solidFill>
-          <a:ln w="12700">
-            <a:solidFill>
-              <a:srgbClr val="E2E8F0"/>
+            <a:srgbClr val="CCFBF1"/>
+          </a:solidFill>
+          <a:ln w="12700">
+            <a:solidFill>
+              <a:srgbClr val="0D9488"/>
+            </a:solidFill>
+            <a:prstDash val="solid"/>
+          </a:ln>
+        </p:spPr>
+      </p:sp>
+      <p:sp>
+        <p:nvSpPr>
+          <p:cNvPr id="25" name="Shape 23"/>
+          <p:cNvSpPr/>
+          <p:nvPr/>
+        </p:nvSpPr>
+        <p:spPr>
+          <a:xfrm>
+            <a:off x="2313432" y="3364992"/>
+            <a:ext cx="1645920" cy="475488"/>
+          </a:xfrm>
+          <a:prstGeom prst="rect">
+            <a:avLst>
+              <a:gd name="adj" fmla="val 9615"/>
+            </a:avLst>
+          </a:prstGeom>
+          <a:solidFill>
+            <a:srgbClr val="FFFFFF"/>
+          </a:solidFill>
+          <a:ln w="12700">
+            <a:solidFill>
+              <a:srgbClr val="0D9488"/>
             </a:solidFill>
             <a:prstDash val="solid"/>
           </a:ln>
@@ -27171,63 +27349,75 @@
         </p:nvSpPr>
         <p:spPr>
           <a:xfrm>
-            <a:off x="365760" y="3273552"/>
-            <a:ext cx="1371600" cy="658368"/>
-          </a:xfrm>
-          <a:prstGeom prst="rect">
-            <a:avLst/>
-          </a:prstGeom>
-          <a:noFill/>
-          <a:ln/>
-        </p:spPr>
-        <p:txBody>
-          <a:bodyPr wrap="square" lIns="0" tIns="0" rIns="0" bIns="0" rtlCol="0" anchor="ctr"/>
-          <a:lstStyle/>
-          <a:p>
-            <a:pPr algn="ctr" indent="0" marL="0">
-              <a:buNone/>
-            </a:pPr>
-            <a:r>
-              <a:rPr lang="en-US" sz="1100" b="1" dirty="0">
-                <a:solidFill>
-                  <a:srgbClr val="475569"/>
+            <a:off x="2313432" y="3364992"/>
+            <a:ext cx="1645920" cy="475488"/>
+          </a:xfrm>
+          <a:prstGeom prst="rect">
+            <a:avLst/>
+          </a:prstGeom>
+          <a:noFill/>
+          <a:ln/>
+        </p:spPr>
+        <p:txBody>
+          <a:bodyPr wrap="square" lIns="0" tIns="0" rIns="0" bIns="0" rtlCol="0" anchor="ctr"/>
+          <a:lstStyle/>
+          <a:p>
+            <a:pPr algn="ctr" indent="0" marL="0">
+              <a:buNone/>
+            </a:pPr>
+            <a:r>
+              <a:rPr lang="en-US" sz="1400" b="1" dirty="0">
+                <a:solidFill>
+                  <a:srgbClr val="0D9488"/>
                 </a:solidFill>
                 <a:latin typeface="Trebuchet MS" pitchFamily="34" charset="0"/>
                 <a:ea typeface="Trebuchet MS" pitchFamily="34" charset="-122"/>
                 <a:cs typeface="Trebuchet MS" pitchFamily="34" charset="-120"/>
               </a:rPr>
-              <a:t>Syllables</a:t>
-            </a:r>
-            <a:endParaRPr lang="en-US" sz="1100" dirty="0"/>
-          </a:p>
-        </p:txBody>
-      </p:sp>
-      <p:sp>
-        <p:nvSpPr>
-          <p:cNvPr id="27" name="Shape 25"/>
-          <p:cNvSpPr/>
-          <p:nvPr/>
-        </p:nvSpPr>
-        <p:spPr>
-          <a:xfrm>
-            <a:off x="1874520" y="3273552"/>
-            <a:ext cx="6903720" cy="658368"/>
-          </a:xfrm>
-          <a:prstGeom prst="rect">
-            <a:avLst>
-              <a:gd name="adj" fmla="val 8333"/>
-            </a:avLst>
-          </a:prstGeom>
-          <a:solidFill>
-            <a:srgbClr val="CCFBF1"/>
-          </a:solidFill>
-          <a:ln w="12700">
-            <a:solidFill>
-              <a:srgbClr val="0D9488"/>
-            </a:solidFill>
-            <a:prstDash val="solid"/>
-          </a:ln>
-        </p:spPr>
+              <a:t>aer</a:t>
+            </a:r>
+            <a:endParaRPr lang="en-US" sz="1400" dirty="0"/>
+          </a:p>
+        </p:txBody>
+      </p:sp>
+      <p:sp>
+        <p:nvSpPr>
+          <p:cNvPr id="27" name="Text 25"/>
+          <p:cNvSpPr/>
+          <p:nvPr/>
+        </p:nvSpPr>
+        <p:spPr>
+          <a:xfrm>
+            <a:off x="3959352" y="3364992"/>
+            <a:ext cx="411480" cy="475488"/>
+          </a:xfrm>
+          <a:prstGeom prst="rect">
+            <a:avLst/>
+          </a:prstGeom>
+          <a:noFill/>
+          <a:ln/>
+        </p:spPr>
+        <p:txBody>
+          <a:bodyPr wrap="square" lIns="0" tIns="0" rIns="0" bIns="0" rtlCol="0" anchor="ctr"/>
+          <a:lstStyle/>
+          <a:p>
+            <a:pPr algn="ctr" indent="0" marL="0">
+              <a:buNone/>
+            </a:pPr>
+            <a:r>
+              <a:rPr lang="en-US" sz="1600" b="1" dirty="0">
+                <a:solidFill>
+                  <a:srgbClr val="0D9488"/>
+                </a:solidFill>
+                <a:latin typeface="Trebuchet MS" pitchFamily="34" charset="0"/>
+                <a:ea typeface="Trebuchet MS" pitchFamily="34" charset="-122"/>
+                <a:cs typeface="Trebuchet MS" pitchFamily="34" charset="-120"/>
+              </a:rPr>
+              <a:t>·</a:t>
+            </a:r>
+            <a:endParaRPr lang="en-US" sz="1600" dirty="0"/>
+          </a:p>
+        </p:txBody>
       </p:sp>
       <p:sp>
         <p:nvSpPr>
@@ -27237,8 +27427,8 @@
         </p:nvSpPr>
         <p:spPr>
           <a:xfrm>
-            <a:off x="1975104" y="3364992"/>
-            <a:ext cx="1554480" cy="475488"/>
+            <a:off x="4370832" y="3364992"/>
+            <a:ext cx="1645920" cy="475488"/>
           </a:xfrm>
           <a:prstGeom prst="rect">
             <a:avLst>
@@ -27264,8 +27454,8 @@
         </p:nvSpPr>
         <p:spPr>
           <a:xfrm>
-            <a:off x="1975104" y="3364992"/>
-            <a:ext cx="1554480" cy="475488"/>
+            <a:off x="4370832" y="3364992"/>
+            <a:ext cx="1645920" cy="475488"/>
           </a:xfrm>
           <a:prstGeom prst="rect">
             <a:avLst/>
@@ -27289,7 +27479,7 @@
                 <a:ea typeface="Trebuchet MS" pitchFamily="34" charset="-122"/>
                 <a:cs typeface="Trebuchet MS" pitchFamily="34" charset="-120"/>
               </a:rPr>
-              <a:t>ae</a:t>
+              <a:t>o</a:t>
             </a:r>
             <a:endParaRPr lang="en-US" sz="1400" dirty="0"/>
           </a:p>
@@ -27303,8 +27493,8 @@
         </p:nvSpPr>
         <p:spPr>
           <a:xfrm>
-            <a:off x="3529584" y="3364992"/>
-            <a:ext cx="73152" cy="475488"/>
+            <a:off x="6016752" y="3364992"/>
+            <a:ext cx="411480" cy="475488"/>
           </a:xfrm>
           <a:prstGeom prst="rect">
             <a:avLst/>
@@ -27342,8 +27532,8 @@
         </p:nvSpPr>
         <p:spPr>
           <a:xfrm>
-            <a:off x="3602736" y="3364992"/>
-            <a:ext cx="1554480" cy="475488"/>
+            <a:off x="6428232" y="3364992"/>
+            <a:ext cx="1645920" cy="475488"/>
           </a:xfrm>
           <a:prstGeom prst="rect">
             <a:avLst>
@@ -27369,8 +27559,8 @@
         </p:nvSpPr>
         <p:spPr>
           <a:xfrm>
-            <a:off x="3602736" y="3364992"/>
-            <a:ext cx="1554480" cy="475488"/>
+            <a:off x="6428232" y="3364992"/>
+            <a:ext cx="1645920" cy="475488"/>
           </a:xfrm>
           <a:prstGeom prst="rect">
             <a:avLst/>
@@ -27394,7 +27584,7 @@
                 <a:ea typeface="Trebuchet MS" pitchFamily="34" charset="-122"/>
                 <a:cs typeface="Trebuchet MS" pitchFamily="34" charset="-120"/>
               </a:rPr>
-              <a:t>ro</a:t>
+              <a:t>space</a:t>
             </a:r>
             <a:endParaRPr lang="en-US" sz="1400" dirty="0"/>
           </a:p>
@@ -27402,224 +27592,80 @@
       </p:sp>
       <p:sp>
         <p:nvSpPr>
-          <p:cNvPr id="33" name="Text 31"/>
-          <p:cNvSpPr/>
-          <p:nvPr/>
-        </p:nvSpPr>
-        <p:spPr>
-          <a:xfrm>
-            <a:off x="5157216" y="3364992"/>
-            <a:ext cx="73152" cy="475488"/>
-          </a:xfrm>
-          <a:prstGeom prst="rect">
-            <a:avLst/>
-          </a:prstGeom>
-          <a:noFill/>
-          <a:ln/>
-        </p:spPr>
-        <p:txBody>
-          <a:bodyPr wrap="square" lIns="0" tIns="0" rIns="0" bIns="0" rtlCol="0" anchor="ctr"/>
-          <a:lstStyle/>
-          <a:p>
-            <a:pPr algn="ctr" indent="0" marL="0">
-              <a:buNone/>
-            </a:pPr>
-            <a:r>
-              <a:rPr lang="en-US" sz="1600" b="1" dirty="0">
-                <a:solidFill>
-                  <a:srgbClr val="0D9488"/>
+          <p:cNvPr id="33" name="Shape 31"/>
+          <p:cNvSpPr/>
+          <p:nvPr/>
+        </p:nvSpPr>
+        <p:spPr>
+          <a:xfrm>
+            <a:off x="365760" y="4096512"/>
+            <a:ext cx="1371600" cy="804672"/>
+          </a:xfrm>
+          <a:prstGeom prst="rect">
+            <a:avLst>
+              <a:gd name="adj" fmla="val 6818"/>
+            </a:avLst>
+          </a:prstGeom>
+          <a:solidFill>
+            <a:srgbClr val="E2E8F0"/>
+          </a:solidFill>
+          <a:ln w="12700">
+            <a:solidFill>
+              <a:srgbClr val="E2E8F0"/>
+            </a:solidFill>
+            <a:prstDash val="solid"/>
+          </a:ln>
+        </p:spPr>
+      </p:sp>
+      <p:sp>
+        <p:nvSpPr>
+          <p:cNvPr id="34" name="Text 32"/>
+          <p:cNvSpPr/>
+          <p:nvPr/>
+        </p:nvSpPr>
+        <p:spPr>
+          <a:xfrm>
+            <a:off x="365760" y="4096512"/>
+            <a:ext cx="1371600" cy="804672"/>
+          </a:xfrm>
+          <a:prstGeom prst="rect">
+            <a:avLst/>
+          </a:prstGeom>
+          <a:noFill/>
+          <a:ln/>
+        </p:spPr>
+        <p:txBody>
+          <a:bodyPr wrap="square" lIns="0" tIns="0" rIns="0" bIns="0" rtlCol="0" anchor="ctr"/>
+          <a:lstStyle/>
+          <a:p>
+            <a:pPr algn="ctr" indent="0" marL="0">
+              <a:buNone/>
+            </a:pPr>
+            <a:r>
+              <a:rPr lang="en-US" sz="1100" b="1" dirty="0">
+                <a:solidFill>
+                  <a:srgbClr val="475569"/>
                 </a:solidFill>
                 <a:latin typeface="Trebuchet MS" pitchFamily="34" charset="0"/>
                 <a:ea typeface="Trebuchet MS" pitchFamily="34" charset="-122"/>
                 <a:cs typeface="Trebuchet MS" pitchFamily="34" charset="-120"/>
               </a:rPr>
-              <a:t>·</a:t>
-            </a:r>
-            <a:endParaRPr lang="en-US" sz="1600" dirty="0"/>
-          </a:p>
-        </p:txBody>
-      </p:sp>
-      <p:sp>
-        <p:nvSpPr>
-          <p:cNvPr id="34" name="Shape 32"/>
-          <p:cNvSpPr/>
-          <p:nvPr/>
-        </p:nvSpPr>
-        <p:spPr>
-          <a:xfrm>
-            <a:off x="5230368" y="3364992"/>
-            <a:ext cx="1554480" cy="475488"/>
-          </a:xfrm>
-          <a:prstGeom prst="rect">
-            <a:avLst>
-              <a:gd name="adj" fmla="val 9615"/>
-            </a:avLst>
-          </a:prstGeom>
-          <a:solidFill>
-            <a:srgbClr val="FFFFFF"/>
-          </a:solidFill>
-          <a:ln w="12700">
-            <a:solidFill>
-              <a:srgbClr val="0D9488"/>
-            </a:solidFill>
-            <a:prstDash val="solid"/>
-          </a:ln>
-        </p:spPr>
-      </p:sp>
-      <p:sp>
-        <p:nvSpPr>
-          <p:cNvPr id="35" name="Text 33"/>
-          <p:cNvSpPr/>
-          <p:nvPr/>
-        </p:nvSpPr>
-        <p:spPr>
-          <a:xfrm>
-            <a:off x="5230368" y="3364992"/>
-            <a:ext cx="1554480" cy="475488"/>
-          </a:xfrm>
-          <a:prstGeom prst="rect">
-            <a:avLst/>
-          </a:prstGeom>
-          <a:noFill/>
-          <a:ln/>
-        </p:spPr>
-        <p:txBody>
-          <a:bodyPr wrap="square" lIns="0" tIns="0" rIns="0" bIns="0" rtlCol="0" anchor="ctr"/>
-          <a:lstStyle/>
-          <a:p>
-            <a:pPr algn="ctr" indent="0" marL="0">
-              <a:buNone/>
-            </a:pPr>
-            <a:r>
-              <a:rPr lang="en-US" sz="1400" b="1" dirty="0">
-                <a:solidFill>
-                  <a:srgbClr val="0D9488"/>
-                </a:solidFill>
-                <a:latin typeface="Trebuchet MS" pitchFamily="34" charset="0"/>
-                <a:ea typeface="Trebuchet MS" pitchFamily="34" charset="-122"/>
-                <a:cs typeface="Trebuchet MS" pitchFamily="34" charset="-120"/>
-              </a:rPr>
-              <a:t>nau</a:t>
-            </a:r>
-            <a:endParaRPr lang="en-US" sz="1400" dirty="0"/>
-          </a:p>
-        </p:txBody>
-      </p:sp>
-      <p:sp>
-        <p:nvSpPr>
-          <p:cNvPr id="36" name="Text 34"/>
-          <p:cNvSpPr/>
-          <p:nvPr/>
-        </p:nvSpPr>
-        <p:spPr>
-          <a:xfrm>
-            <a:off x="6784848" y="3364992"/>
-            <a:ext cx="73152" cy="475488"/>
-          </a:xfrm>
-          <a:prstGeom prst="rect">
-            <a:avLst/>
-          </a:prstGeom>
-          <a:noFill/>
-          <a:ln/>
-        </p:spPr>
-        <p:txBody>
-          <a:bodyPr wrap="square" lIns="0" tIns="0" rIns="0" bIns="0" rtlCol="0" anchor="ctr"/>
-          <a:lstStyle/>
-          <a:p>
-            <a:pPr algn="ctr" indent="0" marL="0">
-              <a:buNone/>
-            </a:pPr>
-            <a:r>
-              <a:rPr lang="en-US" sz="1600" b="1" dirty="0">
-                <a:solidFill>
-                  <a:srgbClr val="0D9488"/>
-                </a:solidFill>
-                <a:latin typeface="Trebuchet MS" pitchFamily="34" charset="0"/>
-                <a:ea typeface="Trebuchet MS" pitchFamily="34" charset="-122"/>
-                <a:cs typeface="Trebuchet MS" pitchFamily="34" charset="-120"/>
-              </a:rPr>
-              <a:t>·</a:t>
-            </a:r>
-            <a:endParaRPr lang="en-US" sz="1600" dirty="0"/>
-          </a:p>
-        </p:txBody>
-      </p:sp>
-      <p:sp>
-        <p:nvSpPr>
-          <p:cNvPr id="37" name="Shape 35"/>
-          <p:cNvSpPr/>
-          <p:nvPr/>
-        </p:nvSpPr>
-        <p:spPr>
-          <a:xfrm>
-            <a:off x="6858000" y="3364992"/>
-            <a:ext cx="1554480" cy="475488"/>
-          </a:xfrm>
-          <a:prstGeom prst="rect">
-            <a:avLst>
-              <a:gd name="adj" fmla="val 9615"/>
-            </a:avLst>
-          </a:prstGeom>
-          <a:solidFill>
-            <a:srgbClr val="FFFFFF"/>
-          </a:solidFill>
-          <a:ln w="12700">
-            <a:solidFill>
-              <a:srgbClr val="0D9488"/>
-            </a:solidFill>
-            <a:prstDash val="solid"/>
-          </a:ln>
-        </p:spPr>
-      </p:sp>
-      <p:sp>
-        <p:nvSpPr>
-          <p:cNvPr id="38" name="Text 36"/>
-          <p:cNvSpPr/>
-          <p:nvPr/>
-        </p:nvSpPr>
-        <p:spPr>
-          <a:xfrm>
-            <a:off x="6858000" y="3364992"/>
-            <a:ext cx="1554480" cy="475488"/>
-          </a:xfrm>
-          <a:prstGeom prst="rect">
-            <a:avLst/>
-          </a:prstGeom>
-          <a:noFill/>
-          <a:ln/>
-        </p:spPr>
-        <p:txBody>
-          <a:bodyPr wrap="square" lIns="0" tIns="0" rIns="0" bIns="0" rtlCol="0" anchor="ctr"/>
-          <a:lstStyle/>
-          <a:p>
-            <a:pPr algn="ctr" indent="0" marL="0">
-              <a:buNone/>
-            </a:pPr>
-            <a:r>
-              <a:rPr lang="en-US" sz="1400" b="1" dirty="0">
-                <a:solidFill>
-                  <a:srgbClr val="0D9488"/>
-                </a:solidFill>
-                <a:latin typeface="Trebuchet MS" pitchFamily="34" charset="0"/>
-                <a:ea typeface="Trebuchet MS" pitchFamily="34" charset="-122"/>
-                <a:cs typeface="Trebuchet MS" pitchFamily="34" charset="-120"/>
-              </a:rPr>
-              <a:t>tics</a:t>
-            </a:r>
-            <a:endParaRPr lang="en-US" sz="1400" dirty="0"/>
-          </a:p>
-        </p:txBody>
-      </p:sp>
-      <p:sp>
-        <p:nvSpPr>
-          <p:cNvPr id="39" name="Shape 37"/>
-          <p:cNvSpPr/>
-          <p:nvPr/>
-        </p:nvSpPr>
-        <p:spPr>
-          <a:xfrm>
-            <a:off x="365760" y="4096512"/>
-            <a:ext cx="1371600" cy="804672"/>
+              <a:t>Phonemes</a:t>
+            </a:r>
+            <a:endParaRPr lang="en-US" sz="1100" dirty="0"/>
+          </a:p>
+        </p:txBody>
+      </p:sp>
+      <p:sp>
+        <p:nvSpPr>
+          <p:cNvPr id="35" name="Shape 33"/>
+          <p:cNvSpPr/>
+          <p:nvPr/>
+        </p:nvSpPr>
+        <p:spPr>
+          <a:xfrm>
+            <a:off x="1874520" y="4096512"/>
+            <a:ext cx="6903720" cy="804672"/>
           </a:xfrm>
           <a:prstGeom prst="rect">
             <a:avLst>
@@ -27627,85 +27673,19 @@
             </a:avLst>
           </a:prstGeom>
           <a:solidFill>
-            <a:srgbClr val="E2E8F0"/>
+            <a:srgbClr val="F8FAFC"/>
           </a:solidFill>
           <a:ln w="12700">
             <a:solidFill>
               <a:srgbClr val="E2E8F0"/>
             </a:solidFill>
-            <a:prstDash val="solid"/>
-          </a:ln>
-        </p:spPr>
-      </p:sp>
-      <p:sp>
-        <p:nvSpPr>
-          <p:cNvPr id="40" name="Text 38"/>
-          <p:cNvSpPr/>
-          <p:nvPr/>
-        </p:nvSpPr>
-        <p:spPr>
-          <a:xfrm>
-            <a:off x="365760" y="4096512"/>
-            <a:ext cx="1371600" cy="804672"/>
-          </a:xfrm>
-          <a:prstGeom prst="rect">
-            <a:avLst/>
-          </a:prstGeom>
-          <a:noFill/>
-          <a:ln/>
-        </p:spPr>
-        <p:txBody>
-          <a:bodyPr wrap="square" lIns="0" tIns="0" rIns="0" bIns="0" rtlCol="0" anchor="ctr"/>
-          <a:lstStyle/>
-          <a:p>
-            <a:pPr algn="ctr" indent="0" marL="0">
-              <a:buNone/>
-            </a:pPr>
-            <a:r>
-              <a:rPr lang="en-US" sz="1100" b="1" dirty="0">
-                <a:solidFill>
-                  <a:srgbClr val="475569"/>
-                </a:solidFill>
-                <a:latin typeface="Trebuchet MS" pitchFamily="34" charset="0"/>
-                <a:ea typeface="Trebuchet MS" pitchFamily="34" charset="-122"/>
-                <a:cs typeface="Trebuchet MS" pitchFamily="34" charset="-120"/>
-              </a:rPr>
-              <a:t>Phonemes</a:t>
-            </a:r>
-            <a:endParaRPr lang="en-US" sz="1100" dirty="0"/>
-          </a:p>
-        </p:txBody>
-      </p:sp>
-      <p:sp>
-        <p:nvSpPr>
-          <p:cNvPr id="41" name="Shape 39"/>
-          <p:cNvSpPr/>
-          <p:nvPr/>
-        </p:nvSpPr>
-        <p:spPr>
-          <a:xfrm>
-            <a:off x="1874520" y="4096512"/>
-            <a:ext cx="6903720" cy="804672"/>
-          </a:xfrm>
-          <a:prstGeom prst="rect">
-            <a:avLst>
-              <a:gd name="adj" fmla="val 6818"/>
-            </a:avLst>
-          </a:prstGeom>
-          <a:solidFill>
-            <a:srgbClr val="F8FAFC"/>
-          </a:solidFill>
-          <a:ln w="12700">
-            <a:solidFill>
-              <a:srgbClr val="E2E8F0"/>
-            </a:solidFill>
             <a:prstDash val="dash"/>
           </a:ln>
         </p:spPr>
       </p:sp>
       <p:sp>
         <p:nvSpPr>
-          <p:cNvPr id="42" name="Text 40"/>
+          <p:cNvPr id="36" name="Text 34"/>
           <p:cNvSpPr/>
           <p:nvPr/>
         </p:nvSpPr>
@@ -28028,7 +28008,7 @@
                 <a:ea typeface="Calibri" pitchFamily="34" charset="-122"/>
                 <a:cs typeface="Calibri" pitchFamily="34" charset="-120"/>
               </a:rPr>
-              <a:t>Word Labs  •  wordlabs.app  •  Root: 'aero' = air, atmosphere, aircraft</a:t>
+              <a:t>Word Labs  •  wordlabs.app  •  Root: 'aero' = air or aircraft</a:t>
             </a:r>
             <a:endParaRPr lang="en-US" sz="800" dirty="0"/>
           </a:p>
@@ -28167,7 +28147,7 @@
                 <a:ea typeface="Trebuchet MS" pitchFamily="34" charset="-122"/>
                 <a:cs typeface="Trebuchet MS" pitchFamily="34" charset="-120"/>
               </a:rPr>
-              <a:t>aeronautics</a:t>
+              <a:t>aerospace</a:t>
             </a:r>
             <a:endParaRPr lang="en-US" sz="2800" dirty="0"/>
           </a:p>
@@ -28247,7 +28227,7 @@
         </p:nvSpPr>
         <p:spPr>
           <a:xfrm>
-            <a:off x="2221992" y="2258568"/>
+            <a:off x="2938272" y="2258568"/>
             <a:ext cx="1828800" cy="292608"/>
           </a:xfrm>
           <a:prstGeom prst="rect">
@@ -28281,7 +28261,7 @@
         </p:nvSpPr>
         <p:spPr>
           <a:xfrm>
-            <a:off x="2221992" y="2258568"/>
+            <a:off x="2938272" y="2258568"/>
             <a:ext cx="1828800" cy="292608"/>
           </a:xfrm>
           <a:prstGeom prst="rect">
@@ -28320,7 +28300,7 @@
         </p:nvSpPr>
         <p:spPr>
           <a:xfrm>
-            <a:off x="2221992" y="2569464"/>
+            <a:off x="2938272" y="2569464"/>
             <a:ext cx="1828800" cy="201168"/>
           </a:xfrm>
           <a:prstGeom prst="rect">
@@ -28359,7 +28339,7 @@
         </p:nvSpPr>
         <p:spPr>
           <a:xfrm>
-            <a:off x="4370832" y="2258568"/>
+            <a:off x="5803392" y="2258568"/>
             <a:ext cx="1828800" cy="292608"/>
           </a:xfrm>
           <a:prstGeom prst="rect">
@@ -28393,7 +28373,7 @@
         </p:nvSpPr>
         <p:spPr>
           <a:xfrm>
-            <a:off x="4370832" y="2258568"/>
+            <a:off x="5803392" y="2258568"/>
             <a:ext cx="1828800" cy="292608"/>
           </a:xfrm>
           <a:prstGeom prst="rect">
@@ -28418,7 +28398,7 @@
                 <a:ea typeface="Trebuchet MS" pitchFamily="34" charset="-122"/>
                 <a:cs typeface="Trebuchet MS" pitchFamily="34" charset="-120"/>
               </a:rPr>
-              <a:t>naut</a:t>
+              <a:t>space</a:t>
             </a:r>
             <a:endParaRPr lang="en-US" sz="1300" dirty="0"/>
           </a:p>
@@ -28432,7 +28412,7 @@
         </p:nvSpPr>
         <p:spPr>
           <a:xfrm>
-            <a:off x="4370832" y="2569464"/>
+            <a:off x="5803392" y="2569464"/>
             <a:ext cx="1828800" cy="201168"/>
           </a:xfrm>
           <a:prstGeom prst="rect">
@@ -28457,7 +28437,7 @@
                 <a:ea typeface="Calibri" pitchFamily="34" charset="-122"/>
                 <a:cs typeface="Calibri" pitchFamily="34" charset="-120"/>
               </a:rPr>
-              <a:t>sailor, navigator</a:t>
+              <a:t>area or expanse</a:t>
             </a:r>
             <a:endParaRPr lang="en-US" sz="850" dirty="0"/>
           </a:p>
@@ -28471,30 +28451,23 @@
         </p:nvSpPr>
         <p:spPr>
           <a:xfrm>
-            <a:off x="6519672" y="2258568"/>
-            <a:ext cx="1828800" cy="292608"/>
+            <a:off x="365760" y="3273552"/>
+            <a:ext cx="1371600" cy="658368"/>
           </a:xfrm>
           <a:prstGeom prst="rect">
             <a:avLst>
-              <a:gd name="adj" fmla="val 25000"/>
+              <a:gd name="adj" fmla="val 8333"/>
             </a:avLst>
           </a:prstGeom>
           <a:solidFill>
-            <a:srgbClr val="FCE7F3"/>
-          </a:solidFill>
-          <a:ln w="19050">
-            <a:solidFill>
-              <a:srgbClr val="DB2777"/>
-            </a:solidFill>
-            <a:prstDash val="solid"/>
-          </a:ln>
-          <a:effectLst>
-            <a:outerShdw sx="100000" sy="100000" kx="0" ky="0" algn="bl" rotWithShape="0" blurRad="101600" dist="38100" dir="8100000">
-              <a:srgbClr val="000000">
-                <a:alpha val="12000"/>
-              </a:srgbClr>
-            </a:outerShdw>
-          </a:effectLst>
+            <a:srgbClr val="E2E8F0"/>
+          </a:solidFill>
+          <a:ln w="12700">
+            <a:solidFill>
+              <a:srgbClr val="E2E8F0"/>
+            </a:solidFill>
+            <a:prstDash val="solid"/>
+          </a:ln>
         </p:spPr>
       </p:sp>
       <p:sp>
@@ -28505,47 +28478,905 @@
         </p:nvSpPr>
         <p:spPr>
           <a:xfrm>
-            <a:off x="6519672" y="2258568"/>
-            <a:ext cx="1828800" cy="292608"/>
-          </a:xfrm>
-          <a:prstGeom prst="rect">
-            <a:avLst/>
-          </a:prstGeom>
-          <a:noFill/>
-          <a:ln/>
-        </p:spPr>
-        <p:txBody>
-          <a:bodyPr wrap="square" lIns="0" tIns="0" rIns="0" bIns="0" rtlCol="0" anchor="ctr"/>
-          <a:lstStyle/>
-          <a:p>
-            <a:pPr algn="ctr" indent="0" marL="0">
-              <a:buNone/>
-            </a:pPr>
-            <a:r>
-              <a:rPr lang="en-US" sz="1300" b="1" dirty="0">
-                <a:solidFill>
-                  <a:srgbClr val="9D174D"/>
+            <a:off x="365760" y="3273552"/>
+            <a:ext cx="1371600" cy="658368"/>
+          </a:xfrm>
+          <a:prstGeom prst="rect">
+            <a:avLst/>
+          </a:prstGeom>
+          <a:noFill/>
+          <a:ln/>
+        </p:spPr>
+        <p:txBody>
+          <a:bodyPr wrap="square" lIns="0" tIns="0" rIns="0" bIns="0" rtlCol="0" anchor="ctr"/>
+          <a:lstStyle/>
+          <a:p>
+            <a:pPr algn="ctr" indent="0" marL="0">
+              <a:buNone/>
+            </a:pPr>
+            <a:r>
+              <a:rPr lang="en-US" sz="1100" b="1" dirty="0">
+                <a:solidFill>
+                  <a:srgbClr val="475569"/>
                 </a:solidFill>
                 <a:latin typeface="Trebuchet MS" pitchFamily="34" charset="0"/>
                 <a:ea typeface="Trebuchet MS" pitchFamily="34" charset="-122"/>
                 <a:cs typeface="Trebuchet MS" pitchFamily="34" charset="-120"/>
               </a:rPr>
-              <a:t>ics</a:t>
-            </a:r>
-            <a:endParaRPr lang="en-US" sz="1300" dirty="0"/>
-          </a:p>
-        </p:txBody>
-      </p:sp>
-      <p:sp>
-        <p:nvSpPr>
-          <p:cNvPr id="24" name="Text 22"/>
-          <p:cNvSpPr/>
-          <p:nvPr/>
-        </p:nvSpPr>
-        <p:spPr>
-          <a:xfrm>
-            <a:off x="6519672" y="2569464"/>
-            <a:ext cx="1828800" cy="201168"/>
+              <a:t>Syllables</a:t>
+            </a:r>
+            <a:endParaRPr lang="en-US" sz="1100" dirty="0"/>
+          </a:p>
+        </p:txBody>
+      </p:sp>
+      <p:sp>
+        <p:nvSpPr>
+          <p:cNvPr id="24" name="Shape 22"/>
+          <p:cNvSpPr/>
+          <p:nvPr/>
+        </p:nvSpPr>
+        <p:spPr>
+          <a:xfrm>
+            <a:off x="1874520" y="3273552"/>
+            <a:ext cx="6903720" cy="658368"/>
+          </a:xfrm>
+          <a:prstGeom prst="rect">
+            <a:avLst>
+              <a:gd name="adj" fmla="val 8333"/>
+            </a:avLst>
+          </a:prstGeom>
+          <a:solidFill>
+            <a:srgbClr val="CCFBF1"/>
+          </a:solidFill>
+          <a:ln w="12700">
+            <a:solidFill>
+              <a:srgbClr val="0D9488"/>
+            </a:solidFill>
+            <a:prstDash val="solid"/>
+          </a:ln>
+        </p:spPr>
+      </p:sp>
+      <p:sp>
+        <p:nvSpPr>
+          <p:cNvPr id="25" name="Shape 23"/>
+          <p:cNvSpPr/>
+          <p:nvPr/>
+        </p:nvSpPr>
+        <p:spPr>
+          <a:xfrm>
+            <a:off x="2313432" y="3364992"/>
+            <a:ext cx="1645920" cy="475488"/>
+          </a:xfrm>
+          <a:prstGeom prst="rect">
+            <a:avLst>
+              <a:gd name="adj" fmla="val 9615"/>
+            </a:avLst>
+          </a:prstGeom>
+          <a:solidFill>
+            <a:srgbClr val="FFFFFF"/>
+          </a:solidFill>
+          <a:ln w="12700">
+            <a:solidFill>
+              <a:srgbClr val="0D9488"/>
+            </a:solidFill>
+            <a:prstDash val="solid"/>
+          </a:ln>
+        </p:spPr>
+      </p:sp>
+      <p:sp>
+        <p:nvSpPr>
+          <p:cNvPr id="26" name="Text 24"/>
+          <p:cNvSpPr/>
+          <p:nvPr/>
+        </p:nvSpPr>
+        <p:spPr>
+          <a:xfrm>
+            <a:off x="2313432" y="3364992"/>
+            <a:ext cx="1645920" cy="475488"/>
+          </a:xfrm>
+          <a:prstGeom prst="rect">
+            <a:avLst/>
+          </a:prstGeom>
+          <a:noFill/>
+          <a:ln/>
+        </p:spPr>
+        <p:txBody>
+          <a:bodyPr wrap="square" lIns="0" tIns="0" rIns="0" bIns="0" rtlCol="0" anchor="ctr"/>
+          <a:lstStyle/>
+          <a:p>
+            <a:pPr algn="ctr" indent="0" marL="0">
+              <a:buNone/>
+            </a:pPr>
+            <a:r>
+              <a:rPr lang="en-US" sz="1400" b="1" dirty="0">
+                <a:solidFill>
+                  <a:srgbClr val="0D9488"/>
+                </a:solidFill>
+                <a:latin typeface="Trebuchet MS" pitchFamily="34" charset="0"/>
+                <a:ea typeface="Trebuchet MS" pitchFamily="34" charset="-122"/>
+                <a:cs typeface="Trebuchet MS" pitchFamily="34" charset="-120"/>
+              </a:rPr>
+              <a:t>aer</a:t>
+            </a:r>
+            <a:endParaRPr lang="en-US" sz="1400" dirty="0"/>
+          </a:p>
+        </p:txBody>
+      </p:sp>
+      <p:sp>
+        <p:nvSpPr>
+          <p:cNvPr id="27" name="Text 25"/>
+          <p:cNvSpPr/>
+          <p:nvPr/>
+        </p:nvSpPr>
+        <p:spPr>
+          <a:xfrm>
+            <a:off x="3959352" y="3364992"/>
+            <a:ext cx="411480" cy="475488"/>
+          </a:xfrm>
+          <a:prstGeom prst="rect">
+            <a:avLst/>
+          </a:prstGeom>
+          <a:noFill/>
+          <a:ln/>
+        </p:spPr>
+        <p:txBody>
+          <a:bodyPr wrap="square" lIns="0" tIns="0" rIns="0" bIns="0" rtlCol="0" anchor="ctr"/>
+          <a:lstStyle/>
+          <a:p>
+            <a:pPr algn="ctr" indent="0" marL="0">
+              <a:buNone/>
+            </a:pPr>
+            <a:r>
+              <a:rPr lang="en-US" sz="1600" b="1" dirty="0">
+                <a:solidFill>
+                  <a:srgbClr val="0D9488"/>
+                </a:solidFill>
+                <a:latin typeface="Trebuchet MS" pitchFamily="34" charset="0"/>
+                <a:ea typeface="Trebuchet MS" pitchFamily="34" charset="-122"/>
+                <a:cs typeface="Trebuchet MS" pitchFamily="34" charset="-120"/>
+              </a:rPr>
+              <a:t>·</a:t>
+            </a:r>
+            <a:endParaRPr lang="en-US" sz="1600" dirty="0"/>
+          </a:p>
+        </p:txBody>
+      </p:sp>
+      <p:sp>
+        <p:nvSpPr>
+          <p:cNvPr id="28" name="Shape 26"/>
+          <p:cNvSpPr/>
+          <p:nvPr/>
+        </p:nvSpPr>
+        <p:spPr>
+          <a:xfrm>
+            <a:off x="4370832" y="3364992"/>
+            <a:ext cx="1645920" cy="475488"/>
+          </a:xfrm>
+          <a:prstGeom prst="rect">
+            <a:avLst>
+              <a:gd name="adj" fmla="val 9615"/>
+            </a:avLst>
+          </a:prstGeom>
+          <a:solidFill>
+            <a:srgbClr val="FFFFFF"/>
+          </a:solidFill>
+          <a:ln w="12700">
+            <a:solidFill>
+              <a:srgbClr val="0D9488"/>
+            </a:solidFill>
+            <a:prstDash val="solid"/>
+          </a:ln>
+        </p:spPr>
+      </p:sp>
+      <p:sp>
+        <p:nvSpPr>
+          <p:cNvPr id="29" name="Text 27"/>
+          <p:cNvSpPr/>
+          <p:nvPr/>
+        </p:nvSpPr>
+        <p:spPr>
+          <a:xfrm>
+            <a:off x="4370832" y="3364992"/>
+            <a:ext cx="1645920" cy="475488"/>
+          </a:xfrm>
+          <a:prstGeom prst="rect">
+            <a:avLst/>
+          </a:prstGeom>
+          <a:noFill/>
+          <a:ln/>
+        </p:spPr>
+        <p:txBody>
+          <a:bodyPr wrap="square" lIns="0" tIns="0" rIns="0" bIns="0" rtlCol="0" anchor="ctr"/>
+          <a:lstStyle/>
+          <a:p>
+            <a:pPr algn="ctr" indent="0" marL="0">
+              <a:buNone/>
+            </a:pPr>
+            <a:r>
+              <a:rPr lang="en-US" sz="1400" b="1" dirty="0">
+                <a:solidFill>
+                  <a:srgbClr val="0D9488"/>
+                </a:solidFill>
+                <a:latin typeface="Trebuchet MS" pitchFamily="34" charset="0"/>
+                <a:ea typeface="Trebuchet MS" pitchFamily="34" charset="-122"/>
+                <a:cs typeface="Trebuchet MS" pitchFamily="34" charset="-120"/>
+              </a:rPr>
+              <a:t>o</a:t>
+            </a:r>
+            <a:endParaRPr lang="en-US" sz="1400" dirty="0"/>
+          </a:p>
+        </p:txBody>
+      </p:sp>
+      <p:sp>
+        <p:nvSpPr>
+          <p:cNvPr id="30" name="Text 28"/>
+          <p:cNvSpPr/>
+          <p:nvPr/>
+        </p:nvSpPr>
+        <p:spPr>
+          <a:xfrm>
+            <a:off x="6016752" y="3364992"/>
+            <a:ext cx="411480" cy="475488"/>
+          </a:xfrm>
+          <a:prstGeom prst="rect">
+            <a:avLst/>
+          </a:prstGeom>
+          <a:noFill/>
+          <a:ln/>
+        </p:spPr>
+        <p:txBody>
+          <a:bodyPr wrap="square" lIns="0" tIns="0" rIns="0" bIns="0" rtlCol="0" anchor="ctr"/>
+          <a:lstStyle/>
+          <a:p>
+            <a:pPr algn="ctr" indent="0" marL="0">
+              <a:buNone/>
+            </a:pPr>
+            <a:r>
+              <a:rPr lang="en-US" sz="1600" b="1" dirty="0">
+                <a:solidFill>
+                  <a:srgbClr val="0D9488"/>
+                </a:solidFill>
+                <a:latin typeface="Trebuchet MS" pitchFamily="34" charset="0"/>
+                <a:ea typeface="Trebuchet MS" pitchFamily="34" charset="-122"/>
+                <a:cs typeface="Trebuchet MS" pitchFamily="34" charset="-120"/>
+              </a:rPr>
+              <a:t>·</a:t>
+            </a:r>
+            <a:endParaRPr lang="en-US" sz="1600" dirty="0"/>
+          </a:p>
+        </p:txBody>
+      </p:sp>
+      <p:sp>
+        <p:nvSpPr>
+          <p:cNvPr id="31" name="Shape 29"/>
+          <p:cNvSpPr/>
+          <p:nvPr/>
+        </p:nvSpPr>
+        <p:spPr>
+          <a:xfrm>
+            <a:off x="6428232" y="3364992"/>
+            <a:ext cx="1645920" cy="475488"/>
+          </a:xfrm>
+          <a:prstGeom prst="rect">
+            <a:avLst>
+              <a:gd name="adj" fmla="val 9615"/>
+            </a:avLst>
+          </a:prstGeom>
+          <a:solidFill>
+            <a:srgbClr val="FFFFFF"/>
+          </a:solidFill>
+          <a:ln w="12700">
+            <a:solidFill>
+              <a:srgbClr val="0D9488"/>
+            </a:solidFill>
+            <a:prstDash val="solid"/>
+          </a:ln>
+        </p:spPr>
+      </p:sp>
+      <p:sp>
+        <p:nvSpPr>
+          <p:cNvPr id="32" name="Text 30"/>
+          <p:cNvSpPr/>
+          <p:nvPr/>
+        </p:nvSpPr>
+        <p:spPr>
+          <a:xfrm>
+            <a:off x="6428232" y="3364992"/>
+            <a:ext cx="1645920" cy="475488"/>
+          </a:xfrm>
+          <a:prstGeom prst="rect">
+            <a:avLst/>
+          </a:prstGeom>
+          <a:noFill/>
+          <a:ln/>
+        </p:spPr>
+        <p:txBody>
+          <a:bodyPr wrap="square" lIns="0" tIns="0" rIns="0" bIns="0" rtlCol="0" anchor="ctr"/>
+          <a:lstStyle/>
+          <a:p>
+            <a:pPr algn="ctr" indent="0" marL="0">
+              <a:buNone/>
+            </a:pPr>
+            <a:r>
+              <a:rPr lang="en-US" sz="1400" b="1" dirty="0">
+                <a:solidFill>
+                  <a:srgbClr val="0D9488"/>
+                </a:solidFill>
+                <a:latin typeface="Trebuchet MS" pitchFamily="34" charset="0"/>
+                <a:ea typeface="Trebuchet MS" pitchFamily="34" charset="-122"/>
+                <a:cs typeface="Trebuchet MS" pitchFamily="34" charset="-120"/>
+              </a:rPr>
+              <a:t>space</a:t>
+            </a:r>
+            <a:endParaRPr lang="en-US" sz="1400" dirty="0"/>
+          </a:p>
+        </p:txBody>
+      </p:sp>
+      <p:sp>
+        <p:nvSpPr>
+          <p:cNvPr id="33" name="Shape 31"/>
+          <p:cNvSpPr/>
+          <p:nvPr/>
+        </p:nvSpPr>
+        <p:spPr>
+          <a:xfrm>
+            <a:off x="365760" y="4096512"/>
+            <a:ext cx="1371600" cy="804672"/>
+          </a:xfrm>
+          <a:prstGeom prst="rect">
+            <a:avLst>
+              <a:gd name="adj" fmla="val 6818"/>
+            </a:avLst>
+          </a:prstGeom>
+          <a:solidFill>
+            <a:srgbClr val="E2E8F0"/>
+          </a:solidFill>
+          <a:ln w="12700">
+            <a:solidFill>
+              <a:srgbClr val="E2E8F0"/>
+            </a:solidFill>
+            <a:prstDash val="solid"/>
+          </a:ln>
+        </p:spPr>
+      </p:sp>
+      <p:sp>
+        <p:nvSpPr>
+          <p:cNvPr id="34" name="Text 32"/>
+          <p:cNvSpPr/>
+          <p:nvPr/>
+        </p:nvSpPr>
+        <p:spPr>
+          <a:xfrm>
+            <a:off x="365760" y="4096512"/>
+            <a:ext cx="1371600" cy="804672"/>
+          </a:xfrm>
+          <a:prstGeom prst="rect">
+            <a:avLst/>
+          </a:prstGeom>
+          <a:noFill/>
+          <a:ln/>
+        </p:spPr>
+        <p:txBody>
+          <a:bodyPr wrap="square" lIns="0" tIns="0" rIns="0" bIns="0" rtlCol="0" anchor="ctr"/>
+          <a:lstStyle/>
+          <a:p>
+            <a:pPr algn="ctr" indent="0" marL="0">
+              <a:buNone/>
+            </a:pPr>
+            <a:r>
+              <a:rPr lang="en-US" sz="1100" b="1" dirty="0">
+                <a:solidFill>
+                  <a:srgbClr val="475569"/>
+                </a:solidFill>
+                <a:latin typeface="Trebuchet MS" pitchFamily="34" charset="0"/>
+                <a:ea typeface="Trebuchet MS" pitchFamily="34" charset="-122"/>
+                <a:cs typeface="Trebuchet MS" pitchFamily="34" charset="-120"/>
+              </a:rPr>
+              <a:t>Phonemes</a:t>
+            </a:r>
+            <a:endParaRPr lang="en-US" sz="1100" dirty="0"/>
+          </a:p>
+        </p:txBody>
+      </p:sp>
+      <p:sp>
+        <p:nvSpPr>
+          <p:cNvPr id="35" name="Shape 33"/>
+          <p:cNvSpPr/>
+          <p:nvPr/>
+        </p:nvSpPr>
+        <p:spPr>
+          <a:xfrm>
+            <a:off x="1874520" y="4096512"/>
+            <a:ext cx="6903720" cy="804672"/>
+          </a:xfrm>
+          <a:prstGeom prst="rect">
+            <a:avLst>
+              <a:gd name="adj" fmla="val 6818"/>
+            </a:avLst>
+          </a:prstGeom>
+          <a:solidFill>
+            <a:srgbClr val="FCE7F3"/>
+          </a:solidFill>
+          <a:ln w="12700">
+            <a:solidFill>
+              <a:srgbClr val="DB2777"/>
+            </a:solidFill>
+            <a:prstDash val="solid"/>
+          </a:ln>
+        </p:spPr>
+      </p:sp>
+      <p:sp>
+        <p:nvSpPr>
+          <p:cNvPr id="36" name="Shape 34"/>
+          <p:cNvSpPr/>
+          <p:nvPr/>
+        </p:nvSpPr>
+        <p:spPr>
+          <a:xfrm>
+            <a:off x="2124837" y="4169664"/>
+            <a:ext cx="685800" cy="384048"/>
+          </a:xfrm>
+          <a:prstGeom prst="rect">
+            <a:avLst>
+              <a:gd name="adj" fmla="val 9524"/>
+            </a:avLst>
+          </a:prstGeom>
+          <a:solidFill>
+            <a:srgbClr val="FFFFFF"/>
+          </a:solidFill>
+          <a:ln w="12700">
+            <a:solidFill>
+              <a:srgbClr val="DB2777"/>
+            </a:solidFill>
+            <a:prstDash val="solid"/>
+          </a:ln>
+        </p:spPr>
+      </p:sp>
+      <p:sp>
+        <p:nvSpPr>
+          <p:cNvPr id="37" name="Text 35"/>
+          <p:cNvSpPr/>
+          <p:nvPr/>
+        </p:nvSpPr>
+        <p:spPr>
+          <a:xfrm>
+            <a:off x="2124837" y="4169664"/>
+            <a:ext cx="685800" cy="384048"/>
+          </a:xfrm>
+          <a:prstGeom prst="rect">
+            <a:avLst/>
+          </a:prstGeom>
+          <a:noFill/>
+          <a:ln/>
+        </p:spPr>
+        <p:txBody>
+          <a:bodyPr wrap="square" lIns="0" tIns="0" rIns="0" bIns="0" rtlCol="0" anchor="ctr"/>
+          <a:lstStyle/>
+          <a:p>
+            <a:pPr algn="ctr" indent="0" marL="0">
+              <a:buNone/>
+            </a:pPr>
+            <a:r>
+              <a:rPr lang="en-US" sz="900" b="1" dirty="0">
+                <a:solidFill>
+                  <a:srgbClr val="9D174D"/>
+                </a:solidFill>
+                <a:latin typeface="Trebuchet MS" pitchFamily="34" charset="0"/>
+                <a:ea typeface="Trebuchet MS" pitchFamily="34" charset="-122"/>
+                <a:cs typeface="Trebuchet MS" pitchFamily="34" charset="-120"/>
+              </a:rPr>
+              <a:t>ae</a:t>
+            </a:r>
+            <a:endParaRPr lang="en-US" sz="900" dirty="0"/>
+          </a:p>
+        </p:txBody>
+      </p:sp>
+      <p:sp>
+        <p:nvSpPr>
+          <p:cNvPr id="38" name="Shape 36"/>
+          <p:cNvSpPr/>
+          <p:nvPr/>
+        </p:nvSpPr>
+        <p:spPr>
+          <a:xfrm>
+            <a:off x="3033522" y="4169664"/>
+            <a:ext cx="685800" cy="384048"/>
+          </a:xfrm>
+          <a:prstGeom prst="rect">
+            <a:avLst>
+              <a:gd name="adj" fmla="val 9524"/>
+            </a:avLst>
+          </a:prstGeom>
+          <a:solidFill>
+            <a:srgbClr val="FFFFFF"/>
+          </a:solidFill>
+          <a:ln w="12700">
+            <a:solidFill>
+              <a:srgbClr val="DB2777"/>
+            </a:solidFill>
+            <a:prstDash val="solid"/>
+          </a:ln>
+        </p:spPr>
+      </p:sp>
+      <p:sp>
+        <p:nvSpPr>
+          <p:cNvPr id="39" name="Text 37"/>
+          <p:cNvSpPr/>
+          <p:nvPr/>
+        </p:nvSpPr>
+        <p:spPr>
+          <a:xfrm>
+            <a:off x="3033522" y="4169664"/>
+            <a:ext cx="685800" cy="384048"/>
+          </a:xfrm>
+          <a:prstGeom prst="rect">
+            <a:avLst/>
+          </a:prstGeom>
+          <a:noFill/>
+          <a:ln/>
+        </p:spPr>
+        <p:txBody>
+          <a:bodyPr wrap="square" lIns="0" tIns="0" rIns="0" bIns="0" rtlCol="0" anchor="ctr"/>
+          <a:lstStyle/>
+          <a:p>
+            <a:pPr algn="ctr" indent="0" marL="0">
+              <a:buNone/>
+            </a:pPr>
+            <a:r>
+              <a:rPr lang="en-US" sz="900" b="1" dirty="0">
+                <a:solidFill>
+                  <a:srgbClr val="9D174D"/>
+                </a:solidFill>
+                <a:latin typeface="Trebuchet MS" pitchFamily="34" charset="0"/>
+                <a:ea typeface="Trebuchet MS" pitchFamily="34" charset="-122"/>
+                <a:cs typeface="Trebuchet MS" pitchFamily="34" charset="-120"/>
+              </a:rPr>
+              <a:t>r</a:t>
+            </a:r>
+            <a:endParaRPr lang="en-US" sz="900" dirty="0"/>
+          </a:p>
+        </p:txBody>
+      </p:sp>
+      <p:sp>
+        <p:nvSpPr>
+          <p:cNvPr id="40" name="Shape 38"/>
+          <p:cNvSpPr/>
+          <p:nvPr/>
+        </p:nvSpPr>
+        <p:spPr>
+          <a:xfrm>
+            <a:off x="3942207" y="4169664"/>
+            <a:ext cx="685800" cy="384048"/>
+          </a:xfrm>
+          <a:prstGeom prst="rect">
+            <a:avLst>
+              <a:gd name="adj" fmla="val 9524"/>
+            </a:avLst>
+          </a:prstGeom>
+          <a:solidFill>
+            <a:srgbClr val="FFFFFF"/>
+          </a:solidFill>
+          <a:ln w="12700">
+            <a:solidFill>
+              <a:srgbClr val="DB2777"/>
+            </a:solidFill>
+            <a:prstDash val="solid"/>
+          </a:ln>
+        </p:spPr>
+      </p:sp>
+      <p:sp>
+        <p:nvSpPr>
+          <p:cNvPr id="41" name="Text 39"/>
+          <p:cNvSpPr/>
+          <p:nvPr/>
+        </p:nvSpPr>
+        <p:spPr>
+          <a:xfrm>
+            <a:off x="3942207" y="4169664"/>
+            <a:ext cx="685800" cy="384048"/>
+          </a:xfrm>
+          <a:prstGeom prst="rect">
+            <a:avLst/>
+          </a:prstGeom>
+          <a:noFill/>
+          <a:ln/>
+        </p:spPr>
+        <p:txBody>
+          <a:bodyPr wrap="square" lIns="0" tIns="0" rIns="0" bIns="0" rtlCol="0" anchor="ctr"/>
+          <a:lstStyle/>
+          <a:p>
+            <a:pPr algn="ctr" indent="0" marL="0">
+              <a:buNone/>
+            </a:pPr>
+            <a:r>
+              <a:rPr lang="en-US" sz="900" b="1" dirty="0">
+                <a:solidFill>
+                  <a:srgbClr val="9D174D"/>
+                </a:solidFill>
+                <a:latin typeface="Trebuchet MS" pitchFamily="34" charset="0"/>
+                <a:ea typeface="Trebuchet MS" pitchFamily="34" charset="-122"/>
+                <a:cs typeface="Trebuchet MS" pitchFamily="34" charset="-120"/>
+              </a:rPr>
+              <a:t>o</a:t>
+            </a:r>
+            <a:endParaRPr lang="en-US" sz="900" dirty="0"/>
+          </a:p>
+        </p:txBody>
+      </p:sp>
+      <p:sp>
+        <p:nvSpPr>
+          <p:cNvPr id="42" name="Shape 40"/>
+          <p:cNvSpPr/>
+          <p:nvPr/>
+        </p:nvSpPr>
+        <p:spPr>
+          <a:xfrm>
+            <a:off x="4850892" y="4169664"/>
+            <a:ext cx="685800" cy="384048"/>
+          </a:xfrm>
+          <a:prstGeom prst="rect">
+            <a:avLst>
+              <a:gd name="adj" fmla="val 9524"/>
+            </a:avLst>
+          </a:prstGeom>
+          <a:solidFill>
+            <a:srgbClr val="FFFFFF"/>
+          </a:solidFill>
+          <a:ln w="12700">
+            <a:solidFill>
+              <a:srgbClr val="DB2777"/>
+            </a:solidFill>
+            <a:prstDash val="solid"/>
+          </a:ln>
+        </p:spPr>
+      </p:sp>
+      <p:sp>
+        <p:nvSpPr>
+          <p:cNvPr id="43" name="Text 41"/>
+          <p:cNvSpPr/>
+          <p:nvPr/>
+        </p:nvSpPr>
+        <p:spPr>
+          <a:xfrm>
+            <a:off x="4850892" y="4169664"/>
+            <a:ext cx="685800" cy="384048"/>
+          </a:xfrm>
+          <a:prstGeom prst="rect">
+            <a:avLst/>
+          </a:prstGeom>
+          <a:noFill/>
+          <a:ln/>
+        </p:spPr>
+        <p:txBody>
+          <a:bodyPr wrap="square" lIns="0" tIns="0" rIns="0" bIns="0" rtlCol="0" anchor="ctr"/>
+          <a:lstStyle/>
+          <a:p>
+            <a:pPr algn="ctr" indent="0" marL="0">
+              <a:buNone/>
+            </a:pPr>
+            <a:r>
+              <a:rPr lang="en-US" sz="900" b="1" dirty="0">
+                <a:solidFill>
+                  <a:srgbClr val="9D174D"/>
+                </a:solidFill>
+                <a:latin typeface="Trebuchet MS" pitchFamily="34" charset="0"/>
+                <a:ea typeface="Trebuchet MS" pitchFamily="34" charset="-122"/>
+                <a:cs typeface="Trebuchet MS" pitchFamily="34" charset="-120"/>
+              </a:rPr>
+              <a:t>s</a:t>
+            </a:r>
+            <a:endParaRPr lang="en-US" sz="900" dirty="0"/>
+          </a:p>
+        </p:txBody>
+      </p:sp>
+      <p:sp>
+        <p:nvSpPr>
+          <p:cNvPr id="44" name="Shape 42"/>
+          <p:cNvSpPr/>
+          <p:nvPr/>
+        </p:nvSpPr>
+        <p:spPr>
+          <a:xfrm>
+            <a:off x="5759577" y="4169664"/>
+            <a:ext cx="685800" cy="384048"/>
+          </a:xfrm>
+          <a:prstGeom prst="rect">
+            <a:avLst>
+              <a:gd name="adj" fmla="val 9524"/>
+            </a:avLst>
+          </a:prstGeom>
+          <a:solidFill>
+            <a:srgbClr val="FFFFFF"/>
+          </a:solidFill>
+          <a:ln w="12700">
+            <a:solidFill>
+              <a:srgbClr val="DB2777"/>
+            </a:solidFill>
+            <a:prstDash val="solid"/>
+          </a:ln>
+        </p:spPr>
+      </p:sp>
+      <p:sp>
+        <p:nvSpPr>
+          <p:cNvPr id="45" name="Text 43"/>
+          <p:cNvSpPr/>
+          <p:nvPr/>
+        </p:nvSpPr>
+        <p:spPr>
+          <a:xfrm>
+            <a:off x="5759577" y="4169664"/>
+            <a:ext cx="685800" cy="384048"/>
+          </a:xfrm>
+          <a:prstGeom prst="rect">
+            <a:avLst/>
+          </a:prstGeom>
+          <a:noFill/>
+          <a:ln/>
+        </p:spPr>
+        <p:txBody>
+          <a:bodyPr wrap="square" lIns="0" tIns="0" rIns="0" bIns="0" rtlCol="0" anchor="ctr"/>
+          <a:lstStyle/>
+          <a:p>
+            <a:pPr algn="ctr" indent="0" marL="0">
+              <a:buNone/>
+            </a:pPr>
+            <a:r>
+              <a:rPr lang="en-US" sz="900" b="1" dirty="0">
+                <a:solidFill>
+                  <a:srgbClr val="9D174D"/>
+                </a:solidFill>
+                <a:latin typeface="Trebuchet MS" pitchFamily="34" charset="0"/>
+                <a:ea typeface="Trebuchet MS" pitchFamily="34" charset="-122"/>
+                <a:cs typeface="Trebuchet MS" pitchFamily="34" charset="-120"/>
+              </a:rPr>
+              <a:t>p</a:t>
+            </a:r>
+            <a:endParaRPr lang="en-US" sz="900" dirty="0"/>
+          </a:p>
+        </p:txBody>
+      </p:sp>
+      <p:sp>
+        <p:nvSpPr>
+          <p:cNvPr id="46" name="Shape 44"/>
+          <p:cNvSpPr/>
+          <p:nvPr/>
+        </p:nvSpPr>
+        <p:spPr>
+          <a:xfrm>
+            <a:off x="6668262" y="4169664"/>
+            <a:ext cx="685800" cy="384048"/>
+          </a:xfrm>
+          <a:prstGeom prst="rect">
+            <a:avLst>
+              <a:gd name="adj" fmla="val 9524"/>
+            </a:avLst>
+          </a:prstGeom>
+          <a:solidFill>
+            <a:srgbClr val="FFFFFF"/>
+          </a:solidFill>
+          <a:ln w="12700">
+            <a:solidFill>
+              <a:srgbClr val="DB2777"/>
+            </a:solidFill>
+            <a:prstDash val="solid"/>
+          </a:ln>
+        </p:spPr>
+      </p:sp>
+      <p:sp>
+        <p:nvSpPr>
+          <p:cNvPr id="47" name="Text 45"/>
+          <p:cNvSpPr/>
+          <p:nvPr/>
+        </p:nvSpPr>
+        <p:spPr>
+          <a:xfrm>
+            <a:off x="6668262" y="4169664"/>
+            <a:ext cx="685800" cy="384048"/>
+          </a:xfrm>
+          <a:prstGeom prst="rect">
+            <a:avLst/>
+          </a:prstGeom>
+          <a:noFill/>
+          <a:ln/>
+        </p:spPr>
+        <p:txBody>
+          <a:bodyPr wrap="square" lIns="0" tIns="0" rIns="0" bIns="0" rtlCol="0" anchor="ctr"/>
+          <a:lstStyle/>
+          <a:p>
+            <a:pPr algn="ctr" indent="0" marL="0">
+              <a:buNone/>
+            </a:pPr>
+            <a:r>
+              <a:rPr lang="en-US" sz="900" b="1" dirty="0">
+                <a:solidFill>
+                  <a:srgbClr val="9D174D"/>
+                </a:solidFill>
+                <a:latin typeface="Trebuchet MS" pitchFamily="34" charset="0"/>
+                <a:ea typeface="Trebuchet MS" pitchFamily="34" charset="-122"/>
+                <a:cs typeface="Trebuchet MS" pitchFamily="34" charset="-120"/>
+              </a:rPr>
+              <a:t>a</a:t>
+            </a:r>
+            <a:endParaRPr lang="en-US" sz="900" dirty="0"/>
+          </a:p>
+        </p:txBody>
+      </p:sp>
+      <p:sp>
+        <p:nvSpPr>
+          <p:cNvPr id="48" name="Shape 46"/>
+          <p:cNvSpPr/>
+          <p:nvPr/>
+        </p:nvSpPr>
+        <p:spPr>
+          <a:xfrm>
+            <a:off x="7576947" y="4169664"/>
+            <a:ext cx="685800" cy="384048"/>
+          </a:xfrm>
+          <a:prstGeom prst="rect">
+            <a:avLst>
+              <a:gd name="adj" fmla="val 9524"/>
+            </a:avLst>
+          </a:prstGeom>
+          <a:solidFill>
+            <a:srgbClr val="FFFFFF"/>
+          </a:solidFill>
+          <a:ln w="12700">
+            <a:solidFill>
+              <a:srgbClr val="DB2777"/>
+            </a:solidFill>
+            <a:prstDash val="solid"/>
+          </a:ln>
+        </p:spPr>
+      </p:sp>
+      <p:sp>
+        <p:nvSpPr>
+          <p:cNvPr id="49" name="Text 47"/>
+          <p:cNvSpPr/>
+          <p:nvPr/>
+        </p:nvSpPr>
+        <p:spPr>
+          <a:xfrm>
+            <a:off x="7576947" y="4169664"/>
+            <a:ext cx="685800" cy="384048"/>
+          </a:xfrm>
+          <a:prstGeom prst="rect">
+            <a:avLst/>
+          </a:prstGeom>
+          <a:noFill/>
+          <a:ln/>
+        </p:spPr>
+        <p:txBody>
+          <a:bodyPr wrap="square" lIns="0" tIns="0" rIns="0" bIns="0" rtlCol="0" anchor="ctr"/>
+          <a:lstStyle/>
+          <a:p>
+            <a:pPr algn="ctr" indent="0" marL="0">
+              <a:buNone/>
+            </a:pPr>
+            <a:r>
+              <a:rPr lang="en-US" sz="900" b="1" dirty="0">
+                <a:solidFill>
+                  <a:srgbClr val="9D174D"/>
+                </a:solidFill>
+                <a:latin typeface="Trebuchet MS" pitchFamily="34" charset="0"/>
+                <a:ea typeface="Trebuchet MS" pitchFamily="34" charset="-122"/>
+                <a:cs typeface="Trebuchet MS" pitchFamily="34" charset="-120"/>
+              </a:rPr>
+              <a:t>ce</a:t>
+            </a:r>
+            <a:endParaRPr lang="en-US" sz="900" dirty="0"/>
+          </a:p>
+        </p:txBody>
+      </p:sp>
+      <p:sp>
+        <p:nvSpPr>
+          <p:cNvPr id="50" name="Text 48"/>
+          <p:cNvSpPr/>
+          <p:nvPr/>
+        </p:nvSpPr>
+        <p:spPr>
+          <a:xfrm>
+            <a:off x="7576947" y="4572000"/>
+            <a:ext cx="685800" cy="219456"/>
           </a:xfrm>
           <a:prstGeom prst="rect">
             <a:avLst/>
@@ -28561,1217 +29392,17 @@
               <a:buNone/>
             </a:pPr>
             <a:r>
-              <a:rPr lang="en-US" sz="850" dirty="0">
-                <a:solidFill>
-                  <a:srgbClr val="475569"/>
+              <a:rPr lang="en-US" sz="750" i="1" dirty="0">
+                <a:solidFill>
+                  <a:srgbClr val="94A3B8"/>
                 </a:solidFill>
                 <a:latin typeface="Calibri" pitchFamily="34" charset="0"/>
                 <a:ea typeface="Calibri" pitchFamily="34" charset="-122"/>
                 <a:cs typeface="Calibri" pitchFamily="34" charset="-120"/>
               </a:rPr>
-              <a:t>study or practice of</a:t>
-            </a:r>
-            <a:endParaRPr lang="en-US" sz="850" dirty="0"/>
-          </a:p>
-        </p:txBody>
-      </p:sp>
-      <p:sp>
-        <p:nvSpPr>
-          <p:cNvPr id="25" name="Shape 23"/>
-          <p:cNvSpPr/>
-          <p:nvPr/>
-        </p:nvSpPr>
-        <p:spPr>
-          <a:xfrm>
-            <a:off x="365760" y="3273552"/>
-            <a:ext cx="1371600" cy="658368"/>
-          </a:xfrm>
-          <a:prstGeom prst="rect">
-            <a:avLst>
-              <a:gd name="adj" fmla="val 8333"/>
-            </a:avLst>
-          </a:prstGeom>
-          <a:solidFill>
-            <a:srgbClr val="E2E8F0"/>
-          </a:solidFill>
-          <a:ln w="12700">
-            <a:solidFill>
-              <a:srgbClr val="E2E8F0"/>
-            </a:solidFill>
-            <a:prstDash val="solid"/>
-          </a:ln>
-        </p:spPr>
-      </p:sp>
-      <p:sp>
-        <p:nvSpPr>
-          <p:cNvPr id="26" name="Text 24"/>
-          <p:cNvSpPr/>
-          <p:nvPr/>
-        </p:nvSpPr>
-        <p:spPr>
-          <a:xfrm>
-            <a:off x="365760" y="3273552"/>
-            <a:ext cx="1371600" cy="658368"/>
-          </a:xfrm>
-          <a:prstGeom prst="rect">
-            <a:avLst/>
-          </a:prstGeom>
-          <a:noFill/>
-          <a:ln/>
-        </p:spPr>
-        <p:txBody>
-          <a:bodyPr wrap="square" lIns="0" tIns="0" rIns="0" bIns="0" rtlCol="0" anchor="ctr"/>
-          <a:lstStyle/>
-          <a:p>
-            <a:pPr algn="ctr" indent="0" marL="0">
-              <a:buNone/>
-            </a:pPr>
-            <a:r>
-              <a:rPr lang="en-US" sz="1100" b="1" dirty="0">
-                <a:solidFill>
-                  <a:srgbClr val="475569"/>
-                </a:solidFill>
-                <a:latin typeface="Trebuchet MS" pitchFamily="34" charset="0"/>
-                <a:ea typeface="Trebuchet MS" pitchFamily="34" charset="-122"/>
-                <a:cs typeface="Trebuchet MS" pitchFamily="34" charset="-120"/>
-              </a:rPr>
-              <a:t>Syllables</a:t>
-            </a:r>
-            <a:endParaRPr lang="en-US" sz="1100" dirty="0"/>
-          </a:p>
-        </p:txBody>
-      </p:sp>
-      <p:sp>
-        <p:nvSpPr>
-          <p:cNvPr id="27" name="Shape 25"/>
-          <p:cNvSpPr/>
-          <p:nvPr/>
-        </p:nvSpPr>
-        <p:spPr>
-          <a:xfrm>
-            <a:off x="1874520" y="3273552"/>
-            <a:ext cx="6903720" cy="658368"/>
-          </a:xfrm>
-          <a:prstGeom prst="rect">
-            <a:avLst>
-              <a:gd name="adj" fmla="val 8333"/>
-            </a:avLst>
-          </a:prstGeom>
-          <a:solidFill>
-            <a:srgbClr val="CCFBF1"/>
-          </a:solidFill>
-          <a:ln w="12700">
-            <a:solidFill>
-              <a:srgbClr val="0D9488"/>
-            </a:solidFill>
-            <a:prstDash val="solid"/>
-          </a:ln>
-        </p:spPr>
-      </p:sp>
-      <p:sp>
-        <p:nvSpPr>
-          <p:cNvPr id="28" name="Shape 26"/>
-          <p:cNvSpPr/>
-          <p:nvPr/>
-        </p:nvSpPr>
-        <p:spPr>
-          <a:xfrm>
-            <a:off x="1975104" y="3364992"/>
-            <a:ext cx="1554480" cy="475488"/>
-          </a:xfrm>
-          <a:prstGeom prst="rect">
-            <a:avLst>
-              <a:gd name="adj" fmla="val 9615"/>
-            </a:avLst>
-          </a:prstGeom>
-          <a:solidFill>
-            <a:srgbClr val="FFFFFF"/>
-          </a:solidFill>
-          <a:ln w="12700">
-            <a:solidFill>
-              <a:srgbClr val="0D9488"/>
-            </a:solidFill>
-            <a:prstDash val="solid"/>
-          </a:ln>
-        </p:spPr>
-      </p:sp>
-      <p:sp>
-        <p:nvSpPr>
-          <p:cNvPr id="29" name="Text 27"/>
-          <p:cNvSpPr/>
-          <p:nvPr/>
-        </p:nvSpPr>
-        <p:spPr>
-          <a:xfrm>
-            <a:off x="1975104" y="3364992"/>
-            <a:ext cx="1554480" cy="475488"/>
-          </a:xfrm>
-          <a:prstGeom prst="rect">
-            <a:avLst/>
-          </a:prstGeom>
-          <a:noFill/>
-          <a:ln/>
-        </p:spPr>
-        <p:txBody>
-          <a:bodyPr wrap="square" lIns="0" tIns="0" rIns="0" bIns="0" rtlCol="0" anchor="ctr"/>
-          <a:lstStyle/>
-          <a:p>
-            <a:pPr algn="ctr" indent="0" marL="0">
-              <a:buNone/>
-            </a:pPr>
-            <a:r>
-              <a:rPr lang="en-US" sz="1400" b="1" dirty="0">
-                <a:solidFill>
-                  <a:srgbClr val="0D9488"/>
-                </a:solidFill>
-                <a:latin typeface="Trebuchet MS" pitchFamily="34" charset="0"/>
-                <a:ea typeface="Trebuchet MS" pitchFamily="34" charset="-122"/>
-                <a:cs typeface="Trebuchet MS" pitchFamily="34" charset="-120"/>
-              </a:rPr>
-              <a:t>ae</a:t>
-            </a:r>
-            <a:endParaRPr lang="en-US" sz="1400" dirty="0"/>
-          </a:p>
-        </p:txBody>
-      </p:sp>
-      <p:sp>
-        <p:nvSpPr>
-          <p:cNvPr id="30" name="Text 28"/>
-          <p:cNvSpPr/>
-          <p:nvPr/>
-        </p:nvSpPr>
-        <p:spPr>
-          <a:xfrm>
-            <a:off x="3529584" y="3364992"/>
-            <a:ext cx="73152" cy="475488"/>
-          </a:xfrm>
-          <a:prstGeom prst="rect">
-            <a:avLst/>
-          </a:prstGeom>
-          <a:noFill/>
-          <a:ln/>
-        </p:spPr>
-        <p:txBody>
-          <a:bodyPr wrap="square" lIns="0" tIns="0" rIns="0" bIns="0" rtlCol="0" anchor="ctr"/>
-          <a:lstStyle/>
-          <a:p>
-            <a:pPr algn="ctr" indent="0" marL="0">
-              <a:buNone/>
-            </a:pPr>
-            <a:r>
-              <a:rPr lang="en-US" sz="1600" b="1" dirty="0">
-                <a:solidFill>
-                  <a:srgbClr val="0D9488"/>
-                </a:solidFill>
-                <a:latin typeface="Trebuchet MS" pitchFamily="34" charset="0"/>
-                <a:ea typeface="Trebuchet MS" pitchFamily="34" charset="-122"/>
-                <a:cs typeface="Trebuchet MS" pitchFamily="34" charset="-120"/>
-              </a:rPr>
-              <a:t>·</a:t>
-            </a:r>
-            <a:endParaRPr lang="en-US" sz="1600" dirty="0"/>
-          </a:p>
-        </p:txBody>
-      </p:sp>
-      <p:sp>
-        <p:nvSpPr>
-          <p:cNvPr id="31" name="Shape 29"/>
-          <p:cNvSpPr/>
-          <p:nvPr/>
-        </p:nvSpPr>
-        <p:spPr>
-          <a:xfrm>
-            <a:off x="3602736" y="3364992"/>
-            <a:ext cx="1554480" cy="475488"/>
-          </a:xfrm>
-          <a:prstGeom prst="rect">
-            <a:avLst>
-              <a:gd name="adj" fmla="val 9615"/>
-            </a:avLst>
-          </a:prstGeom>
-          <a:solidFill>
-            <a:srgbClr val="FFFFFF"/>
-          </a:solidFill>
-          <a:ln w="12700">
-            <a:solidFill>
-              <a:srgbClr val="0D9488"/>
-            </a:solidFill>
-            <a:prstDash val="solid"/>
-          </a:ln>
-        </p:spPr>
-      </p:sp>
-      <p:sp>
-        <p:nvSpPr>
-          <p:cNvPr id="32" name="Text 30"/>
-          <p:cNvSpPr/>
-          <p:nvPr/>
-        </p:nvSpPr>
-        <p:spPr>
-          <a:xfrm>
-            <a:off x="3602736" y="3364992"/>
-            <a:ext cx="1554480" cy="475488"/>
-          </a:xfrm>
-          <a:prstGeom prst="rect">
-            <a:avLst/>
-          </a:prstGeom>
-          <a:noFill/>
-          <a:ln/>
-        </p:spPr>
-        <p:txBody>
-          <a:bodyPr wrap="square" lIns="0" tIns="0" rIns="0" bIns="0" rtlCol="0" anchor="ctr"/>
-          <a:lstStyle/>
-          <a:p>
-            <a:pPr algn="ctr" indent="0" marL="0">
-              <a:buNone/>
-            </a:pPr>
-            <a:r>
-              <a:rPr lang="en-US" sz="1400" b="1" dirty="0">
-                <a:solidFill>
-                  <a:srgbClr val="0D9488"/>
-                </a:solidFill>
-                <a:latin typeface="Trebuchet MS" pitchFamily="34" charset="0"/>
-                <a:ea typeface="Trebuchet MS" pitchFamily="34" charset="-122"/>
-                <a:cs typeface="Trebuchet MS" pitchFamily="34" charset="-120"/>
-              </a:rPr>
-              <a:t>ro</a:t>
-            </a:r>
-            <a:endParaRPr lang="en-US" sz="1400" dirty="0"/>
-          </a:p>
-        </p:txBody>
-      </p:sp>
-      <p:sp>
-        <p:nvSpPr>
-          <p:cNvPr id="33" name="Text 31"/>
-          <p:cNvSpPr/>
-          <p:nvPr/>
-        </p:nvSpPr>
-        <p:spPr>
-          <a:xfrm>
-            <a:off x="5157216" y="3364992"/>
-            <a:ext cx="73152" cy="475488"/>
-          </a:xfrm>
-          <a:prstGeom prst="rect">
-            <a:avLst/>
-          </a:prstGeom>
-          <a:noFill/>
-          <a:ln/>
-        </p:spPr>
-        <p:txBody>
-          <a:bodyPr wrap="square" lIns="0" tIns="0" rIns="0" bIns="0" rtlCol="0" anchor="ctr"/>
-          <a:lstStyle/>
-          <a:p>
-            <a:pPr algn="ctr" indent="0" marL="0">
-              <a:buNone/>
-            </a:pPr>
-            <a:r>
-              <a:rPr lang="en-US" sz="1600" b="1" dirty="0">
-                <a:solidFill>
-                  <a:srgbClr val="0D9488"/>
-                </a:solidFill>
-                <a:latin typeface="Trebuchet MS" pitchFamily="34" charset="0"/>
-                <a:ea typeface="Trebuchet MS" pitchFamily="34" charset="-122"/>
-                <a:cs typeface="Trebuchet MS" pitchFamily="34" charset="-120"/>
-              </a:rPr>
-              <a:t>·</a:t>
-            </a:r>
-            <a:endParaRPr lang="en-US" sz="1600" dirty="0"/>
-          </a:p>
-        </p:txBody>
-      </p:sp>
-      <p:sp>
-        <p:nvSpPr>
-          <p:cNvPr id="34" name="Shape 32"/>
-          <p:cNvSpPr/>
-          <p:nvPr/>
-        </p:nvSpPr>
-        <p:spPr>
-          <a:xfrm>
-            <a:off x="5230368" y="3364992"/>
-            <a:ext cx="1554480" cy="475488"/>
-          </a:xfrm>
-          <a:prstGeom prst="rect">
-            <a:avLst>
-              <a:gd name="adj" fmla="val 9615"/>
-            </a:avLst>
-          </a:prstGeom>
-          <a:solidFill>
-            <a:srgbClr val="FFFFFF"/>
-          </a:solidFill>
-          <a:ln w="12700">
-            <a:solidFill>
-              <a:srgbClr val="0D9488"/>
-            </a:solidFill>
-            <a:prstDash val="solid"/>
-          </a:ln>
-        </p:spPr>
-      </p:sp>
-      <p:sp>
-        <p:nvSpPr>
-          <p:cNvPr id="35" name="Text 33"/>
-          <p:cNvSpPr/>
-          <p:nvPr/>
-        </p:nvSpPr>
-        <p:spPr>
-          <a:xfrm>
-            <a:off x="5230368" y="3364992"/>
-            <a:ext cx="1554480" cy="475488"/>
-          </a:xfrm>
-          <a:prstGeom prst="rect">
-            <a:avLst/>
-          </a:prstGeom>
-          <a:noFill/>
-          <a:ln/>
-        </p:spPr>
-        <p:txBody>
-          <a:bodyPr wrap="square" lIns="0" tIns="0" rIns="0" bIns="0" rtlCol="0" anchor="ctr"/>
-          <a:lstStyle/>
-          <a:p>
-            <a:pPr algn="ctr" indent="0" marL="0">
-              <a:buNone/>
-            </a:pPr>
-            <a:r>
-              <a:rPr lang="en-US" sz="1400" b="1" dirty="0">
-                <a:solidFill>
-                  <a:srgbClr val="0D9488"/>
-                </a:solidFill>
-                <a:latin typeface="Trebuchet MS" pitchFamily="34" charset="0"/>
-                <a:ea typeface="Trebuchet MS" pitchFamily="34" charset="-122"/>
-                <a:cs typeface="Trebuchet MS" pitchFamily="34" charset="-120"/>
-              </a:rPr>
-              <a:t>nau</a:t>
-            </a:r>
-            <a:endParaRPr lang="en-US" sz="1400" dirty="0"/>
-          </a:p>
-        </p:txBody>
-      </p:sp>
-      <p:sp>
-        <p:nvSpPr>
-          <p:cNvPr id="36" name="Text 34"/>
-          <p:cNvSpPr/>
-          <p:nvPr/>
-        </p:nvSpPr>
-        <p:spPr>
-          <a:xfrm>
-            <a:off x="6784848" y="3364992"/>
-            <a:ext cx="73152" cy="475488"/>
-          </a:xfrm>
-          <a:prstGeom prst="rect">
-            <a:avLst/>
-          </a:prstGeom>
-          <a:noFill/>
-          <a:ln/>
-        </p:spPr>
-        <p:txBody>
-          <a:bodyPr wrap="square" lIns="0" tIns="0" rIns="0" bIns="0" rtlCol="0" anchor="ctr"/>
-          <a:lstStyle/>
-          <a:p>
-            <a:pPr algn="ctr" indent="0" marL="0">
-              <a:buNone/>
-            </a:pPr>
-            <a:r>
-              <a:rPr lang="en-US" sz="1600" b="1" dirty="0">
-                <a:solidFill>
-                  <a:srgbClr val="0D9488"/>
-                </a:solidFill>
-                <a:latin typeface="Trebuchet MS" pitchFamily="34" charset="0"/>
-                <a:ea typeface="Trebuchet MS" pitchFamily="34" charset="-122"/>
-                <a:cs typeface="Trebuchet MS" pitchFamily="34" charset="-120"/>
-              </a:rPr>
-              <a:t>·</a:t>
-            </a:r>
-            <a:endParaRPr lang="en-US" sz="1600" dirty="0"/>
-          </a:p>
-        </p:txBody>
-      </p:sp>
-      <p:sp>
-        <p:nvSpPr>
-          <p:cNvPr id="37" name="Shape 35"/>
-          <p:cNvSpPr/>
-          <p:nvPr/>
-        </p:nvSpPr>
-        <p:spPr>
-          <a:xfrm>
-            <a:off x="6858000" y="3364992"/>
-            <a:ext cx="1554480" cy="475488"/>
-          </a:xfrm>
-          <a:prstGeom prst="rect">
-            <a:avLst>
-              <a:gd name="adj" fmla="val 9615"/>
-            </a:avLst>
-          </a:prstGeom>
-          <a:solidFill>
-            <a:srgbClr val="FFFFFF"/>
-          </a:solidFill>
-          <a:ln w="12700">
-            <a:solidFill>
-              <a:srgbClr val="0D9488"/>
-            </a:solidFill>
-            <a:prstDash val="solid"/>
-          </a:ln>
-        </p:spPr>
-      </p:sp>
-      <p:sp>
-        <p:nvSpPr>
-          <p:cNvPr id="38" name="Text 36"/>
-          <p:cNvSpPr/>
-          <p:nvPr/>
-        </p:nvSpPr>
-        <p:spPr>
-          <a:xfrm>
-            <a:off x="6858000" y="3364992"/>
-            <a:ext cx="1554480" cy="475488"/>
-          </a:xfrm>
-          <a:prstGeom prst="rect">
-            <a:avLst/>
-          </a:prstGeom>
-          <a:noFill/>
-          <a:ln/>
-        </p:spPr>
-        <p:txBody>
-          <a:bodyPr wrap="square" lIns="0" tIns="0" rIns="0" bIns="0" rtlCol="0" anchor="ctr"/>
-          <a:lstStyle/>
-          <a:p>
-            <a:pPr algn="ctr" indent="0" marL="0">
-              <a:buNone/>
-            </a:pPr>
-            <a:r>
-              <a:rPr lang="en-US" sz="1400" b="1" dirty="0">
-                <a:solidFill>
-                  <a:srgbClr val="0D9488"/>
-                </a:solidFill>
-                <a:latin typeface="Trebuchet MS" pitchFamily="34" charset="0"/>
-                <a:ea typeface="Trebuchet MS" pitchFamily="34" charset="-122"/>
-                <a:cs typeface="Trebuchet MS" pitchFamily="34" charset="-120"/>
-              </a:rPr>
-              <a:t>tics</a:t>
-            </a:r>
-            <a:endParaRPr lang="en-US" sz="1400" dirty="0"/>
-          </a:p>
-        </p:txBody>
-      </p:sp>
-      <p:sp>
-        <p:nvSpPr>
-          <p:cNvPr id="39" name="Shape 37"/>
-          <p:cNvSpPr/>
-          <p:nvPr/>
-        </p:nvSpPr>
-        <p:spPr>
-          <a:xfrm>
-            <a:off x="365760" y="4096512"/>
-            <a:ext cx="1371600" cy="804672"/>
-          </a:xfrm>
-          <a:prstGeom prst="rect">
-            <a:avLst>
-              <a:gd name="adj" fmla="val 6818"/>
-            </a:avLst>
-          </a:prstGeom>
-          <a:solidFill>
-            <a:srgbClr val="E2E8F0"/>
-          </a:solidFill>
-          <a:ln w="12700">
-            <a:solidFill>
-              <a:srgbClr val="E2E8F0"/>
-            </a:solidFill>
-            <a:prstDash val="solid"/>
-          </a:ln>
-        </p:spPr>
-      </p:sp>
-      <p:sp>
-        <p:nvSpPr>
-          <p:cNvPr id="40" name="Text 38"/>
-          <p:cNvSpPr/>
-          <p:nvPr/>
-        </p:nvSpPr>
-        <p:spPr>
-          <a:xfrm>
-            <a:off x="365760" y="4096512"/>
-            <a:ext cx="1371600" cy="804672"/>
-          </a:xfrm>
-          <a:prstGeom prst="rect">
-            <a:avLst/>
-          </a:prstGeom>
-          <a:noFill/>
-          <a:ln/>
-        </p:spPr>
-        <p:txBody>
-          <a:bodyPr wrap="square" lIns="0" tIns="0" rIns="0" bIns="0" rtlCol="0" anchor="ctr"/>
-          <a:lstStyle/>
-          <a:p>
-            <a:pPr algn="ctr" indent="0" marL="0">
-              <a:buNone/>
-            </a:pPr>
-            <a:r>
-              <a:rPr lang="en-US" sz="1100" b="1" dirty="0">
-                <a:solidFill>
-                  <a:srgbClr val="475569"/>
-                </a:solidFill>
-                <a:latin typeface="Trebuchet MS" pitchFamily="34" charset="0"/>
-                <a:ea typeface="Trebuchet MS" pitchFamily="34" charset="-122"/>
-                <a:cs typeface="Trebuchet MS" pitchFamily="34" charset="-120"/>
-              </a:rPr>
-              <a:t>Phonemes</a:t>
-            </a:r>
-            <a:endParaRPr lang="en-US" sz="1100" dirty="0"/>
-          </a:p>
-        </p:txBody>
-      </p:sp>
-      <p:sp>
-        <p:nvSpPr>
-          <p:cNvPr id="41" name="Shape 39"/>
-          <p:cNvSpPr/>
-          <p:nvPr/>
-        </p:nvSpPr>
-        <p:spPr>
-          <a:xfrm>
-            <a:off x="1874520" y="4096512"/>
-            <a:ext cx="6903720" cy="804672"/>
-          </a:xfrm>
-          <a:prstGeom prst="rect">
-            <a:avLst>
-              <a:gd name="adj" fmla="val 6818"/>
-            </a:avLst>
-          </a:prstGeom>
-          <a:solidFill>
-            <a:srgbClr val="FCE7F3"/>
-          </a:solidFill>
-          <a:ln w="12700">
-            <a:solidFill>
-              <a:srgbClr val="DB2777"/>
-            </a:solidFill>
-            <a:prstDash val="solid"/>
-          </a:ln>
-        </p:spPr>
-      </p:sp>
-      <p:sp>
-        <p:nvSpPr>
-          <p:cNvPr id="42" name="Shape 40"/>
-          <p:cNvSpPr/>
-          <p:nvPr/>
-        </p:nvSpPr>
-        <p:spPr>
-          <a:xfrm>
-            <a:off x="1951330" y="4169664"/>
-            <a:ext cx="676656" cy="384048"/>
-          </a:xfrm>
-          <a:prstGeom prst="rect">
-            <a:avLst>
-              <a:gd name="adj" fmla="val 9524"/>
-            </a:avLst>
-          </a:prstGeom>
-          <a:solidFill>
-            <a:srgbClr val="FFFFFF"/>
-          </a:solidFill>
-          <a:ln w="12700">
-            <a:solidFill>
-              <a:srgbClr val="DB2777"/>
-            </a:solidFill>
-            <a:prstDash val="solid"/>
-          </a:ln>
-        </p:spPr>
-      </p:sp>
-      <p:sp>
-        <p:nvSpPr>
-          <p:cNvPr id="43" name="Text 41"/>
-          <p:cNvSpPr/>
-          <p:nvPr/>
-        </p:nvSpPr>
-        <p:spPr>
-          <a:xfrm>
-            <a:off x="1951330" y="4169664"/>
-            <a:ext cx="676656" cy="384048"/>
-          </a:xfrm>
-          <a:prstGeom prst="rect">
-            <a:avLst/>
-          </a:prstGeom>
-          <a:noFill/>
-          <a:ln/>
-        </p:spPr>
-        <p:txBody>
-          <a:bodyPr wrap="square" lIns="0" tIns="0" rIns="0" bIns="0" rtlCol="0" anchor="ctr"/>
-          <a:lstStyle/>
-          <a:p>
-            <a:pPr algn="ctr" indent="0" marL="0">
-              <a:buNone/>
-            </a:pPr>
-            <a:r>
-              <a:rPr lang="en-US" sz="900" b="1" dirty="0">
-                <a:solidFill>
-                  <a:srgbClr val="9D174D"/>
-                </a:solidFill>
-                <a:latin typeface="Trebuchet MS" pitchFamily="34" charset="0"/>
-                <a:ea typeface="Trebuchet MS" pitchFamily="34" charset="-122"/>
-                <a:cs typeface="Trebuchet MS" pitchFamily="34" charset="-120"/>
-              </a:rPr>
-              <a:t>ae</a:t>
-            </a:r>
-            <a:endParaRPr lang="en-US" sz="900" dirty="0"/>
-          </a:p>
-        </p:txBody>
-      </p:sp>
-      <p:sp>
-        <p:nvSpPr>
-          <p:cNvPr id="44" name="Shape 42"/>
-          <p:cNvSpPr/>
-          <p:nvPr/>
-        </p:nvSpPr>
-        <p:spPr>
-          <a:xfrm>
-            <a:off x="2677363" y="4169664"/>
-            <a:ext cx="676656" cy="384048"/>
-          </a:xfrm>
-          <a:prstGeom prst="rect">
-            <a:avLst>
-              <a:gd name="adj" fmla="val 9524"/>
-            </a:avLst>
-          </a:prstGeom>
-          <a:solidFill>
-            <a:srgbClr val="FFFFFF"/>
-          </a:solidFill>
-          <a:ln w="12700">
-            <a:solidFill>
-              <a:srgbClr val="DB2777"/>
-            </a:solidFill>
-            <a:prstDash val="solid"/>
-          </a:ln>
-        </p:spPr>
-      </p:sp>
-      <p:sp>
-        <p:nvSpPr>
-          <p:cNvPr id="45" name="Text 43"/>
-          <p:cNvSpPr/>
-          <p:nvPr/>
-        </p:nvSpPr>
-        <p:spPr>
-          <a:xfrm>
-            <a:off x="2677363" y="4169664"/>
-            <a:ext cx="676656" cy="384048"/>
-          </a:xfrm>
-          <a:prstGeom prst="rect">
-            <a:avLst/>
-          </a:prstGeom>
-          <a:noFill/>
-          <a:ln/>
-        </p:spPr>
-        <p:txBody>
-          <a:bodyPr wrap="square" lIns="0" tIns="0" rIns="0" bIns="0" rtlCol="0" anchor="ctr"/>
-          <a:lstStyle/>
-          <a:p>
-            <a:pPr algn="ctr" indent="0" marL="0">
-              <a:buNone/>
-            </a:pPr>
-            <a:r>
-              <a:rPr lang="en-US" sz="900" b="1" dirty="0">
-                <a:solidFill>
-                  <a:srgbClr val="9D174D"/>
-                </a:solidFill>
-                <a:latin typeface="Trebuchet MS" pitchFamily="34" charset="0"/>
-                <a:ea typeface="Trebuchet MS" pitchFamily="34" charset="-122"/>
-                <a:cs typeface="Trebuchet MS" pitchFamily="34" charset="-120"/>
-              </a:rPr>
-              <a:t>r</a:t>
-            </a:r>
-            <a:endParaRPr lang="en-US" sz="900" dirty="0"/>
-          </a:p>
-        </p:txBody>
-      </p:sp>
-      <p:sp>
-        <p:nvSpPr>
-          <p:cNvPr id="46" name="Shape 44"/>
-          <p:cNvSpPr/>
-          <p:nvPr/>
-        </p:nvSpPr>
-        <p:spPr>
-          <a:xfrm>
-            <a:off x="3403397" y="4169664"/>
-            <a:ext cx="676656" cy="384048"/>
-          </a:xfrm>
-          <a:prstGeom prst="rect">
-            <a:avLst>
-              <a:gd name="adj" fmla="val 9524"/>
-            </a:avLst>
-          </a:prstGeom>
-          <a:solidFill>
-            <a:srgbClr val="FFFFFF"/>
-          </a:solidFill>
-          <a:ln w="12700">
-            <a:solidFill>
-              <a:srgbClr val="DB2777"/>
-            </a:solidFill>
-            <a:prstDash val="solid"/>
-          </a:ln>
-        </p:spPr>
-      </p:sp>
-      <p:sp>
-        <p:nvSpPr>
-          <p:cNvPr id="47" name="Text 45"/>
-          <p:cNvSpPr/>
-          <p:nvPr/>
-        </p:nvSpPr>
-        <p:spPr>
-          <a:xfrm>
-            <a:off x="3403397" y="4169664"/>
-            <a:ext cx="676656" cy="384048"/>
-          </a:xfrm>
-          <a:prstGeom prst="rect">
-            <a:avLst/>
-          </a:prstGeom>
-          <a:noFill/>
-          <a:ln/>
-        </p:spPr>
-        <p:txBody>
-          <a:bodyPr wrap="square" lIns="0" tIns="0" rIns="0" bIns="0" rtlCol="0" anchor="ctr"/>
-          <a:lstStyle/>
-          <a:p>
-            <a:pPr algn="ctr" indent="0" marL="0">
-              <a:buNone/>
-            </a:pPr>
-            <a:r>
-              <a:rPr lang="en-US" sz="900" b="1" dirty="0">
-                <a:solidFill>
-                  <a:srgbClr val="9D174D"/>
-                </a:solidFill>
-                <a:latin typeface="Trebuchet MS" pitchFamily="34" charset="0"/>
-                <a:ea typeface="Trebuchet MS" pitchFamily="34" charset="-122"/>
-                <a:cs typeface="Trebuchet MS" pitchFamily="34" charset="-120"/>
-              </a:rPr>
-              <a:t>o</a:t>
-            </a:r>
-            <a:endParaRPr lang="en-US" sz="900" dirty="0"/>
-          </a:p>
-        </p:txBody>
-      </p:sp>
-      <p:sp>
-        <p:nvSpPr>
-          <p:cNvPr id="48" name="Shape 46"/>
-          <p:cNvSpPr/>
-          <p:nvPr/>
-        </p:nvSpPr>
-        <p:spPr>
-          <a:xfrm>
-            <a:off x="4129430" y="4169664"/>
-            <a:ext cx="676656" cy="384048"/>
-          </a:xfrm>
-          <a:prstGeom prst="rect">
-            <a:avLst>
-              <a:gd name="adj" fmla="val 9524"/>
-            </a:avLst>
-          </a:prstGeom>
-          <a:solidFill>
-            <a:srgbClr val="FFFFFF"/>
-          </a:solidFill>
-          <a:ln w="12700">
-            <a:solidFill>
-              <a:srgbClr val="DB2777"/>
-            </a:solidFill>
-            <a:prstDash val="solid"/>
-          </a:ln>
-        </p:spPr>
-      </p:sp>
-      <p:sp>
-        <p:nvSpPr>
-          <p:cNvPr id="49" name="Text 47"/>
-          <p:cNvSpPr/>
-          <p:nvPr/>
-        </p:nvSpPr>
-        <p:spPr>
-          <a:xfrm>
-            <a:off x="4129430" y="4169664"/>
-            <a:ext cx="676656" cy="384048"/>
-          </a:xfrm>
-          <a:prstGeom prst="rect">
-            <a:avLst/>
-          </a:prstGeom>
-          <a:noFill/>
-          <a:ln/>
-        </p:spPr>
-        <p:txBody>
-          <a:bodyPr wrap="square" lIns="0" tIns="0" rIns="0" bIns="0" rtlCol="0" anchor="ctr"/>
-          <a:lstStyle/>
-          <a:p>
-            <a:pPr algn="ctr" indent="0" marL="0">
-              <a:buNone/>
-            </a:pPr>
-            <a:r>
-              <a:rPr lang="en-US" sz="900" b="1" dirty="0">
-                <a:solidFill>
-                  <a:srgbClr val="9D174D"/>
-                </a:solidFill>
-                <a:latin typeface="Trebuchet MS" pitchFamily="34" charset="0"/>
-                <a:ea typeface="Trebuchet MS" pitchFamily="34" charset="-122"/>
-                <a:cs typeface="Trebuchet MS" pitchFamily="34" charset="-120"/>
-              </a:rPr>
-              <a:t>n</a:t>
-            </a:r>
-            <a:endParaRPr lang="en-US" sz="900" dirty="0"/>
-          </a:p>
-        </p:txBody>
-      </p:sp>
-      <p:sp>
-        <p:nvSpPr>
-          <p:cNvPr id="50" name="Shape 48"/>
-          <p:cNvSpPr/>
-          <p:nvPr/>
-        </p:nvSpPr>
-        <p:spPr>
-          <a:xfrm>
-            <a:off x="4855464" y="4169664"/>
-            <a:ext cx="676656" cy="384048"/>
-          </a:xfrm>
-          <a:prstGeom prst="rect">
-            <a:avLst>
-              <a:gd name="adj" fmla="val 9524"/>
-            </a:avLst>
-          </a:prstGeom>
-          <a:solidFill>
-            <a:srgbClr val="FFFFFF"/>
-          </a:solidFill>
-          <a:ln w="12700">
-            <a:solidFill>
-              <a:srgbClr val="DB2777"/>
-            </a:solidFill>
-            <a:prstDash val="solid"/>
-          </a:ln>
-        </p:spPr>
-      </p:sp>
-      <p:sp>
-        <p:nvSpPr>
-          <p:cNvPr id="51" name="Text 49"/>
-          <p:cNvSpPr/>
-          <p:nvPr/>
-        </p:nvSpPr>
-        <p:spPr>
-          <a:xfrm>
-            <a:off x="4855464" y="4169664"/>
-            <a:ext cx="676656" cy="384048"/>
-          </a:xfrm>
-          <a:prstGeom prst="rect">
-            <a:avLst/>
-          </a:prstGeom>
-          <a:noFill/>
-          <a:ln/>
-        </p:spPr>
-        <p:txBody>
-          <a:bodyPr wrap="square" lIns="0" tIns="0" rIns="0" bIns="0" rtlCol="0" anchor="ctr"/>
-          <a:lstStyle/>
-          <a:p>
-            <a:pPr algn="ctr" indent="0" marL="0">
-              <a:buNone/>
-            </a:pPr>
-            <a:r>
-              <a:rPr lang="en-US" sz="900" b="1" dirty="0">
-                <a:solidFill>
-                  <a:srgbClr val="9D174D"/>
-                </a:solidFill>
-                <a:latin typeface="Trebuchet MS" pitchFamily="34" charset="0"/>
-                <a:ea typeface="Trebuchet MS" pitchFamily="34" charset="-122"/>
-                <a:cs typeface="Trebuchet MS" pitchFamily="34" charset="-120"/>
-              </a:rPr>
-              <a:t>au</a:t>
-            </a:r>
-            <a:endParaRPr lang="en-US" sz="900" dirty="0"/>
-          </a:p>
-        </p:txBody>
-      </p:sp>
-      <p:sp>
-        <p:nvSpPr>
-          <p:cNvPr id="52" name="Shape 50"/>
-          <p:cNvSpPr/>
-          <p:nvPr/>
-        </p:nvSpPr>
-        <p:spPr>
-          <a:xfrm>
-            <a:off x="5581498" y="4169664"/>
-            <a:ext cx="676656" cy="384048"/>
-          </a:xfrm>
-          <a:prstGeom prst="rect">
-            <a:avLst>
-              <a:gd name="adj" fmla="val 9524"/>
-            </a:avLst>
-          </a:prstGeom>
-          <a:solidFill>
-            <a:srgbClr val="FFFFFF"/>
-          </a:solidFill>
-          <a:ln w="12700">
-            <a:solidFill>
-              <a:srgbClr val="DB2777"/>
-            </a:solidFill>
-            <a:prstDash val="solid"/>
-          </a:ln>
-        </p:spPr>
-      </p:sp>
-      <p:sp>
-        <p:nvSpPr>
-          <p:cNvPr id="53" name="Text 51"/>
-          <p:cNvSpPr/>
-          <p:nvPr/>
-        </p:nvSpPr>
-        <p:spPr>
-          <a:xfrm>
-            <a:off x="5581498" y="4169664"/>
-            <a:ext cx="676656" cy="384048"/>
-          </a:xfrm>
-          <a:prstGeom prst="rect">
-            <a:avLst/>
-          </a:prstGeom>
-          <a:noFill/>
-          <a:ln/>
-        </p:spPr>
-        <p:txBody>
-          <a:bodyPr wrap="square" lIns="0" tIns="0" rIns="0" bIns="0" rtlCol="0" anchor="ctr"/>
-          <a:lstStyle/>
-          <a:p>
-            <a:pPr algn="ctr" indent="0" marL="0">
-              <a:buNone/>
-            </a:pPr>
-            <a:r>
-              <a:rPr lang="en-US" sz="900" b="1" dirty="0">
-                <a:solidFill>
-                  <a:srgbClr val="9D174D"/>
-                </a:solidFill>
-                <a:latin typeface="Trebuchet MS" pitchFamily="34" charset="0"/>
-                <a:ea typeface="Trebuchet MS" pitchFamily="34" charset="-122"/>
-                <a:cs typeface="Trebuchet MS" pitchFamily="34" charset="-120"/>
-              </a:rPr>
-              <a:t>t</a:t>
-            </a:r>
-            <a:endParaRPr lang="en-US" sz="900" dirty="0"/>
-          </a:p>
-        </p:txBody>
-      </p:sp>
-      <p:sp>
-        <p:nvSpPr>
-          <p:cNvPr id="54" name="Shape 52"/>
-          <p:cNvSpPr/>
-          <p:nvPr/>
-        </p:nvSpPr>
-        <p:spPr>
-          <a:xfrm>
-            <a:off x="6307531" y="4169664"/>
-            <a:ext cx="676656" cy="384048"/>
-          </a:xfrm>
-          <a:prstGeom prst="rect">
-            <a:avLst>
-              <a:gd name="adj" fmla="val 9524"/>
-            </a:avLst>
-          </a:prstGeom>
-          <a:solidFill>
-            <a:srgbClr val="FFFFFF"/>
-          </a:solidFill>
-          <a:ln w="12700">
-            <a:solidFill>
-              <a:srgbClr val="DB2777"/>
-            </a:solidFill>
-            <a:prstDash val="solid"/>
-          </a:ln>
-        </p:spPr>
-      </p:sp>
-      <p:sp>
-        <p:nvSpPr>
-          <p:cNvPr id="55" name="Text 53"/>
-          <p:cNvSpPr/>
-          <p:nvPr/>
-        </p:nvSpPr>
-        <p:spPr>
-          <a:xfrm>
-            <a:off x="6307531" y="4169664"/>
-            <a:ext cx="676656" cy="384048"/>
-          </a:xfrm>
-          <a:prstGeom prst="rect">
-            <a:avLst/>
-          </a:prstGeom>
-          <a:noFill/>
-          <a:ln/>
-        </p:spPr>
-        <p:txBody>
-          <a:bodyPr wrap="square" lIns="0" tIns="0" rIns="0" bIns="0" rtlCol="0" anchor="ctr"/>
-          <a:lstStyle/>
-          <a:p>
-            <a:pPr algn="ctr" indent="0" marL="0">
-              <a:buNone/>
-            </a:pPr>
-            <a:r>
-              <a:rPr lang="en-US" sz="900" b="1" dirty="0">
-                <a:solidFill>
-                  <a:srgbClr val="9D174D"/>
-                </a:solidFill>
-                <a:latin typeface="Trebuchet MS" pitchFamily="34" charset="0"/>
-                <a:ea typeface="Trebuchet MS" pitchFamily="34" charset="-122"/>
-                <a:cs typeface="Trebuchet MS" pitchFamily="34" charset="-120"/>
-              </a:rPr>
-              <a:t>i</a:t>
-            </a:r>
-            <a:endParaRPr lang="en-US" sz="900" dirty="0"/>
-          </a:p>
-        </p:txBody>
-      </p:sp>
-      <p:sp>
-        <p:nvSpPr>
-          <p:cNvPr id="56" name="Shape 54"/>
-          <p:cNvSpPr/>
-          <p:nvPr/>
-        </p:nvSpPr>
-        <p:spPr>
-          <a:xfrm>
-            <a:off x="7033565" y="4169664"/>
-            <a:ext cx="676656" cy="384048"/>
-          </a:xfrm>
-          <a:prstGeom prst="rect">
-            <a:avLst>
-              <a:gd name="adj" fmla="val 9524"/>
-            </a:avLst>
-          </a:prstGeom>
-          <a:solidFill>
-            <a:srgbClr val="FFFFFF"/>
-          </a:solidFill>
-          <a:ln w="12700">
-            <a:solidFill>
-              <a:srgbClr val="DB2777"/>
-            </a:solidFill>
-            <a:prstDash val="solid"/>
-          </a:ln>
-        </p:spPr>
-      </p:sp>
-      <p:sp>
-        <p:nvSpPr>
-          <p:cNvPr id="57" name="Text 55"/>
-          <p:cNvSpPr/>
-          <p:nvPr/>
-        </p:nvSpPr>
-        <p:spPr>
-          <a:xfrm>
-            <a:off x="7033565" y="4169664"/>
-            <a:ext cx="676656" cy="384048"/>
-          </a:xfrm>
-          <a:prstGeom prst="rect">
-            <a:avLst/>
-          </a:prstGeom>
-          <a:noFill/>
-          <a:ln/>
-        </p:spPr>
-        <p:txBody>
-          <a:bodyPr wrap="square" lIns="0" tIns="0" rIns="0" bIns="0" rtlCol="0" anchor="ctr"/>
-          <a:lstStyle/>
-          <a:p>
-            <a:pPr algn="ctr" indent="0" marL="0">
-              <a:buNone/>
-            </a:pPr>
-            <a:r>
-              <a:rPr lang="en-US" sz="900" b="1" dirty="0">
-                <a:solidFill>
-                  <a:srgbClr val="9D174D"/>
-                </a:solidFill>
-                <a:latin typeface="Trebuchet MS" pitchFamily="34" charset="0"/>
-                <a:ea typeface="Trebuchet MS" pitchFamily="34" charset="-122"/>
-                <a:cs typeface="Trebuchet MS" pitchFamily="34" charset="-120"/>
-              </a:rPr>
-              <a:t>c</a:t>
-            </a:r>
-            <a:endParaRPr lang="en-US" sz="900" dirty="0"/>
-          </a:p>
-        </p:txBody>
-      </p:sp>
-      <p:sp>
-        <p:nvSpPr>
-          <p:cNvPr id="58" name="Text 56"/>
-          <p:cNvSpPr/>
-          <p:nvPr/>
-        </p:nvSpPr>
-        <p:spPr>
-          <a:xfrm>
-            <a:off x="7033565" y="4572000"/>
-            <a:ext cx="676656" cy="219456"/>
-          </a:xfrm>
-          <a:prstGeom prst="rect">
-            <a:avLst/>
-          </a:prstGeom>
-          <a:noFill/>
-          <a:ln/>
-        </p:spPr>
-        <p:txBody>
-          <a:bodyPr wrap="square" lIns="0" tIns="0" rIns="0" bIns="0" rtlCol="0" anchor="t"/>
-          <a:lstStyle/>
-          <a:p>
-            <a:pPr algn="ctr" indent="0" marL="0">
-              <a:buNone/>
-            </a:pPr>
-            <a:r>
-              <a:rPr lang="en-US" sz="750" i="1" dirty="0">
-                <a:solidFill>
-                  <a:srgbClr val="94A3B8"/>
-                </a:solidFill>
-                <a:latin typeface="Calibri" pitchFamily="34" charset="0"/>
-                <a:ea typeface="Calibri" pitchFamily="34" charset="-122"/>
-                <a:cs typeface="Calibri" pitchFamily="34" charset="-120"/>
-              </a:rPr>
-              <a:t>/k/</a:t>
+              <a:t>/s/</a:t>
             </a:r>
             <a:endParaRPr lang="en-US" sz="750" dirty="0"/>
-          </a:p>
-        </p:txBody>
-      </p:sp>
-      <p:sp>
-        <p:nvSpPr>
-          <p:cNvPr id="59" name="Shape 57"/>
-          <p:cNvSpPr/>
-          <p:nvPr/>
-        </p:nvSpPr>
-        <p:spPr>
-          <a:xfrm>
-            <a:off x="7759598" y="4169664"/>
-            <a:ext cx="676656" cy="384048"/>
-          </a:xfrm>
-          <a:prstGeom prst="rect">
-            <a:avLst>
-              <a:gd name="adj" fmla="val 9524"/>
-            </a:avLst>
-          </a:prstGeom>
-          <a:solidFill>
-            <a:srgbClr val="FFFFFF"/>
-          </a:solidFill>
-          <a:ln w="12700">
-            <a:solidFill>
-              <a:srgbClr val="DB2777"/>
-            </a:solidFill>
-            <a:prstDash val="solid"/>
-          </a:ln>
-        </p:spPr>
-      </p:sp>
-      <p:sp>
-        <p:nvSpPr>
-          <p:cNvPr id="60" name="Text 58"/>
-          <p:cNvSpPr/>
-          <p:nvPr/>
-        </p:nvSpPr>
-        <p:spPr>
-          <a:xfrm>
-            <a:off x="7759598" y="4169664"/>
-            <a:ext cx="676656" cy="384048"/>
-          </a:xfrm>
-          <a:prstGeom prst="rect">
-            <a:avLst/>
-          </a:prstGeom>
-          <a:noFill/>
-          <a:ln/>
-        </p:spPr>
-        <p:txBody>
-          <a:bodyPr wrap="square" lIns="0" tIns="0" rIns="0" bIns="0" rtlCol="0" anchor="ctr"/>
-          <a:lstStyle/>
-          <a:p>
-            <a:pPr algn="ctr" indent="0" marL="0">
-              <a:buNone/>
-            </a:pPr>
-            <a:r>
-              <a:rPr lang="en-US" sz="900" b="1" dirty="0">
-                <a:solidFill>
-                  <a:srgbClr val="9D174D"/>
-                </a:solidFill>
-                <a:latin typeface="Trebuchet MS" pitchFamily="34" charset="0"/>
-                <a:ea typeface="Trebuchet MS" pitchFamily="34" charset="-122"/>
-                <a:cs typeface="Trebuchet MS" pitchFamily="34" charset="-120"/>
-              </a:rPr>
-              <a:t>s</a:t>
-            </a:r>
-            <a:endParaRPr lang="en-US" sz="900" dirty="0"/>
           </a:p>
         </p:txBody>
       </p:sp>
@@ -30061,7 +29692,7 @@
                 <a:ea typeface="Calibri" pitchFamily="34" charset="-122"/>
                 <a:cs typeface="Calibri" pitchFamily="34" charset="-120"/>
               </a:rPr>
-              <a:t>Word Labs  •  wordlabs.app  •  Root: 'aero' = air, atmosphere, aircraft</a:t>
+              <a:t>Word Labs  •  wordlabs.app  •  Root: 'aero' = air or aircraft</a:t>
             </a:r>
             <a:endParaRPr lang="en-US" sz="800" dirty="0"/>
           </a:p>
@@ -30200,7 +29831,7 @@
                 <a:ea typeface="Trebuchet MS" pitchFamily="34" charset="-122"/>
                 <a:cs typeface="Trebuchet MS" pitchFamily="34" charset="-120"/>
               </a:rPr>
-              <a:t>aerodynamics</a:t>
+              <a:t>aeronautics</a:t>
             </a:r>
             <a:endParaRPr lang="en-US" sz="2800" dirty="0"/>
           </a:p>
@@ -30888,7 +30519,7 @@
                 <a:ea typeface="Calibri" pitchFamily="34" charset="-122"/>
                 <a:cs typeface="Calibri" pitchFamily="34" charset="-120"/>
               </a:rPr>
-              <a:t>Word Labs  •  wordlabs.app  •  Root: 'aero' = air, atmosphere, aircraft</a:t>
+              <a:t>Word Labs  •  wordlabs.app  •  Root: 'aero' = air or aircraft</a:t>
             </a:r>
             <a:endParaRPr lang="en-US" sz="800" dirty="0"/>
           </a:p>
@@ -31027,7 +30658,7 @@
                 <a:ea typeface="Trebuchet MS" pitchFamily="34" charset="-122"/>
                 <a:cs typeface="Trebuchet MS" pitchFamily="34" charset="-120"/>
               </a:rPr>
-              <a:t>aerodynamics</a:t>
+              <a:t>aeronautics</a:t>
             </a:r>
             <a:endParaRPr lang="en-US" sz="2800" dirty="0"/>
           </a:p>
@@ -31278,7 +30909,7 @@
                 <a:ea typeface="Trebuchet MS" pitchFamily="34" charset="-122"/>
                 <a:cs typeface="Trebuchet MS" pitchFamily="34" charset="-120"/>
               </a:rPr>
-              <a:t>dynam</a:t>
+              <a:t>naut</a:t>
             </a:r>
             <a:endParaRPr lang="en-US" sz="1300" dirty="0"/>
           </a:p>
@@ -31317,7 +30948,7 @@
                 <a:ea typeface="Calibri" pitchFamily="34" charset="-122"/>
                 <a:cs typeface="Calibri" pitchFamily="34" charset="-120"/>
               </a:rPr>
-              <a:t>power, force</a:t>
+              <a:t>sailor or navigator</a:t>
             </a:r>
             <a:endParaRPr lang="en-US" sz="850" dirty="0"/>
           </a:p>
@@ -31429,7 +31060,7 @@
                 <a:ea typeface="Calibri" pitchFamily="34" charset="-122"/>
                 <a:cs typeface="Calibri" pitchFamily="34" charset="-120"/>
               </a:rPr>
-              <a:t>study or practice of</a:t>
+              <a:t>science or study of</a:t>
             </a:r>
             <a:endParaRPr lang="en-US" sz="850" dirty="0"/>
           </a:p>
@@ -31985,7 +31616,7 @@
                 <a:ea typeface="Calibri" pitchFamily="34" charset="-122"/>
                 <a:cs typeface="Calibri" pitchFamily="34" charset="-120"/>
               </a:rPr>
-              <a:t>Word Labs  •  wordlabs.app  •  Root: 'aero' = air, atmosphere, aircraft</a:t>
+              <a:t>Word Labs  •  wordlabs.app  •  Root: 'aero' = air or aircraft</a:t>
             </a:r>
             <a:endParaRPr lang="en-US" sz="800" dirty="0"/>
           </a:p>
@@ -32124,7 +31755,7 @@
                 <a:ea typeface="Trebuchet MS" pitchFamily="34" charset="-122"/>
                 <a:cs typeface="Trebuchet MS" pitchFamily="34" charset="-120"/>
               </a:rPr>
-              <a:t>aerodynamics</a:t>
+              <a:t>aeronautics</a:t>
             </a:r>
             <a:endParaRPr lang="en-US" sz="2800" dirty="0"/>
           </a:p>
@@ -32375,7 +32006,7 @@
                 <a:ea typeface="Trebuchet MS" pitchFamily="34" charset="-122"/>
                 <a:cs typeface="Trebuchet MS" pitchFamily="34" charset="-120"/>
               </a:rPr>
-              <a:t>dynam</a:t>
+              <a:t>naut</a:t>
             </a:r>
             <a:endParaRPr lang="en-US" sz="1300" dirty="0"/>
           </a:p>
@@ -32414,7 +32045,7 @@
                 <a:ea typeface="Calibri" pitchFamily="34" charset="-122"/>
                 <a:cs typeface="Calibri" pitchFamily="34" charset="-120"/>
               </a:rPr>
-              <a:t>power, force</a:t>
+              <a:t>sailor or navigator</a:t>
             </a:r>
             <a:endParaRPr lang="en-US" sz="850" dirty="0"/>
           </a:p>
@@ -32526,7 +32157,7 @@
                 <a:ea typeface="Calibri" pitchFamily="34" charset="-122"/>
                 <a:cs typeface="Calibri" pitchFamily="34" charset="-120"/>
               </a:rPr>
-              <a:t>study or practice of</a:t>
+              <a:t>science or study of</a:t>
             </a:r>
             <a:endParaRPr lang="en-US" sz="850" dirty="0"/>
           </a:p>
@@ -32633,8 +32264,8 @@
         </p:nvSpPr>
         <p:spPr>
           <a:xfrm>
-            <a:off x="1978152" y="3364992"/>
-            <a:ext cx="1225296" cy="475488"/>
+            <a:off x="1975104" y="3364992"/>
+            <a:ext cx="1554480" cy="475488"/>
           </a:xfrm>
           <a:prstGeom prst="rect">
             <a:avLst>
@@ -32660,8 +32291,8 @@
         </p:nvSpPr>
         <p:spPr>
           <a:xfrm>
-            <a:off x="1978152" y="3364992"/>
-            <a:ext cx="1225296" cy="475488"/>
+            <a:off x="1975104" y="3364992"/>
+            <a:ext cx="1554480" cy="475488"/>
           </a:xfrm>
           <a:prstGeom prst="rect">
             <a:avLst/>
@@ -32685,7 +32316,7 @@
                 <a:ea typeface="Trebuchet MS" pitchFamily="34" charset="-122"/>
                 <a:cs typeface="Trebuchet MS" pitchFamily="34" charset="-120"/>
               </a:rPr>
-              <a:t>ae</a:t>
+              <a:t>aer</a:t>
             </a:r>
             <a:endParaRPr lang="en-US" sz="1400" dirty="0"/>
           </a:p>
@@ -32699,8 +32330,8 @@
         </p:nvSpPr>
         <p:spPr>
           <a:xfrm>
-            <a:off x="3203448" y="3364992"/>
-            <a:ext cx="76200" cy="475488"/>
+            <a:off x="3529584" y="3364992"/>
+            <a:ext cx="73152" cy="475488"/>
           </a:xfrm>
           <a:prstGeom prst="rect">
             <a:avLst/>
@@ -32738,8 +32369,8 @@
         </p:nvSpPr>
         <p:spPr>
           <a:xfrm>
-            <a:off x="3279648" y="3364992"/>
-            <a:ext cx="1225296" cy="475488"/>
+            <a:off x="3602736" y="3364992"/>
+            <a:ext cx="1554480" cy="475488"/>
           </a:xfrm>
           <a:prstGeom prst="rect">
             <a:avLst>
@@ -32765,8 +32396,8 @@
         </p:nvSpPr>
         <p:spPr>
           <a:xfrm>
-            <a:off x="3279648" y="3364992"/>
-            <a:ext cx="1225296" cy="475488"/>
+            <a:off x="3602736" y="3364992"/>
+            <a:ext cx="1554480" cy="475488"/>
           </a:xfrm>
           <a:prstGeom prst="rect">
             <a:avLst/>
@@ -32790,7 +32421,7 @@
                 <a:ea typeface="Trebuchet MS" pitchFamily="34" charset="-122"/>
                 <a:cs typeface="Trebuchet MS" pitchFamily="34" charset="-120"/>
               </a:rPr>
-              <a:t>ro</a:t>
+              <a:t>o</a:t>
             </a:r>
             <a:endParaRPr lang="en-US" sz="1400" dirty="0"/>
           </a:p>
@@ -32804,8 +32435,8 @@
         </p:nvSpPr>
         <p:spPr>
           <a:xfrm>
-            <a:off x="4504944" y="3364992"/>
-            <a:ext cx="76200" cy="475488"/>
+            <a:off x="5157216" y="3364992"/>
+            <a:ext cx="73152" cy="475488"/>
           </a:xfrm>
           <a:prstGeom prst="rect">
             <a:avLst/>
@@ -32843,8 +32474,8 @@
         </p:nvSpPr>
         <p:spPr>
           <a:xfrm>
-            <a:off x="4581144" y="3364992"/>
-            <a:ext cx="1225296" cy="475488"/>
+            <a:off x="5230368" y="3364992"/>
+            <a:ext cx="1554480" cy="475488"/>
           </a:xfrm>
           <a:prstGeom prst="rect">
             <a:avLst>
@@ -32870,8 +32501,8 @@
         </p:nvSpPr>
         <p:spPr>
           <a:xfrm>
-            <a:off x="4581144" y="3364992"/>
-            <a:ext cx="1225296" cy="475488"/>
+            <a:off x="5230368" y="3364992"/>
+            <a:ext cx="1554480" cy="475488"/>
           </a:xfrm>
           <a:prstGeom prst="rect">
             <a:avLst/>
@@ -32895,7 +32526,7 @@
                 <a:ea typeface="Trebuchet MS" pitchFamily="34" charset="-122"/>
                 <a:cs typeface="Trebuchet MS" pitchFamily="34" charset="-120"/>
               </a:rPr>
-              <a:t>dy</a:t>
+              <a:t>nau</a:t>
             </a:r>
             <a:endParaRPr lang="en-US" sz="1400" dirty="0"/>
           </a:p>
@@ -32909,8 +32540,8 @@
         </p:nvSpPr>
         <p:spPr>
           <a:xfrm>
-            <a:off x="5806440" y="3364992"/>
-            <a:ext cx="76200" cy="475488"/>
+            <a:off x="6784848" y="3364992"/>
+            <a:ext cx="73152" cy="475488"/>
           </a:xfrm>
           <a:prstGeom prst="rect">
             <a:avLst/>
@@ -32948,8 +32579,8 @@
         </p:nvSpPr>
         <p:spPr>
           <a:xfrm>
-            <a:off x="5882640" y="3364992"/>
-            <a:ext cx="1225296" cy="475488"/>
+            <a:off x="6858000" y="3364992"/>
+            <a:ext cx="1554480" cy="475488"/>
           </a:xfrm>
           <a:prstGeom prst="rect">
             <a:avLst>
@@ -32975,8 +32606,8 @@
         </p:nvSpPr>
         <p:spPr>
           <a:xfrm>
-            <a:off x="5882640" y="3364992"/>
-            <a:ext cx="1225296" cy="475488"/>
+            <a:off x="6858000" y="3364992"/>
+            <a:ext cx="1554480" cy="475488"/>
           </a:xfrm>
           <a:prstGeom prst="rect">
             <a:avLst/>
@@ -33000,7 +32631,7 @@
                 <a:ea typeface="Trebuchet MS" pitchFamily="34" charset="-122"/>
                 <a:cs typeface="Trebuchet MS" pitchFamily="34" charset="-120"/>
               </a:rPr>
-              <a:t>nam</a:t>
+              <a:t>tics</a:t>
             </a:r>
             <a:endParaRPr lang="en-US" sz="1400" dirty="0"/>
           </a:p>
@@ -33008,119 +32639,80 @@
       </p:sp>
       <p:sp>
         <p:nvSpPr>
-          <p:cNvPr id="39" name="Text 37"/>
-          <p:cNvSpPr/>
-          <p:nvPr/>
-        </p:nvSpPr>
-        <p:spPr>
-          <a:xfrm>
-            <a:off x="7107936" y="3364992"/>
-            <a:ext cx="76200" cy="475488"/>
-          </a:xfrm>
-          <a:prstGeom prst="rect">
-            <a:avLst/>
-          </a:prstGeom>
-          <a:noFill/>
-          <a:ln/>
-        </p:spPr>
-        <p:txBody>
-          <a:bodyPr wrap="square" lIns="0" tIns="0" rIns="0" bIns="0" rtlCol="0" anchor="ctr"/>
-          <a:lstStyle/>
-          <a:p>
-            <a:pPr algn="ctr" indent="0" marL="0">
-              <a:buNone/>
-            </a:pPr>
-            <a:r>
-              <a:rPr lang="en-US" sz="1600" b="1" dirty="0">
-                <a:solidFill>
-                  <a:srgbClr val="0D9488"/>
+          <p:cNvPr id="39" name="Shape 37"/>
+          <p:cNvSpPr/>
+          <p:nvPr/>
+        </p:nvSpPr>
+        <p:spPr>
+          <a:xfrm>
+            <a:off x="365760" y="4096512"/>
+            <a:ext cx="1371600" cy="804672"/>
+          </a:xfrm>
+          <a:prstGeom prst="rect">
+            <a:avLst>
+              <a:gd name="adj" fmla="val 6818"/>
+            </a:avLst>
+          </a:prstGeom>
+          <a:solidFill>
+            <a:srgbClr val="E2E8F0"/>
+          </a:solidFill>
+          <a:ln w="12700">
+            <a:solidFill>
+              <a:srgbClr val="E2E8F0"/>
+            </a:solidFill>
+            <a:prstDash val="solid"/>
+          </a:ln>
+        </p:spPr>
+      </p:sp>
+      <p:sp>
+        <p:nvSpPr>
+          <p:cNvPr id="40" name="Text 38"/>
+          <p:cNvSpPr/>
+          <p:nvPr/>
+        </p:nvSpPr>
+        <p:spPr>
+          <a:xfrm>
+            <a:off x="365760" y="4096512"/>
+            <a:ext cx="1371600" cy="804672"/>
+          </a:xfrm>
+          <a:prstGeom prst="rect">
+            <a:avLst/>
+          </a:prstGeom>
+          <a:noFill/>
+          <a:ln/>
+        </p:spPr>
+        <p:txBody>
+          <a:bodyPr wrap="square" lIns="0" tIns="0" rIns="0" bIns="0" rtlCol="0" anchor="ctr"/>
+          <a:lstStyle/>
+          <a:p>
+            <a:pPr algn="ctr" indent="0" marL="0">
+              <a:buNone/>
+            </a:pPr>
+            <a:r>
+              <a:rPr lang="en-US" sz="1100" b="1" dirty="0">
+                <a:solidFill>
+                  <a:srgbClr val="475569"/>
                 </a:solidFill>
                 <a:latin typeface="Trebuchet MS" pitchFamily="34" charset="0"/>
                 <a:ea typeface="Trebuchet MS" pitchFamily="34" charset="-122"/>
                 <a:cs typeface="Trebuchet MS" pitchFamily="34" charset="-120"/>
               </a:rPr>
-              <a:t>·</a:t>
-            </a:r>
-            <a:endParaRPr lang="en-US" sz="1600" dirty="0"/>
-          </a:p>
-        </p:txBody>
-      </p:sp>
-      <p:sp>
-        <p:nvSpPr>
-          <p:cNvPr id="40" name="Shape 38"/>
-          <p:cNvSpPr/>
-          <p:nvPr/>
-        </p:nvSpPr>
-        <p:spPr>
-          <a:xfrm>
-            <a:off x="7184136" y="3364992"/>
-            <a:ext cx="1225296" cy="475488"/>
-          </a:xfrm>
-          <a:prstGeom prst="rect">
-            <a:avLst>
-              <a:gd name="adj" fmla="val 9615"/>
-            </a:avLst>
-          </a:prstGeom>
-          <a:solidFill>
-            <a:srgbClr val="FFFFFF"/>
-          </a:solidFill>
-          <a:ln w="12700">
-            <a:solidFill>
-              <a:srgbClr val="0D9488"/>
-            </a:solidFill>
-            <a:prstDash val="solid"/>
-          </a:ln>
-        </p:spPr>
-      </p:sp>
-      <p:sp>
-        <p:nvSpPr>
-          <p:cNvPr id="41" name="Text 39"/>
-          <p:cNvSpPr/>
-          <p:nvPr/>
-        </p:nvSpPr>
-        <p:spPr>
-          <a:xfrm>
-            <a:off x="7184136" y="3364992"/>
-            <a:ext cx="1225296" cy="475488"/>
-          </a:xfrm>
-          <a:prstGeom prst="rect">
-            <a:avLst/>
-          </a:prstGeom>
-          <a:noFill/>
-          <a:ln/>
-        </p:spPr>
-        <p:txBody>
-          <a:bodyPr wrap="square" lIns="0" tIns="0" rIns="0" bIns="0" rtlCol="0" anchor="ctr"/>
-          <a:lstStyle/>
-          <a:p>
-            <a:pPr algn="ctr" indent="0" marL="0">
-              <a:buNone/>
-            </a:pPr>
-            <a:r>
-              <a:rPr lang="en-US" sz="1400" b="1" dirty="0">
-                <a:solidFill>
-                  <a:srgbClr val="0D9488"/>
-                </a:solidFill>
-                <a:latin typeface="Trebuchet MS" pitchFamily="34" charset="0"/>
-                <a:ea typeface="Trebuchet MS" pitchFamily="34" charset="-122"/>
-                <a:cs typeface="Trebuchet MS" pitchFamily="34" charset="-120"/>
-              </a:rPr>
-              <a:t>ics</a:t>
-            </a:r>
-            <a:endParaRPr lang="en-US" sz="1400" dirty="0"/>
-          </a:p>
-        </p:txBody>
-      </p:sp>
-      <p:sp>
-        <p:nvSpPr>
-          <p:cNvPr id="42" name="Shape 40"/>
-          <p:cNvSpPr/>
-          <p:nvPr/>
-        </p:nvSpPr>
-        <p:spPr>
-          <a:xfrm>
-            <a:off x="365760" y="4096512"/>
-            <a:ext cx="1371600" cy="804672"/>
+              <a:t>Phonemes</a:t>
+            </a:r>
+            <a:endParaRPr lang="en-US" sz="1100" dirty="0"/>
+          </a:p>
+        </p:txBody>
+      </p:sp>
+      <p:sp>
+        <p:nvSpPr>
+          <p:cNvPr id="41" name="Shape 39"/>
+          <p:cNvSpPr/>
+          <p:nvPr/>
+        </p:nvSpPr>
+        <p:spPr>
+          <a:xfrm>
+            <a:off x="1874520" y="4096512"/>
+            <a:ext cx="6903720" cy="804672"/>
           </a:xfrm>
           <a:prstGeom prst="rect">
             <a:avLst>
@@ -33128,85 +32720,19 @@
             </a:avLst>
           </a:prstGeom>
           <a:solidFill>
-            <a:srgbClr val="E2E8F0"/>
+            <a:srgbClr val="F8FAFC"/>
           </a:solidFill>
           <a:ln w="12700">
             <a:solidFill>
               <a:srgbClr val="E2E8F0"/>
             </a:solidFill>
-            <a:prstDash val="solid"/>
-          </a:ln>
-        </p:spPr>
-      </p:sp>
-      <p:sp>
-        <p:nvSpPr>
-          <p:cNvPr id="43" name="Text 41"/>
-          <p:cNvSpPr/>
-          <p:nvPr/>
-        </p:nvSpPr>
-        <p:spPr>
-          <a:xfrm>
-            <a:off x="365760" y="4096512"/>
-            <a:ext cx="1371600" cy="804672"/>
-          </a:xfrm>
-          <a:prstGeom prst="rect">
-            <a:avLst/>
-          </a:prstGeom>
-          <a:noFill/>
-          <a:ln/>
-        </p:spPr>
-        <p:txBody>
-          <a:bodyPr wrap="square" lIns="0" tIns="0" rIns="0" bIns="0" rtlCol="0" anchor="ctr"/>
-          <a:lstStyle/>
-          <a:p>
-            <a:pPr algn="ctr" indent="0" marL="0">
-              <a:buNone/>
-            </a:pPr>
-            <a:r>
-              <a:rPr lang="en-US" sz="1100" b="1" dirty="0">
-                <a:solidFill>
-                  <a:srgbClr val="475569"/>
-                </a:solidFill>
-                <a:latin typeface="Trebuchet MS" pitchFamily="34" charset="0"/>
-                <a:ea typeface="Trebuchet MS" pitchFamily="34" charset="-122"/>
-                <a:cs typeface="Trebuchet MS" pitchFamily="34" charset="-120"/>
-              </a:rPr>
-              <a:t>Phonemes</a:t>
-            </a:r>
-            <a:endParaRPr lang="en-US" sz="1100" dirty="0"/>
-          </a:p>
-        </p:txBody>
-      </p:sp>
-      <p:sp>
-        <p:nvSpPr>
-          <p:cNvPr id="44" name="Shape 42"/>
-          <p:cNvSpPr/>
-          <p:nvPr/>
-        </p:nvSpPr>
-        <p:spPr>
-          <a:xfrm>
-            <a:off x="1874520" y="4096512"/>
-            <a:ext cx="6903720" cy="804672"/>
-          </a:xfrm>
-          <a:prstGeom prst="rect">
-            <a:avLst>
-              <a:gd name="adj" fmla="val 6818"/>
-            </a:avLst>
-          </a:prstGeom>
-          <a:solidFill>
-            <a:srgbClr val="F8FAFC"/>
-          </a:solidFill>
-          <a:ln w="12700">
-            <a:solidFill>
-              <a:srgbClr val="E2E8F0"/>
-            </a:solidFill>
             <a:prstDash val="dash"/>
           </a:ln>
         </p:spPr>
       </p:sp>
       <p:sp>
         <p:nvSpPr>
-          <p:cNvPr id="45" name="Text 43"/>
+          <p:cNvPr id="42" name="Text 40"/>
           <p:cNvSpPr/>
           <p:nvPr/>
         </p:nvSpPr>
@@ -33529,7 +33055,7 @@
                 <a:ea typeface="Calibri" pitchFamily="34" charset="-122"/>
                 <a:cs typeface="Calibri" pitchFamily="34" charset="-120"/>
               </a:rPr>
-              <a:t>Word Labs  •  wordlabs.app  •  Root: 'aero' = air, atmosphere, aircraft</a:t>
+              <a:t>Word Labs  •  wordlabs.app  •  Root: 'aero' = air or aircraft</a:t>
             </a:r>
             <a:endParaRPr lang="en-US" sz="800" dirty="0"/>
           </a:p>
@@ -33668,7 +33194,7 @@
                 <a:ea typeface="Trebuchet MS" pitchFamily="34" charset="-122"/>
                 <a:cs typeface="Trebuchet MS" pitchFamily="34" charset="-120"/>
               </a:rPr>
-              <a:t>aerodynamics</a:t>
+              <a:t>aeronautics</a:t>
             </a:r>
             <a:endParaRPr lang="en-US" sz="2800" dirty="0"/>
           </a:p>
@@ -33919,7 +33445,7 @@
                 <a:ea typeface="Trebuchet MS" pitchFamily="34" charset="-122"/>
                 <a:cs typeface="Trebuchet MS" pitchFamily="34" charset="-120"/>
               </a:rPr>
-              <a:t>dynam</a:t>
+              <a:t>naut</a:t>
             </a:r>
             <a:endParaRPr lang="en-US" sz="1300" dirty="0"/>
           </a:p>
@@ -33958,7 +33484,7 @@
                 <a:ea typeface="Calibri" pitchFamily="34" charset="-122"/>
                 <a:cs typeface="Calibri" pitchFamily="34" charset="-120"/>
               </a:rPr>
-              <a:t>power, force</a:t>
+              <a:t>sailor or navigator</a:t>
             </a:r>
             <a:endParaRPr lang="en-US" sz="850" dirty="0"/>
           </a:p>
@@ -34070,7 +33596,7 @@
                 <a:ea typeface="Calibri" pitchFamily="34" charset="-122"/>
                 <a:cs typeface="Calibri" pitchFamily="34" charset="-120"/>
               </a:rPr>
-              <a:t>study or practice of</a:t>
+              <a:t>science or study of</a:t>
             </a:r>
             <a:endParaRPr lang="en-US" sz="850" dirty="0"/>
           </a:p>
@@ -34177,8 +33703,8 @@
         </p:nvSpPr>
         <p:spPr>
           <a:xfrm>
-            <a:off x="1978152" y="3364992"/>
-            <a:ext cx="1225296" cy="475488"/>
+            <a:off x="1975104" y="3364992"/>
+            <a:ext cx="1554480" cy="475488"/>
           </a:xfrm>
           <a:prstGeom prst="rect">
             <a:avLst>
@@ -34204,8 +33730,8 @@
         </p:nvSpPr>
         <p:spPr>
           <a:xfrm>
-            <a:off x="1978152" y="3364992"/>
-            <a:ext cx="1225296" cy="475488"/>
+            <a:off x="1975104" y="3364992"/>
+            <a:ext cx="1554480" cy="475488"/>
           </a:xfrm>
           <a:prstGeom prst="rect">
             <a:avLst/>
@@ -34229,7 +33755,7 @@
                 <a:ea typeface="Trebuchet MS" pitchFamily="34" charset="-122"/>
                 <a:cs typeface="Trebuchet MS" pitchFamily="34" charset="-120"/>
               </a:rPr>
-              <a:t>ae</a:t>
+              <a:t>aer</a:t>
             </a:r>
             <a:endParaRPr lang="en-US" sz="1400" dirty="0"/>
           </a:p>
@@ -34243,8 +33769,8 @@
         </p:nvSpPr>
         <p:spPr>
           <a:xfrm>
-            <a:off x="3203448" y="3364992"/>
-            <a:ext cx="76200" cy="475488"/>
+            <a:off x="3529584" y="3364992"/>
+            <a:ext cx="73152" cy="475488"/>
           </a:xfrm>
           <a:prstGeom prst="rect">
             <a:avLst/>
@@ -34282,8 +33808,8 @@
         </p:nvSpPr>
         <p:spPr>
           <a:xfrm>
-            <a:off x="3279648" y="3364992"/>
-            <a:ext cx="1225296" cy="475488"/>
+            <a:off x="3602736" y="3364992"/>
+            <a:ext cx="1554480" cy="475488"/>
           </a:xfrm>
           <a:prstGeom prst="rect">
             <a:avLst>
@@ -34309,8 +33835,8 @@
         </p:nvSpPr>
         <p:spPr>
           <a:xfrm>
-            <a:off x="3279648" y="3364992"/>
-            <a:ext cx="1225296" cy="475488"/>
+            <a:off x="3602736" y="3364992"/>
+            <a:ext cx="1554480" cy="475488"/>
           </a:xfrm>
           <a:prstGeom prst="rect">
             <a:avLst/>
@@ -34334,7 +33860,7 @@
                 <a:ea typeface="Trebuchet MS" pitchFamily="34" charset="-122"/>
                 <a:cs typeface="Trebuchet MS" pitchFamily="34" charset="-120"/>
               </a:rPr>
-              <a:t>ro</a:t>
+              <a:t>o</a:t>
             </a:r>
             <a:endParaRPr lang="en-US" sz="1400" dirty="0"/>
           </a:p>
@@ -34348,8 +33874,8 @@
         </p:nvSpPr>
         <p:spPr>
           <a:xfrm>
-            <a:off x="4504944" y="3364992"/>
-            <a:ext cx="76200" cy="475488"/>
+            <a:off x="5157216" y="3364992"/>
+            <a:ext cx="73152" cy="475488"/>
           </a:xfrm>
           <a:prstGeom prst="rect">
             <a:avLst/>
@@ -34387,8 +33913,8 @@
         </p:nvSpPr>
         <p:spPr>
           <a:xfrm>
-            <a:off x="4581144" y="3364992"/>
-            <a:ext cx="1225296" cy="475488"/>
+            <a:off x="5230368" y="3364992"/>
+            <a:ext cx="1554480" cy="475488"/>
           </a:xfrm>
           <a:prstGeom prst="rect">
             <a:avLst>
@@ -34414,8 +33940,8 @@
         </p:nvSpPr>
         <p:spPr>
           <a:xfrm>
-            <a:off x="4581144" y="3364992"/>
-            <a:ext cx="1225296" cy="475488"/>
+            <a:off x="5230368" y="3364992"/>
+            <a:ext cx="1554480" cy="475488"/>
           </a:xfrm>
           <a:prstGeom prst="rect">
             <a:avLst/>
@@ -34439,7 +33965,7 @@
                 <a:ea typeface="Trebuchet MS" pitchFamily="34" charset="-122"/>
                 <a:cs typeface="Trebuchet MS" pitchFamily="34" charset="-120"/>
               </a:rPr>
-              <a:t>dy</a:t>
+              <a:t>nau</a:t>
             </a:r>
             <a:endParaRPr lang="en-US" sz="1400" dirty="0"/>
           </a:p>
@@ -34453,8 +33979,8 @@
         </p:nvSpPr>
         <p:spPr>
           <a:xfrm>
-            <a:off x="5806440" y="3364992"/>
-            <a:ext cx="76200" cy="475488"/>
+            <a:off x="6784848" y="3364992"/>
+            <a:ext cx="73152" cy="475488"/>
           </a:xfrm>
           <a:prstGeom prst="rect">
             <a:avLst/>
@@ -34492,8 +34018,8 @@
         </p:nvSpPr>
         <p:spPr>
           <a:xfrm>
-            <a:off x="5882640" y="3364992"/>
-            <a:ext cx="1225296" cy="475488"/>
+            <a:off x="6858000" y="3364992"/>
+            <a:ext cx="1554480" cy="475488"/>
           </a:xfrm>
           <a:prstGeom prst="rect">
             <a:avLst>
@@ -34519,8 +34045,8 @@
         </p:nvSpPr>
         <p:spPr>
           <a:xfrm>
-            <a:off x="5882640" y="3364992"/>
-            <a:ext cx="1225296" cy="475488"/>
+            <a:off x="6858000" y="3364992"/>
+            <a:ext cx="1554480" cy="475488"/>
           </a:xfrm>
           <a:prstGeom prst="rect">
             <a:avLst/>
@@ -34544,7 +34070,7 @@
                 <a:ea typeface="Trebuchet MS" pitchFamily="34" charset="-122"/>
                 <a:cs typeface="Trebuchet MS" pitchFamily="34" charset="-120"/>
               </a:rPr>
-              <a:t>nam</a:t>
+              <a:t>tics</a:t>
             </a:r>
             <a:endParaRPr lang="en-US" sz="1400" dirty="0"/>
           </a:p>
@@ -34552,212 +34078,239 @@
       </p:sp>
       <p:sp>
         <p:nvSpPr>
-          <p:cNvPr id="39" name="Text 37"/>
-          <p:cNvSpPr/>
-          <p:nvPr/>
-        </p:nvSpPr>
-        <p:spPr>
-          <a:xfrm>
-            <a:off x="7107936" y="3364992"/>
-            <a:ext cx="76200" cy="475488"/>
-          </a:xfrm>
-          <a:prstGeom prst="rect">
-            <a:avLst/>
-          </a:prstGeom>
-          <a:noFill/>
-          <a:ln/>
-        </p:spPr>
-        <p:txBody>
-          <a:bodyPr wrap="square" lIns="0" tIns="0" rIns="0" bIns="0" rtlCol="0" anchor="ctr"/>
-          <a:lstStyle/>
-          <a:p>
-            <a:pPr algn="ctr" indent="0" marL="0">
-              <a:buNone/>
-            </a:pPr>
-            <a:r>
-              <a:rPr lang="en-US" sz="1600" b="1" dirty="0">
-                <a:solidFill>
-                  <a:srgbClr val="0D9488"/>
+          <p:cNvPr id="39" name="Shape 37"/>
+          <p:cNvSpPr/>
+          <p:nvPr/>
+        </p:nvSpPr>
+        <p:spPr>
+          <a:xfrm>
+            <a:off x="365760" y="4096512"/>
+            <a:ext cx="1371600" cy="804672"/>
+          </a:xfrm>
+          <a:prstGeom prst="rect">
+            <a:avLst>
+              <a:gd name="adj" fmla="val 6818"/>
+            </a:avLst>
+          </a:prstGeom>
+          <a:solidFill>
+            <a:srgbClr val="E2E8F0"/>
+          </a:solidFill>
+          <a:ln w="12700">
+            <a:solidFill>
+              <a:srgbClr val="E2E8F0"/>
+            </a:solidFill>
+            <a:prstDash val="solid"/>
+          </a:ln>
+        </p:spPr>
+      </p:sp>
+      <p:sp>
+        <p:nvSpPr>
+          <p:cNvPr id="40" name="Text 38"/>
+          <p:cNvSpPr/>
+          <p:nvPr/>
+        </p:nvSpPr>
+        <p:spPr>
+          <a:xfrm>
+            <a:off x="365760" y="4096512"/>
+            <a:ext cx="1371600" cy="804672"/>
+          </a:xfrm>
+          <a:prstGeom prst="rect">
+            <a:avLst/>
+          </a:prstGeom>
+          <a:noFill/>
+          <a:ln/>
+        </p:spPr>
+        <p:txBody>
+          <a:bodyPr wrap="square" lIns="0" tIns="0" rIns="0" bIns="0" rtlCol="0" anchor="ctr"/>
+          <a:lstStyle/>
+          <a:p>
+            <a:pPr algn="ctr" indent="0" marL="0">
+              <a:buNone/>
+            </a:pPr>
+            <a:r>
+              <a:rPr lang="en-US" sz="1100" b="1" dirty="0">
+                <a:solidFill>
+                  <a:srgbClr val="475569"/>
                 </a:solidFill>
                 <a:latin typeface="Trebuchet MS" pitchFamily="34" charset="0"/>
                 <a:ea typeface="Trebuchet MS" pitchFamily="34" charset="-122"/>
                 <a:cs typeface="Trebuchet MS" pitchFamily="34" charset="-120"/>
               </a:rPr>
-              <a:t>·</a:t>
-            </a:r>
-            <a:endParaRPr lang="en-US" sz="1600" dirty="0"/>
-          </a:p>
-        </p:txBody>
-      </p:sp>
-      <p:sp>
-        <p:nvSpPr>
-          <p:cNvPr id="40" name="Shape 38"/>
-          <p:cNvSpPr/>
-          <p:nvPr/>
-        </p:nvSpPr>
-        <p:spPr>
-          <a:xfrm>
-            <a:off x="7184136" y="3364992"/>
-            <a:ext cx="1225296" cy="475488"/>
+              <a:t>Phonemes</a:t>
+            </a:r>
+            <a:endParaRPr lang="en-US" sz="1100" dirty="0"/>
+          </a:p>
+        </p:txBody>
+      </p:sp>
+      <p:sp>
+        <p:nvSpPr>
+          <p:cNvPr id="41" name="Shape 39"/>
+          <p:cNvSpPr/>
+          <p:nvPr/>
+        </p:nvSpPr>
+        <p:spPr>
+          <a:xfrm>
+            <a:off x="1874520" y="4096512"/>
+            <a:ext cx="6903720" cy="804672"/>
           </a:xfrm>
           <a:prstGeom prst="rect">
             <a:avLst>
-              <a:gd name="adj" fmla="val 9615"/>
+              <a:gd name="adj" fmla="val 6818"/>
             </a:avLst>
           </a:prstGeom>
           <a:solidFill>
+            <a:srgbClr val="FCE7F3"/>
+          </a:solidFill>
+          <a:ln w="12700">
+            <a:solidFill>
+              <a:srgbClr val="DB2777"/>
+            </a:solidFill>
+            <a:prstDash val="solid"/>
+          </a:ln>
+        </p:spPr>
+      </p:sp>
+      <p:sp>
+        <p:nvSpPr>
+          <p:cNvPr id="42" name="Shape 40"/>
+          <p:cNvSpPr/>
+          <p:nvPr/>
+        </p:nvSpPr>
+        <p:spPr>
+          <a:xfrm>
+            <a:off x="1951330" y="4169664"/>
+            <a:ext cx="676656" cy="384048"/>
+          </a:xfrm>
+          <a:prstGeom prst="rect">
+            <a:avLst>
+              <a:gd name="adj" fmla="val 9524"/>
+            </a:avLst>
+          </a:prstGeom>
+          <a:solidFill>
             <a:srgbClr val="FFFFFF"/>
           </a:solidFill>
           <a:ln w="12700">
             <a:solidFill>
-              <a:srgbClr val="0D9488"/>
-            </a:solidFill>
-            <a:prstDash val="solid"/>
-          </a:ln>
-        </p:spPr>
-      </p:sp>
-      <p:sp>
-        <p:nvSpPr>
-          <p:cNvPr id="41" name="Text 39"/>
-          <p:cNvSpPr/>
-          <p:nvPr/>
-        </p:nvSpPr>
-        <p:spPr>
-          <a:xfrm>
-            <a:off x="7184136" y="3364992"/>
-            <a:ext cx="1225296" cy="475488"/>
-          </a:xfrm>
-          <a:prstGeom prst="rect">
-            <a:avLst/>
-          </a:prstGeom>
-          <a:noFill/>
-          <a:ln/>
-        </p:spPr>
-        <p:txBody>
-          <a:bodyPr wrap="square" lIns="0" tIns="0" rIns="0" bIns="0" rtlCol="0" anchor="ctr"/>
-          <a:lstStyle/>
-          <a:p>
-            <a:pPr algn="ctr" indent="0" marL="0">
-              <a:buNone/>
-            </a:pPr>
-            <a:r>
-              <a:rPr lang="en-US" sz="1400" b="1" dirty="0">
-                <a:solidFill>
-                  <a:srgbClr val="0D9488"/>
+              <a:srgbClr val="DB2777"/>
+            </a:solidFill>
+            <a:prstDash val="solid"/>
+          </a:ln>
+        </p:spPr>
+      </p:sp>
+      <p:sp>
+        <p:nvSpPr>
+          <p:cNvPr id="43" name="Text 41"/>
+          <p:cNvSpPr/>
+          <p:nvPr/>
+        </p:nvSpPr>
+        <p:spPr>
+          <a:xfrm>
+            <a:off x="1951330" y="4169664"/>
+            <a:ext cx="676656" cy="384048"/>
+          </a:xfrm>
+          <a:prstGeom prst="rect">
+            <a:avLst/>
+          </a:prstGeom>
+          <a:noFill/>
+          <a:ln/>
+        </p:spPr>
+        <p:txBody>
+          <a:bodyPr wrap="square" lIns="0" tIns="0" rIns="0" bIns="0" rtlCol="0" anchor="ctr"/>
+          <a:lstStyle/>
+          <a:p>
+            <a:pPr algn="ctr" indent="0" marL="0">
+              <a:buNone/>
+            </a:pPr>
+            <a:r>
+              <a:rPr lang="en-US" sz="900" b="1" dirty="0">
+                <a:solidFill>
+                  <a:srgbClr val="9D174D"/>
                 </a:solidFill>
                 <a:latin typeface="Trebuchet MS" pitchFamily="34" charset="0"/>
                 <a:ea typeface="Trebuchet MS" pitchFamily="34" charset="-122"/>
                 <a:cs typeface="Trebuchet MS" pitchFamily="34" charset="-120"/>
               </a:rPr>
-              <a:t>ics</a:t>
-            </a:r>
-            <a:endParaRPr lang="en-US" sz="1400" dirty="0"/>
-          </a:p>
-        </p:txBody>
-      </p:sp>
-      <p:sp>
-        <p:nvSpPr>
-          <p:cNvPr id="42" name="Shape 40"/>
-          <p:cNvSpPr/>
-          <p:nvPr/>
-        </p:nvSpPr>
-        <p:spPr>
-          <a:xfrm>
-            <a:off x="365760" y="4096512"/>
-            <a:ext cx="1371600" cy="804672"/>
+              <a:t>ae</a:t>
+            </a:r>
+            <a:endParaRPr lang="en-US" sz="900" dirty="0"/>
+          </a:p>
+        </p:txBody>
+      </p:sp>
+      <p:sp>
+        <p:nvSpPr>
+          <p:cNvPr id="44" name="Shape 42"/>
+          <p:cNvSpPr/>
+          <p:nvPr/>
+        </p:nvSpPr>
+        <p:spPr>
+          <a:xfrm>
+            <a:off x="2677363" y="4169664"/>
+            <a:ext cx="676656" cy="384048"/>
           </a:xfrm>
           <a:prstGeom prst="rect">
             <a:avLst>
-              <a:gd name="adj" fmla="val 6818"/>
+              <a:gd name="adj" fmla="val 9524"/>
             </a:avLst>
           </a:prstGeom>
           <a:solidFill>
-            <a:srgbClr val="E2E8F0"/>
-          </a:solidFill>
-          <a:ln w="12700">
-            <a:solidFill>
-              <a:srgbClr val="E2E8F0"/>
-            </a:solidFill>
-            <a:prstDash val="solid"/>
-          </a:ln>
-        </p:spPr>
-      </p:sp>
-      <p:sp>
-        <p:nvSpPr>
-          <p:cNvPr id="43" name="Text 41"/>
-          <p:cNvSpPr/>
-          <p:nvPr/>
-        </p:nvSpPr>
-        <p:spPr>
-          <a:xfrm>
-            <a:off x="365760" y="4096512"/>
-            <a:ext cx="1371600" cy="804672"/>
-          </a:xfrm>
-          <a:prstGeom prst="rect">
-            <a:avLst/>
-          </a:prstGeom>
-          <a:noFill/>
-          <a:ln/>
-        </p:spPr>
-        <p:txBody>
-          <a:bodyPr wrap="square" lIns="0" tIns="0" rIns="0" bIns="0" rtlCol="0" anchor="ctr"/>
-          <a:lstStyle/>
-          <a:p>
-            <a:pPr algn="ctr" indent="0" marL="0">
-              <a:buNone/>
-            </a:pPr>
-            <a:r>
-              <a:rPr lang="en-US" sz="1100" b="1" dirty="0">
-                <a:solidFill>
-                  <a:srgbClr val="475569"/>
+            <a:srgbClr val="FFFFFF"/>
+          </a:solidFill>
+          <a:ln w="12700">
+            <a:solidFill>
+              <a:srgbClr val="DB2777"/>
+            </a:solidFill>
+            <a:prstDash val="solid"/>
+          </a:ln>
+        </p:spPr>
+      </p:sp>
+      <p:sp>
+        <p:nvSpPr>
+          <p:cNvPr id="45" name="Text 43"/>
+          <p:cNvSpPr/>
+          <p:nvPr/>
+        </p:nvSpPr>
+        <p:spPr>
+          <a:xfrm>
+            <a:off x="2677363" y="4169664"/>
+            <a:ext cx="676656" cy="384048"/>
+          </a:xfrm>
+          <a:prstGeom prst="rect">
+            <a:avLst/>
+          </a:prstGeom>
+          <a:noFill/>
+          <a:ln/>
+        </p:spPr>
+        <p:txBody>
+          <a:bodyPr wrap="square" lIns="0" tIns="0" rIns="0" bIns="0" rtlCol="0" anchor="ctr"/>
+          <a:lstStyle/>
+          <a:p>
+            <a:pPr algn="ctr" indent="0" marL="0">
+              <a:buNone/>
+            </a:pPr>
+            <a:r>
+              <a:rPr lang="en-US" sz="900" b="1" dirty="0">
+                <a:solidFill>
+                  <a:srgbClr val="9D174D"/>
                 </a:solidFill>
                 <a:latin typeface="Trebuchet MS" pitchFamily="34" charset="0"/>
                 <a:ea typeface="Trebuchet MS" pitchFamily="34" charset="-122"/>
                 <a:cs typeface="Trebuchet MS" pitchFamily="34" charset="-120"/>
               </a:rPr>
-              <a:t>Phonemes</a:t>
-            </a:r>
-            <a:endParaRPr lang="en-US" sz="1100" dirty="0"/>
-          </a:p>
-        </p:txBody>
-      </p:sp>
-      <p:sp>
-        <p:nvSpPr>
-          <p:cNvPr id="44" name="Shape 42"/>
-          <p:cNvSpPr/>
-          <p:nvPr/>
-        </p:nvSpPr>
-        <p:spPr>
-          <a:xfrm>
-            <a:off x="1874520" y="4096512"/>
-            <a:ext cx="6903720" cy="804672"/>
-          </a:xfrm>
-          <a:prstGeom prst="rect">
-            <a:avLst>
-              <a:gd name="adj" fmla="val 6818"/>
-            </a:avLst>
-          </a:prstGeom>
-          <a:solidFill>
-            <a:srgbClr val="FCE7F3"/>
-          </a:solidFill>
-          <a:ln w="12700">
-            <a:solidFill>
-              <a:srgbClr val="DB2777"/>
-            </a:solidFill>
-            <a:prstDash val="solid"/>
-          </a:ln>
-        </p:spPr>
-      </p:sp>
-      <p:sp>
-        <p:nvSpPr>
-          <p:cNvPr id="45" name="Shape 43"/>
-          <p:cNvSpPr/>
-          <p:nvPr/>
-        </p:nvSpPr>
-        <p:spPr>
-          <a:xfrm>
-            <a:off x="1952244" y="4169664"/>
-            <a:ext cx="543652" cy="384048"/>
+              <a:t>r</a:t>
+            </a:r>
+            <a:endParaRPr lang="en-US" sz="900" dirty="0"/>
+          </a:p>
+        </p:txBody>
+      </p:sp>
+      <p:sp>
+        <p:nvSpPr>
+          <p:cNvPr id="46" name="Shape 44"/>
+          <p:cNvSpPr/>
+          <p:nvPr/>
+        </p:nvSpPr>
+        <p:spPr>
+          <a:xfrm>
+            <a:off x="3403397" y="4169664"/>
+            <a:ext cx="676656" cy="384048"/>
           </a:xfrm>
           <a:prstGeom prst="rect">
             <a:avLst>
@@ -34777,14 +34330,14 @@
       </p:sp>
       <p:sp>
         <p:nvSpPr>
-          <p:cNvPr id="46" name="Text 44"/>
-          <p:cNvSpPr/>
-          <p:nvPr/>
-        </p:nvSpPr>
-        <p:spPr>
-          <a:xfrm>
-            <a:off x="1952244" y="4169664"/>
-            <a:ext cx="543652" cy="384048"/>
+          <p:cNvPr id="47" name="Text 45"/>
+          <p:cNvSpPr/>
+          <p:nvPr/>
+        </p:nvSpPr>
+        <p:spPr>
+          <a:xfrm>
+            <a:off x="3403397" y="4169664"/>
+            <a:ext cx="676656" cy="384048"/>
           </a:xfrm>
           <a:prstGeom prst="rect">
             <a:avLst/>
@@ -34808,7 +34361,7 @@
                 <a:ea typeface="Trebuchet MS" pitchFamily="34" charset="-122"/>
                 <a:cs typeface="Trebuchet MS" pitchFamily="34" charset="-120"/>
               </a:rPr>
-              <a:t>ae</a:t>
+              <a:t>o</a:t>
             </a:r>
             <a:endParaRPr lang="en-US" sz="900" dirty="0"/>
           </a:p>
@@ -34816,14 +34369,14 @@
       </p:sp>
       <p:sp>
         <p:nvSpPr>
-          <p:cNvPr id="47" name="Shape 45"/>
-          <p:cNvSpPr/>
-          <p:nvPr/>
-        </p:nvSpPr>
-        <p:spPr>
-          <a:xfrm>
-            <a:off x="2546188" y="4169664"/>
-            <a:ext cx="543652" cy="384048"/>
+          <p:cNvPr id="48" name="Shape 46"/>
+          <p:cNvSpPr/>
+          <p:nvPr/>
+        </p:nvSpPr>
+        <p:spPr>
+          <a:xfrm>
+            <a:off x="4129430" y="4169664"/>
+            <a:ext cx="676656" cy="384048"/>
           </a:xfrm>
           <a:prstGeom prst="rect">
             <a:avLst>
@@ -34843,14 +34396,14 @@
       </p:sp>
       <p:sp>
         <p:nvSpPr>
-          <p:cNvPr id="48" name="Text 46"/>
-          <p:cNvSpPr/>
-          <p:nvPr/>
-        </p:nvSpPr>
-        <p:spPr>
-          <a:xfrm>
-            <a:off x="2546188" y="4169664"/>
-            <a:ext cx="543652" cy="384048"/>
+          <p:cNvPr id="49" name="Text 47"/>
+          <p:cNvSpPr/>
+          <p:nvPr/>
+        </p:nvSpPr>
+        <p:spPr>
+          <a:xfrm>
+            <a:off x="4129430" y="4169664"/>
+            <a:ext cx="676656" cy="384048"/>
           </a:xfrm>
           <a:prstGeom prst="rect">
             <a:avLst/>
@@ -34874,7 +34427,7 @@
                 <a:ea typeface="Trebuchet MS" pitchFamily="34" charset="-122"/>
                 <a:cs typeface="Trebuchet MS" pitchFamily="34" charset="-120"/>
               </a:rPr>
-              <a:t>r</a:t>
+              <a:t>n</a:t>
             </a:r>
             <a:endParaRPr lang="en-US" sz="900" dirty="0"/>
           </a:p>
@@ -34882,14 +34435,14 @@
       </p:sp>
       <p:sp>
         <p:nvSpPr>
-          <p:cNvPr id="49" name="Shape 47"/>
-          <p:cNvSpPr/>
-          <p:nvPr/>
-        </p:nvSpPr>
-        <p:spPr>
-          <a:xfrm>
-            <a:off x="3140133" y="4169664"/>
-            <a:ext cx="543652" cy="384048"/>
+          <p:cNvPr id="50" name="Shape 48"/>
+          <p:cNvSpPr/>
+          <p:nvPr/>
+        </p:nvSpPr>
+        <p:spPr>
+          <a:xfrm>
+            <a:off x="4855464" y="4169664"/>
+            <a:ext cx="676656" cy="384048"/>
           </a:xfrm>
           <a:prstGeom prst="rect">
             <a:avLst>
@@ -34909,14 +34462,14 @@
       </p:sp>
       <p:sp>
         <p:nvSpPr>
-          <p:cNvPr id="50" name="Text 48"/>
-          <p:cNvSpPr/>
-          <p:nvPr/>
-        </p:nvSpPr>
-        <p:spPr>
-          <a:xfrm>
-            <a:off x="3140133" y="4169664"/>
-            <a:ext cx="543652" cy="384048"/>
+          <p:cNvPr id="51" name="Text 49"/>
+          <p:cNvSpPr/>
+          <p:nvPr/>
+        </p:nvSpPr>
+        <p:spPr>
+          <a:xfrm>
+            <a:off x="4855464" y="4169664"/>
+            <a:ext cx="676656" cy="384048"/>
           </a:xfrm>
           <a:prstGeom prst="rect">
             <a:avLst/>
@@ -34940,7 +34493,7 @@
                 <a:ea typeface="Trebuchet MS" pitchFamily="34" charset="-122"/>
                 <a:cs typeface="Trebuchet MS" pitchFamily="34" charset="-120"/>
               </a:rPr>
-              <a:t>o</a:t>
+              <a:t>au</a:t>
             </a:r>
             <a:endParaRPr lang="en-US" sz="900" dirty="0"/>
           </a:p>
@@ -34948,14 +34501,14 @@
       </p:sp>
       <p:sp>
         <p:nvSpPr>
-          <p:cNvPr id="51" name="Shape 49"/>
-          <p:cNvSpPr/>
-          <p:nvPr/>
-        </p:nvSpPr>
-        <p:spPr>
-          <a:xfrm>
-            <a:off x="3734077" y="4169664"/>
-            <a:ext cx="543652" cy="384048"/>
+          <p:cNvPr id="52" name="Shape 50"/>
+          <p:cNvSpPr/>
+          <p:nvPr/>
+        </p:nvSpPr>
+        <p:spPr>
+          <a:xfrm>
+            <a:off x="5581498" y="4169664"/>
+            <a:ext cx="676656" cy="384048"/>
           </a:xfrm>
           <a:prstGeom prst="rect">
             <a:avLst>
@@ -34975,14 +34528,14 @@
       </p:sp>
       <p:sp>
         <p:nvSpPr>
-          <p:cNvPr id="52" name="Text 50"/>
-          <p:cNvSpPr/>
-          <p:nvPr/>
-        </p:nvSpPr>
-        <p:spPr>
-          <a:xfrm>
-            <a:off x="3734077" y="4169664"/>
-            <a:ext cx="543652" cy="384048"/>
+          <p:cNvPr id="53" name="Text 51"/>
+          <p:cNvSpPr/>
+          <p:nvPr/>
+        </p:nvSpPr>
+        <p:spPr>
+          <a:xfrm>
+            <a:off x="5581498" y="4169664"/>
+            <a:ext cx="676656" cy="384048"/>
           </a:xfrm>
           <a:prstGeom prst="rect">
             <a:avLst/>
@@ -35006,7 +34559,7 @@
                 <a:ea typeface="Trebuchet MS" pitchFamily="34" charset="-122"/>
                 <a:cs typeface="Trebuchet MS" pitchFamily="34" charset="-120"/>
               </a:rPr>
-              <a:t>d</a:t>
+              <a:t>t</a:t>
             </a:r>
             <a:endParaRPr lang="en-US" sz="900" dirty="0"/>
           </a:p>
@@ -35014,14 +34567,14 @@
       </p:sp>
       <p:sp>
         <p:nvSpPr>
-          <p:cNvPr id="53" name="Shape 51"/>
-          <p:cNvSpPr/>
-          <p:nvPr/>
-        </p:nvSpPr>
-        <p:spPr>
-          <a:xfrm>
-            <a:off x="4328021" y="4169664"/>
-            <a:ext cx="543652" cy="384048"/>
+          <p:cNvPr id="54" name="Shape 52"/>
+          <p:cNvSpPr/>
+          <p:nvPr/>
+        </p:nvSpPr>
+        <p:spPr>
+          <a:xfrm>
+            <a:off x="6307531" y="4169664"/>
+            <a:ext cx="676656" cy="384048"/>
           </a:xfrm>
           <a:prstGeom prst="rect">
             <a:avLst>
@@ -35041,14 +34594,14 @@
       </p:sp>
       <p:sp>
         <p:nvSpPr>
-          <p:cNvPr id="54" name="Text 52"/>
-          <p:cNvSpPr/>
-          <p:nvPr/>
-        </p:nvSpPr>
-        <p:spPr>
-          <a:xfrm>
-            <a:off x="4328021" y="4169664"/>
-            <a:ext cx="543652" cy="384048"/>
+          <p:cNvPr id="55" name="Text 53"/>
+          <p:cNvSpPr/>
+          <p:nvPr/>
+        </p:nvSpPr>
+        <p:spPr>
+          <a:xfrm>
+            <a:off x="6307531" y="4169664"/>
+            <a:ext cx="676656" cy="384048"/>
           </a:xfrm>
           <a:prstGeom prst="rect">
             <a:avLst/>
@@ -35072,7 +34625,7 @@
                 <a:ea typeface="Trebuchet MS" pitchFamily="34" charset="-122"/>
                 <a:cs typeface="Trebuchet MS" pitchFamily="34" charset="-120"/>
               </a:rPr>
-              <a:t>y</a:t>
+              <a:t>i</a:t>
             </a:r>
             <a:endParaRPr lang="en-US" sz="900" dirty="0"/>
           </a:p>
@@ -35080,14 +34633,14 @@
       </p:sp>
       <p:sp>
         <p:nvSpPr>
-          <p:cNvPr id="55" name="Shape 53"/>
-          <p:cNvSpPr/>
-          <p:nvPr/>
-        </p:nvSpPr>
-        <p:spPr>
-          <a:xfrm>
-            <a:off x="4921966" y="4169664"/>
-            <a:ext cx="543652" cy="384048"/>
+          <p:cNvPr id="56" name="Shape 54"/>
+          <p:cNvSpPr/>
+          <p:nvPr/>
+        </p:nvSpPr>
+        <p:spPr>
+          <a:xfrm>
+            <a:off x="7033565" y="4169664"/>
+            <a:ext cx="676656" cy="384048"/>
           </a:xfrm>
           <a:prstGeom prst="rect">
             <a:avLst>
@@ -35107,14 +34660,14 @@
       </p:sp>
       <p:sp>
         <p:nvSpPr>
-          <p:cNvPr id="56" name="Text 54"/>
-          <p:cNvSpPr/>
-          <p:nvPr/>
-        </p:nvSpPr>
-        <p:spPr>
-          <a:xfrm>
-            <a:off x="4921966" y="4169664"/>
-            <a:ext cx="543652" cy="384048"/>
+          <p:cNvPr id="57" name="Text 55"/>
+          <p:cNvSpPr/>
+          <p:nvPr/>
+        </p:nvSpPr>
+        <p:spPr>
+          <a:xfrm>
+            <a:off x="7033565" y="4169664"/>
+            <a:ext cx="676656" cy="384048"/>
           </a:xfrm>
           <a:prstGeom prst="rect">
             <a:avLst/>
@@ -35138,7 +34691,7 @@
                 <a:ea typeface="Trebuchet MS" pitchFamily="34" charset="-122"/>
                 <a:cs typeface="Trebuchet MS" pitchFamily="34" charset="-120"/>
               </a:rPr>
-              <a:t>n</a:t>
+              <a:t>c</a:t>
             </a:r>
             <a:endParaRPr lang="en-US" sz="900" dirty="0"/>
           </a:p>
@@ -35146,14 +34699,53 @@
       </p:sp>
       <p:sp>
         <p:nvSpPr>
-          <p:cNvPr id="57" name="Shape 55"/>
-          <p:cNvSpPr/>
-          <p:nvPr/>
-        </p:nvSpPr>
-        <p:spPr>
-          <a:xfrm>
-            <a:off x="5515910" y="4169664"/>
-            <a:ext cx="543652" cy="384048"/>
+          <p:cNvPr id="58" name="Text 56"/>
+          <p:cNvSpPr/>
+          <p:nvPr/>
+        </p:nvSpPr>
+        <p:spPr>
+          <a:xfrm>
+            <a:off x="7033565" y="4572000"/>
+            <a:ext cx="676656" cy="219456"/>
+          </a:xfrm>
+          <a:prstGeom prst="rect">
+            <a:avLst/>
+          </a:prstGeom>
+          <a:noFill/>
+          <a:ln/>
+        </p:spPr>
+        <p:txBody>
+          <a:bodyPr wrap="square" lIns="0" tIns="0" rIns="0" bIns="0" rtlCol="0" anchor="t"/>
+          <a:lstStyle/>
+          <a:p>
+            <a:pPr algn="ctr" indent="0" marL="0">
+              <a:buNone/>
+            </a:pPr>
+            <a:r>
+              <a:rPr lang="en-US" sz="750" i="1" dirty="0">
+                <a:solidFill>
+                  <a:srgbClr val="94A3B8"/>
+                </a:solidFill>
+                <a:latin typeface="Calibri" pitchFamily="34" charset="0"/>
+                <a:ea typeface="Calibri" pitchFamily="34" charset="-122"/>
+                <a:cs typeface="Calibri" pitchFamily="34" charset="-120"/>
+              </a:rPr>
+              <a:t>/k/</a:t>
+            </a:r>
+            <a:endParaRPr lang="en-US" sz="750" dirty="0"/>
+          </a:p>
+        </p:txBody>
+      </p:sp>
+      <p:sp>
+        <p:nvSpPr>
+          <p:cNvPr id="59" name="Shape 57"/>
+          <p:cNvSpPr/>
+          <p:nvPr/>
+        </p:nvSpPr>
+        <p:spPr>
+          <a:xfrm>
+            <a:off x="7759598" y="4169664"/>
+            <a:ext cx="676656" cy="384048"/>
           </a:xfrm>
           <a:prstGeom prst="rect">
             <a:avLst>
@@ -35173,317 +34765,14 @@
       </p:sp>
       <p:sp>
         <p:nvSpPr>
-          <p:cNvPr id="58" name="Text 56"/>
-          <p:cNvSpPr/>
-          <p:nvPr/>
-        </p:nvSpPr>
-        <p:spPr>
-          <a:xfrm>
-            <a:off x="5515910" y="4169664"/>
-            <a:ext cx="543652" cy="384048"/>
-          </a:xfrm>
-          <a:prstGeom prst="rect">
-            <a:avLst/>
-          </a:prstGeom>
-          <a:noFill/>
-          <a:ln/>
-        </p:spPr>
-        <p:txBody>
-          <a:bodyPr wrap="square" lIns="0" tIns="0" rIns="0" bIns="0" rtlCol="0" anchor="ctr"/>
-          <a:lstStyle/>
-          <a:p>
-            <a:pPr algn="ctr" indent="0" marL="0">
-              <a:buNone/>
-            </a:pPr>
-            <a:r>
-              <a:rPr lang="en-US" sz="900" b="1" dirty="0">
-                <a:solidFill>
-                  <a:srgbClr val="9D174D"/>
-                </a:solidFill>
-                <a:latin typeface="Trebuchet MS" pitchFamily="34" charset="0"/>
-                <a:ea typeface="Trebuchet MS" pitchFamily="34" charset="-122"/>
-                <a:cs typeface="Trebuchet MS" pitchFamily="34" charset="-120"/>
-              </a:rPr>
-              <a:t>a</a:t>
-            </a:r>
-            <a:endParaRPr lang="en-US" sz="900" dirty="0"/>
-          </a:p>
-        </p:txBody>
-      </p:sp>
-      <p:sp>
-        <p:nvSpPr>
-          <p:cNvPr id="59" name="Shape 57"/>
-          <p:cNvSpPr/>
-          <p:nvPr/>
-        </p:nvSpPr>
-        <p:spPr>
-          <a:xfrm>
-            <a:off x="6109855" y="4169664"/>
-            <a:ext cx="543652" cy="384048"/>
-          </a:xfrm>
-          <a:prstGeom prst="rect">
-            <a:avLst>
-              <a:gd name="adj" fmla="val 9524"/>
-            </a:avLst>
-          </a:prstGeom>
-          <a:solidFill>
-            <a:srgbClr val="FFFFFF"/>
-          </a:solidFill>
-          <a:ln w="12700">
-            <a:solidFill>
-              <a:srgbClr val="DB2777"/>
-            </a:solidFill>
-            <a:prstDash val="solid"/>
-          </a:ln>
-        </p:spPr>
-      </p:sp>
-      <p:sp>
-        <p:nvSpPr>
           <p:cNvPr id="60" name="Text 58"/>
           <p:cNvSpPr/>
           <p:nvPr/>
         </p:nvSpPr>
         <p:spPr>
           <a:xfrm>
-            <a:off x="6109855" y="4169664"/>
-            <a:ext cx="543652" cy="384048"/>
-          </a:xfrm>
-          <a:prstGeom prst="rect">
-            <a:avLst/>
-          </a:prstGeom>
-          <a:noFill/>
-          <a:ln/>
-        </p:spPr>
-        <p:txBody>
-          <a:bodyPr wrap="square" lIns="0" tIns="0" rIns="0" bIns="0" rtlCol="0" anchor="ctr"/>
-          <a:lstStyle/>
-          <a:p>
-            <a:pPr algn="ctr" indent="0" marL="0">
-              <a:buNone/>
-            </a:pPr>
-            <a:r>
-              <a:rPr lang="en-US" sz="900" b="1" dirty="0">
-                <a:solidFill>
-                  <a:srgbClr val="9D174D"/>
-                </a:solidFill>
-                <a:latin typeface="Trebuchet MS" pitchFamily="34" charset="0"/>
-                <a:ea typeface="Trebuchet MS" pitchFamily="34" charset="-122"/>
-                <a:cs typeface="Trebuchet MS" pitchFamily="34" charset="-120"/>
-              </a:rPr>
-              <a:t>m</a:t>
-            </a:r>
-            <a:endParaRPr lang="en-US" sz="900" dirty="0"/>
-          </a:p>
-        </p:txBody>
-      </p:sp>
-      <p:sp>
-        <p:nvSpPr>
-          <p:cNvPr id="61" name="Shape 59"/>
-          <p:cNvSpPr/>
-          <p:nvPr/>
-        </p:nvSpPr>
-        <p:spPr>
-          <a:xfrm>
-            <a:off x="6703799" y="4169664"/>
-            <a:ext cx="543652" cy="384048"/>
-          </a:xfrm>
-          <a:prstGeom prst="rect">
-            <a:avLst>
-              <a:gd name="adj" fmla="val 9524"/>
-            </a:avLst>
-          </a:prstGeom>
-          <a:solidFill>
-            <a:srgbClr val="FFFFFF"/>
-          </a:solidFill>
-          <a:ln w="12700">
-            <a:solidFill>
-              <a:srgbClr val="DB2777"/>
-            </a:solidFill>
-            <a:prstDash val="solid"/>
-          </a:ln>
-        </p:spPr>
-      </p:sp>
-      <p:sp>
-        <p:nvSpPr>
-          <p:cNvPr id="62" name="Text 60"/>
-          <p:cNvSpPr/>
-          <p:nvPr/>
-        </p:nvSpPr>
-        <p:spPr>
-          <a:xfrm>
-            <a:off x="6703799" y="4169664"/>
-            <a:ext cx="543652" cy="384048"/>
-          </a:xfrm>
-          <a:prstGeom prst="rect">
-            <a:avLst/>
-          </a:prstGeom>
-          <a:noFill/>
-          <a:ln/>
-        </p:spPr>
-        <p:txBody>
-          <a:bodyPr wrap="square" lIns="0" tIns="0" rIns="0" bIns="0" rtlCol="0" anchor="ctr"/>
-          <a:lstStyle/>
-          <a:p>
-            <a:pPr algn="ctr" indent="0" marL="0">
-              <a:buNone/>
-            </a:pPr>
-            <a:r>
-              <a:rPr lang="en-US" sz="900" b="1" dirty="0">
-                <a:solidFill>
-                  <a:srgbClr val="9D174D"/>
-                </a:solidFill>
-                <a:latin typeface="Trebuchet MS" pitchFamily="34" charset="0"/>
-                <a:ea typeface="Trebuchet MS" pitchFamily="34" charset="-122"/>
-                <a:cs typeface="Trebuchet MS" pitchFamily="34" charset="-120"/>
-              </a:rPr>
-              <a:t>i</a:t>
-            </a:r>
-            <a:endParaRPr lang="en-US" sz="900" dirty="0"/>
-          </a:p>
-        </p:txBody>
-      </p:sp>
-      <p:sp>
-        <p:nvSpPr>
-          <p:cNvPr id="63" name="Shape 61"/>
-          <p:cNvSpPr/>
-          <p:nvPr/>
-        </p:nvSpPr>
-        <p:spPr>
-          <a:xfrm>
-            <a:off x="7297743" y="4169664"/>
-            <a:ext cx="543652" cy="384048"/>
-          </a:xfrm>
-          <a:prstGeom prst="rect">
-            <a:avLst>
-              <a:gd name="adj" fmla="val 9524"/>
-            </a:avLst>
-          </a:prstGeom>
-          <a:solidFill>
-            <a:srgbClr val="FFFFFF"/>
-          </a:solidFill>
-          <a:ln w="12700">
-            <a:solidFill>
-              <a:srgbClr val="DB2777"/>
-            </a:solidFill>
-            <a:prstDash val="solid"/>
-          </a:ln>
-        </p:spPr>
-      </p:sp>
-      <p:sp>
-        <p:nvSpPr>
-          <p:cNvPr id="64" name="Text 62"/>
-          <p:cNvSpPr/>
-          <p:nvPr/>
-        </p:nvSpPr>
-        <p:spPr>
-          <a:xfrm>
-            <a:off x="7297743" y="4169664"/>
-            <a:ext cx="543652" cy="384048"/>
-          </a:xfrm>
-          <a:prstGeom prst="rect">
-            <a:avLst/>
-          </a:prstGeom>
-          <a:noFill/>
-          <a:ln/>
-        </p:spPr>
-        <p:txBody>
-          <a:bodyPr wrap="square" lIns="0" tIns="0" rIns="0" bIns="0" rtlCol="0" anchor="ctr"/>
-          <a:lstStyle/>
-          <a:p>
-            <a:pPr algn="ctr" indent="0" marL="0">
-              <a:buNone/>
-            </a:pPr>
-            <a:r>
-              <a:rPr lang="en-US" sz="900" b="1" dirty="0">
-                <a:solidFill>
-                  <a:srgbClr val="9D174D"/>
-                </a:solidFill>
-                <a:latin typeface="Trebuchet MS" pitchFamily="34" charset="0"/>
-                <a:ea typeface="Trebuchet MS" pitchFamily="34" charset="-122"/>
-                <a:cs typeface="Trebuchet MS" pitchFamily="34" charset="-120"/>
-              </a:rPr>
-              <a:t>c</a:t>
-            </a:r>
-            <a:endParaRPr lang="en-US" sz="900" dirty="0"/>
-          </a:p>
-        </p:txBody>
-      </p:sp>
-      <p:sp>
-        <p:nvSpPr>
-          <p:cNvPr id="65" name="Text 63"/>
-          <p:cNvSpPr/>
-          <p:nvPr/>
-        </p:nvSpPr>
-        <p:spPr>
-          <a:xfrm>
-            <a:off x="7297743" y="4572000"/>
-            <a:ext cx="543652" cy="219456"/>
-          </a:xfrm>
-          <a:prstGeom prst="rect">
-            <a:avLst/>
-          </a:prstGeom>
-          <a:noFill/>
-          <a:ln/>
-        </p:spPr>
-        <p:txBody>
-          <a:bodyPr wrap="square" lIns="0" tIns="0" rIns="0" bIns="0" rtlCol="0" anchor="t"/>
-          <a:lstStyle/>
-          <a:p>
-            <a:pPr algn="ctr" indent="0" marL="0">
-              <a:buNone/>
-            </a:pPr>
-            <a:r>
-              <a:rPr lang="en-US" sz="750" i="1" dirty="0">
-                <a:solidFill>
-                  <a:srgbClr val="94A3B8"/>
-                </a:solidFill>
-                <a:latin typeface="Calibri" pitchFamily="34" charset="0"/>
-                <a:ea typeface="Calibri" pitchFamily="34" charset="-122"/>
-                <a:cs typeface="Calibri" pitchFamily="34" charset="-120"/>
-              </a:rPr>
-              <a:t>/k/</a:t>
-            </a:r>
-            <a:endParaRPr lang="en-US" sz="750" dirty="0"/>
-          </a:p>
-        </p:txBody>
-      </p:sp>
-      <p:sp>
-        <p:nvSpPr>
-          <p:cNvPr id="66" name="Shape 64"/>
-          <p:cNvSpPr/>
-          <p:nvPr/>
-        </p:nvSpPr>
-        <p:spPr>
-          <a:xfrm>
-            <a:off x="7891688" y="4169664"/>
-            <a:ext cx="543652" cy="384048"/>
-          </a:xfrm>
-          <a:prstGeom prst="rect">
-            <a:avLst>
-              <a:gd name="adj" fmla="val 9524"/>
-            </a:avLst>
-          </a:prstGeom>
-          <a:solidFill>
-            <a:srgbClr val="FFFFFF"/>
-          </a:solidFill>
-          <a:ln w="12700">
-            <a:solidFill>
-              <a:srgbClr val="DB2777"/>
-            </a:solidFill>
-            <a:prstDash val="solid"/>
-          </a:ln>
-        </p:spPr>
-      </p:sp>
-      <p:sp>
-        <p:nvSpPr>
-          <p:cNvPr id="67" name="Text 65"/>
-          <p:cNvSpPr/>
-          <p:nvPr/>
-        </p:nvSpPr>
-        <p:spPr>
-          <a:xfrm>
-            <a:off x="7891688" y="4169664"/>
-            <a:ext cx="543652" cy="384048"/>
+            <a:off x="7759598" y="4169664"/>
+            <a:ext cx="676656" cy="384048"/>
           </a:xfrm>
           <a:prstGeom prst="rect">
             <a:avLst/>
@@ -35799,7 +35088,7 @@
                 <a:ea typeface="Calibri" pitchFamily="34" charset="-122"/>
                 <a:cs typeface="Calibri" pitchFamily="34" charset="-120"/>
               </a:rPr>
-              <a:t>Word Labs  •  wordlabs.app  •  Root: 'aero' = air, atmosphere, aircraft</a:t>
+              <a:t>Word Labs  •  wordlabs.app  •  Root: 'aero' = air or aircraft</a:t>
             </a:r>
             <a:endParaRPr lang="en-US" sz="800" dirty="0"/>
           </a:p>
@@ -36968,7 +36257,7 @@
                 <a:ea typeface="Calibri" pitchFamily="34" charset="-122"/>
                 <a:cs typeface="Calibri" pitchFamily="34" charset="-120"/>
               </a:rPr>
-              <a:t>Word Labs  •  wordlabs.app  •  Root: 'aero' = air, atmosphere, aircraft</a:t>
+              <a:t>Word Labs  •  wordlabs.app  •  Root: 'aero' = air or aircraft</a:t>
             </a:r>
             <a:endParaRPr lang="en-US" sz="800" dirty="0"/>
           </a:p>
@@ -37269,7 +36558,7 @@
                 <a:ea typeface="Trebuchet MS" pitchFamily="34" charset="-122"/>
                 <a:cs typeface="Trebuchet MS" pitchFamily="34" charset="-120"/>
               </a:rPr>
-              <a:t>an-</a:t>
+              <a:t>hydr-</a:t>
             </a:r>
             <a:endParaRPr lang="en-US" sz="1300" dirty="0"/>
           </a:p>
@@ -37397,7 +36686,7 @@
                 <a:ea typeface="Trebuchet MS" pitchFamily="34" charset="-122"/>
                 <a:cs typeface="Trebuchet MS" pitchFamily="34" charset="-120"/>
               </a:rPr>
-              <a:t>-plane</a:t>
+              <a:t>-bics</a:t>
             </a:r>
             <a:endParaRPr lang="en-US" sz="1300" dirty="0"/>
           </a:p>
@@ -37461,7 +36750,7 @@
                 <a:ea typeface="Trebuchet MS" pitchFamily="34" charset="-122"/>
                 <a:cs typeface="Trebuchet MS" pitchFamily="34" charset="-120"/>
               </a:rPr>
-              <a:t>sub-</a:t>
+              <a:t>micro-</a:t>
             </a:r>
             <a:endParaRPr lang="en-US" sz="1300" dirty="0"/>
           </a:p>
@@ -37550,7 +36839,7 @@
                 <a:ea typeface="Trebuchet MS" pitchFamily="34" charset="-122"/>
                 <a:cs typeface="Trebuchet MS" pitchFamily="34" charset="-120"/>
               </a:rPr>
-              <a:t>-bics</a:t>
+              <a:t>-plane</a:t>
             </a:r>
             <a:endParaRPr lang="en-US" sz="1300" dirty="0"/>
           </a:p>
@@ -37614,7 +36903,7 @@
                 <a:ea typeface="Trebuchet MS" pitchFamily="34" charset="-122"/>
                 <a:cs typeface="Trebuchet MS" pitchFamily="34" charset="-120"/>
               </a:rPr>
-              <a:t>un-</a:t>
+              <a:t>photo-</a:t>
             </a:r>
             <a:endParaRPr lang="en-US" sz="1300" dirty="0"/>
           </a:p>
@@ -37703,7 +36992,7 @@
                 <a:ea typeface="Trebuchet MS" pitchFamily="34" charset="-122"/>
                 <a:cs typeface="Trebuchet MS" pitchFamily="34" charset="-120"/>
               </a:rPr>
-              <a:t>-sol</a:t>
+              <a:t>-nautics</a:t>
             </a:r>
             <a:endParaRPr lang="en-US" sz="1300" dirty="0"/>
           </a:p>
@@ -37767,7 +37056,7 @@
                 <a:ea typeface="Trebuchet MS" pitchFamily="34" charset="-122"/>
                 <a:cs typeface="Trebuchet MS" pitchFamily="34" charset="-120"/>
               </a:rPr>
-              <a:t>re-</a:t>
+              <a:t>thermo-</a:t>
             </a:r>
             <a:endParaRPr lang="en-US" sz="1300" dirty="0"/>
           </a:p>
@@ -37856,7 +37145,7 @@
                 <a:ea typeface="Trebuchet MS" pitchFamily="34" charset="-122"/>
                 <a:cs typeface="Trebuchet MS" pitchFamily="34" charset="-120"/>
               </a:rPr>
-              <a:t>-nautics</a:t>
+              <a:t>-sol</a:t>
             </a:r>
             <a:endParaRPr lang="en-US" sz="1300" dirty="0"/>
           </a:p>
@@ -37920,7 +37209,7 @@
                 <a:ea typeface="Trebuchet MS" pitchFamily="34" charset="-122"/>
                 <a:cs typeface="Trebuchet MS" pitchFamily="34" charset="-120"/>
               </a:rPr>
-              <a:t>micro-</a:t>
+              <a:t>electro-</a:t>
             </a:r>
             <a:endParaRPr lang="en-US" sz="1300" dirty="0"/>
           </a:p>
@@ -38114,7 +37403,7 @@
                 <a:ea typeface="Trebuchet MS" pitchFamily="34" charset="-122"/>
                 <a:cs typeface="Trebuchet MS" pitchFamily="34" charset="-120"/>
               </a:rPr>
-              <a:t>aeroplane</a:t>
+              <a:t>aerobics</a:t>
             </a:r>
             <a:endParaRPr lang="en-US" sz="1200" dirty="0"/>
           </a:p>
@@ -38180,7 +37469,7 @@
                 <a:ea typeface="Trebuchet MS" pitchFamily="34" charset="-122"/>
                 <a:cs typeface="Trebuchet MS" pitchFamily="34" charset="-120"/>
               </a:rPr>
-              <a:t>aerobics</a:t>
+              <a:t>aeroplane</a:t>
             </a:r>
             <a:endParaRPr lang="en-US" sz="1200" dirty="0"/>
           </a:p>
@@ -38246,7 +37535,7 @@
                 <a:ea typeface="Trebuchet MS" pitchFamily="34" charset="-122"/>
                 <a:cs typeface="Trebuchet MS" pitchFamily="34" charset="-120"/>
               </a:rPr>
-              <a:t>aerosol</a:t>
+              <a:t>aeronautics</a:t>
             </a:r>
             <a:endParaRPr lang="en-US" sz="1200" dirty="0"/>
           </a:p>
@@ -38312,7 +37601,7 @@
                 <a:ea typeface="Trebuchet MS" pitchFamily="34" charset="-122"/>
                 <a:cs typeface="Trebuchet MS" pitchFamily="34" charset="-120"/>
               </a:rPr>
-              <a:t>aeronautics</a:t>
+              <a:t>aerosol</a:t>
             </a:r>
             <a:endParaRPr lang="en-US" sz="1200" dirty="0"/>
           </a:p>
@@ -38444,7 +37733,7 @@
                 <a:ea typeface="Trebuchet MS" pitchFamily="34" charset="-122"/>
                 <a:cs typeface="Trebuchet MS" pitchFamily="34" charset="-120"/>
               </a:rPr>
-              <a:t>aerofoil</a:t>
+              <a:t>aerospace</a:t>
             </a:r>
             <a:endParaRPr lang="en-US" sz="1200" dirty="0"/>
           </a:p>
@@ -38510,7 +37799,7 @@
                 <a:ea typeface="Trebuchet MS" pitchFamily="34" charset="-122"/>
                 <a:cs typeface="Trebuchet MS" pitchFamily="34" charset="-120"/>
               </a:rPr>
-              <a:t>aerodrome</a:t>
+              <a:t>aerofoil</a:t>
             </a:r>
             <a:endParaRPr lang="en-US" sz="1200" dirty="0"/>
           </a:p>
@@ -38576,7 +37865,7 @@
                 <a:ea typeface="Trebuchet MS" pitchFamily="34" charset="-122"/>
                 <a:cs typeface="Trebuchet MS" pitchFamily="34" charset="-120"/>
               </a:rPr>
-              <a:t>aerospace</a:t>
+              <a:t>aerodrome</a:t>
             </a:r>
             <a:endParaRPr lang="en-US" sz="1200" dirty="0"/>
           </a:p>
@@ -38868,7 +38157,7 @@
                 <a:ea typeface="Calibri" pitchFamily="34" charset="-122"/>
                 <a:cs typeface="Calibri" pitchFamily="34" charset="-120"/>
               </a:rPr>
-              <a:t>Word Labs  •  wordlabs.app  •  Root: 'aero' = air, atmosphere, aircraft</a:t>
+              <a:t>Word Labs  •  wordlabs.app  •  Root: 'aero' = air or aircraft</a:t>
             </a:r>
             <a:endParaRPr lang="en-US" sz="800" dirty="0"/>
           </a:p>
@@ -39032,7 +38321,7 @@
                 <a:ea typeface="Calibri" pitchFamily="34" charset="-122"/>
                 <a:cs typeface="Calibri" pitchFamily="34" charset="-120"/>
               </a:rPr>
-              <a:t>The core part of a word carrying its basic meaning. For example, 'aero' means 'air, atmosphere, aircraft'.</a:t>
+              <a:t>The core part of a word carrying its basic meaning. For example, 'aero' means 'air or aircraft'.</a:t>
             </a:r>
             <a:endParaRPr lang="en-US" sz="1350" dirty="0"/>
           </a:p>
@@ -39652,7 +38941,7 @@
                 <a:ea typeface="Calibri" pitchFamily="34" charset="-122"/>
                 <a:cs typeface="Calibri" pitchFamily="34" charset="-120"/>
               </a:rPr>
-              <a:t>Word Labs  •  wordlabs.app  •  Root: 'aero' = air, atmosphere, aircraft</a:t>
+              <a:t>Word Labs  •  wordlabs.app  •  Root: 'aero' = air or aircraft</a:t>
             </a:r>
             <a:endParaRPr lang="en-US" sz="800" dirty="0"/>
           </a:p>
@@ -39764,7 +39053,7 @@
                 <a:ea typeface="Calibri" pitchFamily="34" charset="-122"/>
                 <a:cs typeface="Calibri" pitchFamily="34" charset="-120"/>
               </a:rPr>
-              <a:t>1.  The morpheme 'aero' comes from the Greek word for air.</a:t>
+              <a:t>1.  The morpheme 'aero' means water.</a:t>
             </a:r>
             <a:endParaRPr lang="en-US" sz="1300" dirty="0"/>
           </a:p>
@@ -39787,11 +39076,11 @@
             </a:avLst>
           </a:prstGeom>
           <a:solidFill>
-            <a:srgbClr val="DCFCE7"/>
-          </a:solidFill>
-          <a:ln w="12700">
-            <a:solidFill>
-              <a:srgbClr val="16A34A"/>
+            <a:srgbClr val="FEE2E2"/>
+          </a:solidFill>
+          <a:ln w="12700">
+            <a:solidFill>
+              <a:srgbClr val="DC2626"/>
             </a:solidFill>
             <a:prstDash val="solid"/>
           </a:ln>
@@ -39824,13 +39113,13 @@
             <a:r>
               <a:rPr lang="en-US" sz="1100" b="1" dirty="0">
                 <a:solidFill>
-                  <a:srgbClr val="16A34A"/>
+                  <a:srgbClr val="DC2626"/>
                 </a:solidFill>
                 <a:latin typeface="Trebuchet MS" pitchFamily="34" charset="0"/>
                 <a:ea typeface="Trebuchet MS" pitchFamily="34" charset="-122"/>
                 <a:cs typeface="Trebuchet MS" pitchFamily="34" charset="-120"/>
               </a:rPr>
-              <a:t>TRUE</a:t>
+              <a:t>FALSE</a:t>
             </a:r>
             <a:endParaRPr lang="en-US" sz="1100" dirty="0"/>
           </a:p>
@@ -39903,7 +39192,7 @@
                 <a:ea typeface="Calibri" pitchFamily="34" charset="-122"/>
                 <a:cs typeface="Calibri" pitchFamily="34" charset="-120"/>
               </a:rPr>
-              <a:t>2.  An aerodrome is a large ocean vessel used for transport.</a:t>
+              <a:t>2.  'Aero' can be found in words related to flying and aircraft.</a:t>
             </a:r>
             <a:endParaRPr lang="en-US" sz="1300" dirty="0"/>
           </a:p>
@@ -39926,11 +39215,11 @@
             </a:avLst>
           </a:prstGeom>
           <a:solidFill>
-            <a:srgbClr val="FEE2E2"/>
-          </a:solidFill>
-          <a:ln w="12700">
-            <a:solidFill>
-              <a:srgbClr val="DC2626"/>
+            <a:srgbClr val="DCFCE7"/>
+          </a:solidFill>
+          <a:ln w="12700">
+            <a:solidFill>
+              <a:srgbClr val="16A34A"/>
             </a:solidFill>
             <a:prstDash val="solid"/>
           </a:ln>
@@ -39963,13 +39252,13 @@
             <a:r>
               <a:rPr lang="en-US" sz="1100" b="1" dirty="0">
                 <a:solidFill>
-                  <a:srgbClr val="DC2626"/>
+                  <a:srgbClr val="16A34A"/>
                 </a:solidFill>
                 <a:latin typeface="Trebuchet MS" pitchFamily="34" charset="0"/>
                 <a:ea typeface="Trebuchet MS" pitchFamily="34" charset="-122"/>
                 <a:cs typeface="Trebuchet MS" pitchFamily="34" charset="-120"/>
               </a:rPr>
-              <a:t>FALSE</a:t>
+              <a:t>TRUE</a:t>
             </a:r>
             <a:endParaRPr lang="en-US" sz="1100" dirty="0"/>
           </a:p>
@@ -40042,7 +39331,7 @@
                 <a:ea typeface="Calibri" pitchFamily="34" charset="-122"/>
                 <a:cs typeface="Calibri" pitchFamily="34" charset="-120"/>
               </a:rPr>
-              <a:t>3.  Aerodynamic shapes are designed to move through air with less resistance.</a:t>
+              <a:t>3.  The morpheme 'aero' comes from a Greek word meaning air.</a:t>
             </a:r>
             <a:endParaRPr lang="en-US" sz="1300" dirty="0"/>
           </a:p>
@@ -40181,7 +39470,7 @@
                 <a:ea typeface="Calibri" pitchFamily="34" charset="-122"/>
                 <a:cs typeface="Calibri" pitchFamily="34" charset="-120"/>
               </a:rPr>
-              <a:t>4.  The word 'aeronautics' relates to the science of flight and aircraft.</a:t>
+              <a:t>4.  An aerodynamic shape helps objects move through air more easily.</a:t>
             </a:r>
             <a:endParaRPr lang="en-US" sz="1300" dirty="0"/>
           </a:p>
@@ -40320,7 +39609,7 @@
                 <a:ea typeface="Calibri" pitchFamily="34" charset="-122"/>
                 <a:cs typeface="Calibri" pitchFamily="34" charset="-120"/>
               </a:rPr>
-              <a:t>5.  The morpheme 'aero' means water or liquid.</a:t>
+              <a:t>5.  The word 'aerobics' has nothing to do with air or breathing.</a:t>
             </a:r>
             <a:endParaRPr lang="en-US" sz="1300" dirty="0"/>
           </a:p>
@@ -40678,7 +39967,7 @@
                 <a:ea typeface="Calibri" pitchFamily="34" charset="-122"/>
                 <a:cs typeface="Calibri" pitchFamily="34" charset="-120"/>
               </a:rPr>
-              <a:t>Word Labs  •  wordlabs.app  •  Root: 'aero' = air, atmosphere, aircraft</a:t>
+              <a:t>Word Labs  •  wordlabs.app  •  Root: 'aero' = air or aircraft</a:t>
             </a:r>
             <a:endParaRPr lang="en-US" sz="800" dirty="0"/>
           </a:p>
@@ -40815,7 +40104,7 @@
                 <a:ea typeface="Trebuchet MS" pitchFamily="34" charset="-122"/>
                 <a:cs typeface="Trebuchet MS" pitchFamily="34" charset="-120"/>
               </a:rPr>
-              <a:t>air, atmosphere, aircraft</a:t>
+              <a:t>air or aircraft</a:t>
             </a:r>
             <a:endParaRPr lang="en-US" sz="2000" dirty="0"/>
           </a:p>
@@ -40959,7 +40248,7 @@
                 <a:ea typeface="Trebuchet MS" pitchFamily="34" charset="-122"/>
                 <a:cs typeface="Trebuchet MS" pitchFamily="34" charset="-120"/>
               </a:rPr>
-              <a:t>aeroplane</a:t>
+              <a:t>aerobics</a:t>
             </a:r>
             <a:endParaRPr lang="en-US" sz="1300" dirty="0"/>
           </a:p>
@@ -41025,7 +40314,7 @@
                 <a:ea typeface="Trebuchet MS" pitchFamily="34" charset="-122"/>
                 <a:cs typeface="Trebuchet MS" pitchFamily="34" charset="-120"/>
               </a:rPr>
-              <a:t>aerobics</a:t>
+              <a:t>aeroplane</a:t>
             </a:r>
             <a:endParaRPr lang="en-US" sz="1300" dirty="0"/>
           </a:p>
@@ -41091,7 +40380,7 @@
                 <a:ea typeface="Trebuchet MS" pitchFamily="34" charset="-122"/>
                 <a:cs typeface="Trebuchet MS" pitchFamily="34" charset="-120"/>
               </a:rPr>
-              <a:t>aerosol</a:t>
+              <a:t>aeronautics</a:t>
             </a:r>
             <a:endParaRPr lang="en-US" sz="1300" dirty="0"/>
           </a:p>
@@ -41157,7 +40446,7 @@
                 <a:ea typeface="Trebuchet MS" pitchFamily="34" charset="-122"/>
                 <a:cs typeface="Trebuchet MS" pitchFamily="34" charset="-120"/>
               </a:rPr>
-              <a:t>aeronautics</a:t>
+              <a:t>aerosol</a:t>
             </a:r>
             <a:endParaRPr lang="en-US" sz="1300" dirty="0"/>
           </a:p>
@@ -41289,7 +40578,7 @@
                 <a:ea typeface="Trebuchet MS" pitchFamily="34" charset="-122"/>
                 <a:cs typeface="Trebuchet MS" pitchFamily="34" charset="-120"/>
               </a:rPr>
-              <a:t>aerofoil</a:t>
+              <a:t>aerospace</a:t>
             </a:r>
             <a:endParaRPr lang="en-US" sz="1300" dirty="0"/>
           </a:p>
@@ -41355,7 +40644,7 @@
                 <a:ea typeface="Trebuchet MS" pitchFamily="34" charset="-122"/>
                 <a:cs typeface="Trebuchet MS" pitchFamily="34" charset="-120"/>
               </a:rPr>
-              <a:t>aerodrome</a:t>
+              <a:t>aerofoil</a:t>
             </a:r>
             <a:endParaRPr lang="en-US" sz="1300" dirty="0"/>
           </a:p>
@@ -41647,7 +40936,7 @@
                 <a:ea typeface="Calibri" pitchFamily="34" charset="-122"/>
                 <a:cs typeface="Calibri" pitchFamily="34" charset="-120"/>
               </a:rPr>
-              <a:t>Word Labs  •  wordlabs.app  •  Root: 'aero' = air, atmosphere, aircraft</a:t>
+              <a:t>Word Labs  •  wordlabs.app  •  Root: 'aero' = air or aircraft</a:t>
             </a:r>
             <a:endParaRPr lang="en-US" sz="800" dirty="0"/>
           </a:p>
@@ -41948,7 +41237,7 @@
                 <a:ea typeface="Trebuchet MS" pitchFamily="34" charset="-122"/>
                 <a:cs typeface="Trebuchet MS" pitchFamily="34" charset="-120"/>
               </a:rPr>
-              <a:t>an-</a:t>
+              <a:t>hydr-</a:t>
             </a:r>
             <a:endParaRPr lang="en-US" sz="1300" dirty="0"/>
           </a:p>
@@ -42076,7 +41365,7 @@
                 <a:ea typeface="Trebuchet MS" pitchFamily="34" charset="-122"/>
                 <a:cs typeface="Trebuchet MS" pitchFamily="34" charset="-120"/>
               </a:rPr>
-              <a:t>-plane</a:t>
+              <a:t>-bics</a:t>
             </a:r>
             <a:endParaRPr lang="en-US" sz="1300" dirty="0"/>
           </a:p>
@@ -42140,7 +41429,7 @@
                 <a:ea typeface="Trebuchet MS" pitchFamily="34" charset="-122"/>
                 <a:cs typeface="Trebuchet MS" pitchFamily="34" charset="-120"/>
               </a:rPr>
-              <a:t>sub-</a:t>
+              <a:t>micro-</a:t>
             </a:r>
             <a:endParaRPr lang="en-US" sz="1300" dirty="0"/>
           </a:p>
@@ -42229,7 +41518,7 @@
                 <a:ea typeface="Trebuchet MS" pitchFamily="34" charset="-122"/>
                 <a:cs typeface="Trebuchet MS" pitchFamily="34" charset="-120"/>
               </a:rPr>
-              <a:t>-bics</a:t>
+              <a:t>-plane</a:t>
             </a:r>
             <a:endParaRPr lang="en-US" sz="1300" dirty="0"/>
           </a:p>
@@ -42293,7 +41582,7 @@
                 <a:ea typeface="Trebuchet MS" pitchFamily="34" charset="-122"/>
                 <a:cs typeface="Trebuchet MS" pitchFamily="34" charset="-120"/>
               </a:rPr>
-              <a:t>un-</a:t>
+              <a:t>photo-</a:t>
             </a:r>
             <a:endParaRPr lang="en-US" sz="1300" dirty="0"/>
           </a:p>
@@ -42382,7 +41671,7 @@
                 <a:ea typeface="Trebuchet MS" pitchFamily="34" charset="-122"/>
                 <a:cs typeface="Trebuchet MS" pitchFamily="34" charset="-120"/>
               </a:rPr>
-              <a:t>-sol</a:t>
+              <a:t>-nautics</a:t>
             </a:r>
             <a:endParaRPr lang="en-US" sz="1300" dirty="0"/>
           </a:p>
@@ -42446,7 +41735,7 @@
                 <a:ea typeface="Trebuchet MS" pitchFamily="34" charset="-122"/>
                 <a:cs typeface="Trebuchet MS" pitchFamily="34" charset="-120"/>
               </a:rPr>
-              <a:t>re-</a:t>
+              <a:t>thermo-</a:t>
             </a:r>
             <a:endParaRPr lang="en-US" sz="1300" dirty="0"/>
           </a:p>
@@ -42535,7 +41824,7 @@
                 <a:ea typeface="Trebuchet MS" pitchFamily="34" charset="-122"/>
                 <a:cs typeface="Trebuchet MS" pitchFamily="34" charset="-120"/>
               </a:rPr>
-              <a:t>-nautics</a:t>
+              <a:t>-sol</a:t>
             </a:r>
             <a:endParaRPr lang="en-US" sz="1300" dirty="0"/>
           </a:p>
@@ -42599,7 +41888,7 @@
                 <a:ea typeface="Trebuchet MS" pitchFamily="34" charset="-122"/>
                 <a:cs typeface="Trebuchet MS" pitchFamily="34" charset="-120"/>
               </a:rPr>
-              <a:t>micro-</a:t>
+              <a:t>electro-</a:t>
             </a:r>
             <a:endParaRPr lang="en-US" sz="1300" dirty="0"/>
           </a:p>
@@ -42742,7 +42031,7 @@
         <p:spPr>
           <a:xfrm>
             <a:off x="1508760" y="4178808"/>
-            <a:ext cx="822960" cy="420624"/>
+            <a:ext cx="1097280" cy="420624"/>
           </a:xfrm>
           <a:prstGeom prst="rect">
             <a:avLst>
@@ -42776,7 +42065,7 @@
         <p:spPr>
           <a:xfrm>
             <a:off x="1508760" y="4178808"/>
-            <a:ext cx="822960" cy="420624"/>
+            <a:ext cx="1097280" cy="420624"/>
           </a:xfrm>
           <a:prstGeom prst="rect">
             <a:avLst/>
@@ -42800,7 +42089,7 @@
                 <a:ea typeface="Trebuchet MS" pitchFamily="34" charset="-122"/>
                 <a:cs typeface="Trebuchet MS" pitchFamily="34" charset="-120"/>
               </a:rPr>
-              <a:t>an-</a:t>
+              <a:t>hydr-</a:t>
             </a:r>
             <a:endParaRPr lang="en-US" sz="1300" dirty="0"/>
           </a:p>
@@ -42814,7 +42103,7 @@
         </p:nvSpPr>
         <p:spPr>
           <a:xfrm>
-            <a:off x="2359152" y="4178808"/>
+            <a:off x="2633472" y="4178808"/>
             <a:ext cx="320040" cy="420624"/>
           </a:xfrm>
           <a:prstGeom prst="rect">
@@ -42853,7 +42142,7 @@
         </p:nvSpPr>
         <p:spPr>
           <a:xfrm>
-            <a:off x="2706624" y="4178808"/>
+            <a:off x="2980944" y="4178808"/>
             <a:ext cx="1243584" cy="420624"/>
           </a:xfrm>
           <a:prstGeom prst="rect">
@@ -42887,7 +42176,7 @@
         </p:nvSpPr>
         <p:spPr>
           <a:xfrm>
-            <a:off x="2706624" y="4178808"/>
+            <a:off x="2980944" y="4178808"/>
             <a:ext cx="1243584" cy="420624"/>
           </a:xfrm>
           <a:prstGeom prst="rect">
@@ -42926,7 +42215,7 @@
         </p:nvSpPr>
         <p:spPr>
           <a:xfrm>
-            <a:off x="3977640" y="4178808"/>
+            <a:off x="4251960" y="4178808"/>
             <a:ext cx="320040" cy="420624"/>
           </a:xfrm>
           <a:prstGeom prst="rect">
@@ -42965,8 +42254,8 @@
         </p:nvSpPr>
         <p:spPr>
           <a:xfrm>
-            <a:off x="4325112" y="4178808"/>
-            <a:ext cx="1243584" cy="420624"/>
+            <a:off x="4599432" y="4178808"/>
+            <a:ext cx="1097280" cy="420624"/>
           </a:xfrm>
           <a:prstGeom prst="rect">
             <a:avLst>
@@ -42999,8 +42288,8 @@
         </p:nvSpPr>
         <p:spPr>
           <a:xfrm>
-            <a:off x="4325112" y="4178808"/>
-            <a:ext cx="1243584" cy="420624"/>
+            <a:off x="4599432" y="4178808"/>
+            <a:ext cx="1097280" cy="420624"/>
           </a:xfrm>
           <a:prstGeom prst="rect">
             <a:avLst/>
@@ -43024,7 +42313,7 @@
                 <a:ea typeface="Trebuchet MS" pitchFamily="34" charset="-122"/>
                 <a:cs typeface="Trebuchet MS" pitchFamily="34" charset="-120"/>
               </a:rPr>
-              <a:t>-plane</a:t>
+              <a:t>-bics</a:t>
             </a:r>
             <a:endParaRPr lang="en-US" sz="1300" dirty="0"/>
           </a:p>
@@ -43038,7 +42327,7 @@
         </p:nvSpPr>
         <p:spPr>
           <a:xfrm>
-            <a:off x="5641848" y="4178808"/>
+            <a:off x="5769864" y="4178808"/>
             <a:ext cx="365760" cy="420624"/>
           </a:xfrm>
           <a:prstGeom prst="rect">
@@ -43077,7 +42366,7 @@
         </p:nvSpPr>
         <p:spPr>
           <a:xfrm>
-            <a:off x="6053328" y="4178808"/>
+            <a:off x="6181344" y="4178808"/>
             <a:ext cx="2194560" cy="420624"/>
           </a:xfrm>
           <a:prstGeom prst="rect">
@@ -43104,7 +42393,7 @@
         </p:nvSpPr>
         <p:spPr>
           <a:xfrm>
-            <a:off x="6053328" y="4178808"/>
+            <a:off x="6181344" y="4178808"/>
             <a:ext cx="2194560" cy="420624"/>
           </a:xfrm>
           <a:prstGeom prst="rect">
@@ -43129,7 +42418,7 @@
                 <a:ea typeface="Trebuchet MS" pitchFamily="34" charset="-122"/>
                 <a:cs typeface="Trebuchet MS" pitchFamily="34" charset="-120"/>
               </a:rPr>
-              <a:t>aeroplane</a:t>
+              <a:t>aerobics</a:t>
             </a:r>
             <a:endParaRPr lang="en-US" sz="1400" dirty="0"/>
           </a:p>
@@ -43421,7 +42710,7 @@
                 <a:ea typeface="Calibri" pitchFamily="34" charset="-122"/>
                 <a:cs typeface="Calibri" pitchFamily="34" charset="-120"/>
               </a:rPr>
-              <a:t>Word Labs  •  wordlabs.app  •  Root: 'aero' = air, atmosphere, aircraft</a:t>
+              <a:t>Word Labs  •  wordlabs.app  •  Root: 'aero' = air or aircraft</a:t>
             </a:r>
             <a:endParaRPr lang="en-US" sz="800" dirty="0"/>
           </a:p>
@@ -43533,7 +42822,7 @@
                 <a:ea typeface="Trebuchet MS" pitchFamily="34" charset="-122"/>
                 <a:cs typeface="Trebuchet MS" pitchFamily="34" charset="-120"/>
               </a:rPr>
-              <a:t>aeroplane</a:t>
+              <a:t>aerobics</a:t>
             </a:r>
             <a:endParaRPr lang="en-US" sz="1200" dirty="0"/>
           </a:p>
@@ -43599,7 +42888,7 @@
                 <a:ea typeface="Calibri" pitchFamily="34" charset="-122"/>
                 <a:cs typeface="Calibri" pitchFamily="34" charset="-120"/>
               </a:rPr>
-              <a:t>Shaped in a way that moves through the air easily and quickly with little resistance.</a:t>
+              <a:t>Shaped in a way that moves smoothly and easily through the air with little resistance.</a:t>
             </a:r>
             <a:endParaRPr lang="en-US" sz="1200" dirty="0"/>
           </a:p>
@@ -43672,7 +42961,7 @@
                 <a:ea typeface="Trebuchet MS" pitchFamily="34" charset="-122"/>
                 <a:cs typeface="Trebuchet MS" pitchFamily="34" charset="-120"/>
               </a:rPr>
-              <a:t>aerobics</a:t>
+              <a:t>aeroplane</a:t>
             </a:r>
             <a:endParaRPr lang="en-US" sz="1200" dirty="0"/>
           </a:p>
@@ -43738,7 +43027,7 @@
                 <a:ea typeface="Calibri" pitchFamily="34" charset="-122"/>
                 <a:cs typeface="Calibri" pitchFamily="34" charset="-120"/>
               </a:rPr>
-              <a:t>The science and study of designing and flying aircraft.</a:t>
+              <a:t>A container that sprays tiny droplets of liquid into the air when you press a button.</a:t>
             </a:r>
             <a:endParaRPr lang="en-US" sz="1200" dirty="0"/>
           </a:p>
@@ -43811,7 +43100,7 @@
                 <a:ea typeface="Trebuchet MS" pitchFamily="34" charset="-122"/>
                 <a:cs typeface="Trebuchet MS" pitchFamily="34" charset="-120"/>
               </a:rPr>
-              <a:t>aerosol</a:t>
+              <a:t>aeronautics</a:t>
             </a:r>
             <a:endParaRPr lang="en-US" sz="1200" dirty="0"/>
           </a:p>
@@ -43877,7 +43166,7 @@
                 <a:ea typeface="Calibri" pitchFamily="34" charset="-122"/>
                 <a:cs typeface="Calibri" pitchFamily="34" charset="-120"/>
               </a:rPr>
-              <a:t>A curved surface, like an aeroplane wing, that is shaped to create lift when moving through air.</a:t>
+              <a:t>The industry and science involving aircraft and travel beyond Earth's atmosphere.</a:t>
             </a:r>
             <a:endParaRPr lang="en-US" sz="1200" dirty="0"/>
           </a:p>
@@ -43950,7 +43239,7 @@
                 <a:ea typeface="Trebuchet MS" pitchFamily="34" charset="-122"/>
                 <a:cs typeface="Trebuchet MS" pitchFamily="34" charset="-120"/>
               </a:rPr>
-              <a:t>aeronautics</a:t>
+              <a:t>aerosol</a:t>
             </a:r>
             <a:endParaRPr lang="en-US" sz="1200" dirty="0"/>
           </a:p>
@@ -44016,7 +43305,7 @@
                 <a:ea typeface="Calibri" pitchFamily="34" charset="-122"/>
                 <a:cs typeface="Calibri" pitchFamily="34" charset="-120"/>
               </a:rPr>
-              <a:t>A can that sprays liquid in a fine mist using pressurised gas, like a deodorant or spray paint.</a:t>
+              <a:t>The science and study of how aircraft fly and how they are built.</a:t>
             </a:r>
             <a:endParaRPr lang="en-US" sz="1200" dirty="0"/>
           </a:p>
@@ -44155,7 +43444,7 @@
                 <a:ea typeface="Calibri" pitchFamily="34" charset="-122"/>
                 <a:cs typeface="Calibri" pitchFamily="34" charset="-120"/>
               </a:rPr>
-              <a:t>A small airfield or airport where aircraft take off and land.</a:t>
+              <a:t>A curved surface, like a wing, designed to create lift as air flows over it.</a:t>
             </a:r>
             <a:endParaRPr lang="en-US" sz="1200" dirty="0"/>
           </a:p>
@@ -44228,7 +43517,7 @@
                 <a:ea typeface="Trebuchet MS" pitchFamily="34" charset="-122"/>
                 <a:cs typeface="Trebuchet MS" pitchFamily="34" charset="-120"/>
               </a:rPr>
-              <a:t>aerofoil</a:t>
+              <a:t>aerospace</a:t>
             </a:r>
             <a:endParaRPr lang="en-US" sz="1200" dirty="0"/>
           </a:p>
@@ -44294,7 +43583,7 @@
                 <a:ea typeface="Calibri" pitchFamily="34" charset="-122"/>
                 <a:cs typeface="Calibri" pitchFamily="34" charset="-120"/>
               </a:rPr>
-              <a:t>A flying vehicle with wings that carries people or cargo through the air.</a:t>
+              <a:t>A type of energetic exercise done to music that makes your heart and lungs work hard.</a:t>
             </a:r>
             <a:endParaRPr lang="en-US" sz="1200" dirty="0"/>
           </a:p>
@@ -44367,7 +43656,7 @@
                 <a:ea typeface="Trebuchet MS" pitchFamily="34" charset="-122"/>
                 <a:cs typeface="Trebuchet MS" pitchFamily="34" charset="-120"/>
               </a:rPr>
-              <a:t>aerodrome</a:t>
+              <a:t>aerofoil</a:t>
             </a:r>
             <a:endParaRPr lang="en-US" sz="1200" dirty="0"/>
           </a:p>
@@ -44433,7 +43722,7 @@
                 <a:ea typeface="Calibri" pitchFamily="34" charset="-122"/>
                 <a:cs typeface="Calibri" pitchFamily="34" charset="-120"/>
               </a:rPr>
-              <a:t>A type of energetic exercise that gets your heart pumping and uses lots of oxygen.</a:t>
+              <a:t>A large flying machine with wings and engines that carries people or cargo through the air.</a:t>
             </a:r>
             <a:endParaRPr lang="en-US" sz="1200" dirty="0"/>
           </a:p>
@@ -44725,7 +44014,7 @@
                 <a:ea typeface="Calibri" pitchFamily="34" charset="-122"/>
                 <a:cs typeface="Calibri" pitchFamily="34" charset="-120"/>
               </a:rPr>
-              <a:t>Word Labs  •  wordlabs.app  •  Root: 'aero' = air, atmosphere, aircraft</a:t>
+              <a:t>Word Labs  •  wordlabs.app  •  Root: 'aero' = air or aircraft</a:t>
             </a:r>
             <a:endParaRPr lang="en-US" sz="800" dirty="0"/>
           </a:p>
@@ -45256,7 +44545,7 @@
                 <a:ea typeface="Calibri" pitchFamily="34" charset="-122"/>
                 <a:cs typeface="Calibri" pitchFamily="34" charset="-120"/>
               </a:rPr>
-              <a:t>The scientist sprayed an aerosol mist over the plants as part of the experiment.</a:t>
+              <a:t>The scientist studied aerospace engineering because she dreamed of designing rockets one day.</a:t>
             </a:r>
             <a:endParaRPr lang="en-US" sz="1500" dirty="0"/>
           </a:p>
